--- a/Equip_28/Results/Analisis_PAP_and_ABL_RapidExpres.pptx
+++ b/Equip_28/Results/Analisis_PAP_and_ABL_RapidExpres.pptx
@@ -8813,15 +8813,7 @@
           <a:p>
             <a:r>
               <a:rPr lang="es-ES" dirty="0"/>
-              <a:t>Estrategias </a:t>
-            </a:r>
-            <a:r>
-              <a:rPr lang="es-ES"/>
-              <a:t>para reducir el </a:t>
-            </a:r>
-            <a:r>
-              <a:rPr lang="es-ES" dirty="0"/>
-              <a:t>Ausentismo</a:t>
+              <a:t>Estrategias para reducir el Ausentismo</a:t>
             </a:r>
           </a:p>
         </p:txBody>
@@ -10160,28 +10152,173 @@
           </a:p>
         </p:txBody>
       </p:sp>
-      <p:sp>
-        <p:nvSpPr>
-          <p:cNvPr id="4" name="Contenidor de contingut 3">
-            <a:extLst>
-              <a:ext uri="{FF2B5EF4-FFF2-40B4-BE49-F238E27FC236}">
-                <a16:creationId xmlns:a16="http://schemas.microsoft.com/office/drawing/2014/main" id="{275F812B-EEB7-4B59-91B3-9DEA9BE967FC}"/>
-              </a:ext>
-            </a:extLst>
-          </p:cNvPr>
-          <p:cNvSpPr>
-            <a:spLocks noGrp="1"/>
-          </p:cNvSpPr>
+      <p:pic>
+        <p:nvPicPr>
+          <p:cNvPr id="12" name="Contenidor de contingut 11">
+            <a:extLst>
+              <a:ext uri="{FF2B5EF4-FFF2-40B4-BE49-F238E27FC236}">
+                <a16:creationId xmlns:a16="http://schemas.microsoft.com/office/drawing/2014/main" id="{56FD9FE2-47D2-4063-8FEB-F53946440409}"/>
+              </a:ext>
+            </a:extLst>
+          </p:cNvPr>
+          <p:cNvPicPr>
+            <a:picLocks noGrp="1" noChangeAspect="1"/>
+          </p:cNvPicPr>
           <p:nvPr>
             <p:ph idx="30"/>
           </p:nvPr>
-        </p:nvSpPr>
-        <p:spPr/>
-        <p:txBody>
-          <a:bodyPr/>
+        </p:nvPicPr>
+        <p:blipFill>
+          <a:blip r:embed="rId3">
+            <a:extLst>
+              <a:ext uri="{28A0092B-C50C-407E-A947-70E740481C1C}">
+                <a14:useLocalDpi xmlns:a14="http://schemas.microsoft.com/office/drawing/2010/main" val="0"/>
+              </a:ext>
+            </a:extLst>
+          </a:blip>
+          <a:stretch>
+            <a:fillRect/>
+          </a:stretch>
+        </p:blipFill>
+        <p:spPr>
+          <a:xfrm>
+            <a:off x="499730" y="1133936"/>
+            <a:ext cx="10293629" cy="3172250"/>
+          </a:xfrm>
+        </p:spPr>
+      </p:pic>
+      <p:sp>
+        <p:nvSpPr>
+          <p:cNvPr id="14" name="QuadreDeText 13">
+            <a:extLst>
+              <a:ext uri="{FF2B5EF4-FFF2-40B4-BE49-F238E27FC236}">
+                <a16:creationId xmlns:a16="http://schemas.microsoft.com/office/drawing/2014/main" id="{4E14FB81-D1A7-478D-8CDA-C69095B97D1C}"/>
+              </a:ext>
+            </a:extLst>
+          </p:cNvPr>
+          <p:cNvSpPr txBox="1"/>
+          <p:nvPr/>
+        </p:nvSpPr>
+        <p:spPr>
+          <a:xfrm>
+            <a:off x="1031358" y="5018567"/>
+            <a:ext cx="3477875" cy="369332"/>
+          </a:xfrm>
+          <a:prstGeom prst="rect">
+            <a:avLst/>
+          </a:prstGeom>
+          <a:noFill/>
+        </p:spPr>
+        <p:txBody>
+          <a:bodyPr wrap="none" rtlCol="0">
+            <a:spAutoFit/>
+          </a:bodyPr>
           <a:lstStyle/>
           <a:p>
-            <a:endParaRPr lang="es-ES"/>
+            <a:r>
+              <a:rPr lang="es-ES" b="1" dirty="0" err="1"/>
+              <a:t>Educacion</a:t>
+            </a:r>
+            <a:r>
+              <a:rPr lang="es-ES" b="1" dirty="0"/>
+              <a:t>: </a:t>
+            </a:r>
+            <a:r>
+              <a:rPr lang="es-ES" dirty="0"/>
+              <a:t>77.8% No universitarios</a:t>
+            </a:r>
+          </a:p>
+        </p:txBody>
+      </p:sp>
+      <p:sp>
+        <p:nvSpPr>
+          <p:cNvPr id="15" name="QuadreDeText 14">
+            <a:extLst>
+              <a:ext uri="{FF2B5EF4-FFF2-40B4-BE49-F238E27FC236}">
+                <a16:creationId xmlns:a16="http://schemas.microsoft.com/office/drawing/2014/main" id="{B8FE7E1E-13BA-4867-8606-523191E93ECD}"/>
+              </a:ext>
+            </a:extLst>
+          </p:cNvPr>
+          <p:cNvSpPr txBox="1"/>
+          <p:nvPr/>
+        </p:nvSpPr>
+        <p:spPr>
+          <a:xfrm>
+            <a:off x="4947333" y="4797926"/>
+            <a:ext cx="2202975" cy="923330"/>
+          </a:xfrm>
+          <a:prstGeom prst="rect">
+            <a:avLst/>
+          </a:prstGeom>
+          <a:noFill/>
+        </p:spPr>
+        <p:txBody>
+          <a:bodyPr wrap="none" rtlCol="0">
+            <a:spAutoFit/>
+          </a:bodyPr>
+          <a:lstStyle/>
+          <a:p>
+            <a:r>
+              <a:rPr lang="es-ES" b="1" dirty="0"/>
+              <a:t>Edad media: </a:t>
+            </a:r>
+            <a:r>
+              <a:rPr lang="es-ES" dirty="0"/>
+              <a:t>38 años</a:t>
+            </a:r>
+          </a:p>
+          <a:p>
+            <a:endParaRPr lang="es-ES" b="1" dirty="0"/>
+          </a:p>
+          <a:p>
+            <a:r>
+              <a:rPr lang="es-ES" b="1" dirty="0"/>
+              <a:t>Intervalo: </a:t>
+            </a:r>
+            <a:r>
+              <a:rPr lang="es-ES" dirty="0"/>
+              <a:t>27-58 años</a:t>
+            </a:r>
+          </a:p>
+        </p:txBody>
+      </p:sp>
+      <p:sp>
+        <p:nvSpPr>
+          <p:cNvPr id="16" name="QuadreDeText 15">
+            <a:extLst>
+              <a:ext uri="{FF2B5EF4-FFF2-40B4-BE49-F238E27FC236}">
+                <a16:creationId xmlns:a16="http://schemas.microsoft.com/office/drawing/2014/main" id="{BD266384-21EC-4D1A-924D-08403B46C59F}"/>
+              </a:ext>
+            </a:extLst>
+          </p:cNvPr>
+          <p:cNvSpPr txBox="1"/>
+          <p:nvPr/>
+        </p:nvSpPr>
+        <p:spPr>
+          <a:xfrm>
+            <a:off x="7945937" y="4964686"/>
+            <a:ext cx="2223814" cy="369332"/>
+          </a:xfrm>
+          <a:prstGeom prst="rect">
+            <a:avLst/>
+          </a:prstGeom>
+          <a:noFill/>
+        </p:spPr>
+        <p:txBody>
+          <a:bodyPr wrap="none" rtlCol="0">
+            <a:spAutoFit/>
+          </a:bodyPr>
+          <a:lstStyle/>
+          <a:p>
+            <a:r>
+              <a:rPr lang="es-ES" b="1" dirty="0" err="1"/>
+              <a:t>Num</a:t>
+            </a:r>
+            <a:r>
+              <a:rPr lang="es-ES" b="1" dirty="0"/>
+              <a:t>. Hijos: entre 0-4</a:t>
+            </a:r>
+            <a:endParaRPr lang="es-ES" dirty="0"/>
           </a:p>
         </p:txBody>
       </p:sp>
@@ -10647,7 +10784,124 @@
           <a:bodyPr/>
           <a:lstStyle/>
           <a:p>
-            <a:endParaRPr lang="en-GB"/>
+            <a:r>
+              <a:rPr lang="es-ES" b="1" dirty="0">
+                <a:effectLst/>
+                <a:latin typeface="Consolas" panose="020B0609020204030204" pitchFamily="49" charset="0"/>
+              </a:rPr>
+              <a:t>Planes de </a:t>
+            </a:r>
+            <a:r>
+              <a:rPr lang="es-ES" b="1" dirty="0" err="1">
+                <a:effectLst/>
+                <a:latin typeface="Consolas" panose="020B0609020204030204" pitchFamily="49" charset="0"/>
+              </a:rPr>
+              <a:t>micro-formación</a:t>
+            </a:r>
+            <a:r>
+              <a:rPr lang="es-ES" b="1" dirty="0">
+                <a:effectLst/>
+                <a:latin typeface="Consolas" panose="020B0609020204030204" pitchFamily="49" charset="0"/>
+              </a:rPr>
+              <a:t> y </a:t>
+            </a:r>
+            <a:r>
+              <a:rPr lang="es-ES" b="1" dirty="0" err="1">
+                <a:effectLst/>
+                <a:latin typeface="Consolas" panose="020B0609020204030204" pitchFamily="49" charset="0"/>
+              </a:rPr>
+              <a:t>Upskilling</a:t>
+            </a:r>
+            <a:endParaRPr lang="es-ES" b="1" dirty="0">
+              <a:effectLst/>
+              <a:latin typeface="Consolas" panose="020B0609020204030204" pitchFamily="49" charset="0"/>
+            </a:endParaRPr>
+          </a:p>
+          <a:p>
+            <a:pPr lvl="1"/>
+            <a:r>
+              <a:rPr lang="es-ES" b="1" dirty="0">
+                <a:latin typeface="Consolas" panose="020B0609020204030204" pitchFamily="49" charset="0"/>
+              </a:rPr>
+              <a:t>Certificaciones técnicas y otros Desarrollos Professional</a:t>
+            </a:r>
+            <a:endParaRPr lang="es-ES" b="1" dirty="0">
+              <a:effectLst/>
+              <a:latin typeface="Consolas" panose="020B0609020204030204" pitchFamily="49" charset="0"/>
+            </a:endParaRPr>
+          </a:p>
+          <a:p>
+            <a:endParaRPr lang="es-ES" b="1" dirty="0">
+              <a:latin typeface="Consolas" panose="020B0609020204030204" pitchFamily="49" charset="0"/>
+            </a:endParaRPr>
+          </a:p>
+          <a:p>
+            <a:endParaRPr lang="es-ES" b="0" dirty="0">
+              <a:effectLst/>
+              <a:latin typeface="Consolas" panose="020B0609020204030204" pitchFamily="49" charset="0"/>
+            </a:endParaRPr>
+          </a:p>
+          <a:p>
+            <a:r>
+              <a:rPr lang="en-GB" b="1" dirty="0" err="1">
+                <a:latin typeface="Consolas" panose="020B0609020204030204" pitchFamily="49" charset="0"/>
+              </a:rPr>
+              <a:t>Politicas</a:t>
+            </a:r>
+            <a:r>
+              <a:rPr lang="en-GB" b="1" dirty="0">
+                <a:latin typeface="Consolas" panose="020B0609020204030204" pitchFamily="49" charset="0"/>
+              </a:rPr>
+              <a:t> de </a:t>
+            </a:r>
+            <a:r>
+              <a:rPr lang="en-GB" b="1" dirty="0" err="1">
+                <a:latin typeface="Consolas" panose="020B0609020204030204" pitchFamily="49" charset="0"/>
+              </a:rPr>
+              <a:t>conciliación</a:t>
+            </a:r>
+            <a:endParaRPr lang="en-GB" b="1" dirty="0">
+              <a:latin typeface="Consolas" panose="020B0609020204030204" pitchFamily="49" charset="0"/>
+            </a:endParaRPr>
+          </a:p>
+          <a:p>
+            <a:pPr lvl="1"/>
+            <a:r>
+              <a:rPr lang="en-GB" b="1" dirty="0" err="1">
+                <a:latin typeface="Consolas" panose="020B0609020204030204" pitchFamily="49" charset="0"/>
+              </a:rPr>
+              <a:t>Flexibilidad</a:t>
+            </a:r>
+            <a:r>
+              <a:rPr lang="en-GB" b="1" dirty="0">
+                <a:latin typeface="Consolas" panose="020B0609020204030204" pitchFamily="49" charset="0"/>
+              </a:rPr>
+              <a:t> </a:t>
+            </a:r>
+            <a:r>
+              <a:rPr lang="en-GB" b="1" dirty="0" err="1">
+                <a:latin typeface="Consolas" panose="020B0609020204030204" pitchFamily="49" charset="0"/>
+              </a:rPr>
+              <a:t>horaria</a:t>
+            </a:r>
+            <a:r>
+              <a:rPr lang="en-GB" b="1" dirty="0">
+                <a:latin typeface="Consolas" panose="020B0609020204030204" pitchFamily="49" charset="0"/>
+              </a:rPr>
+              <a:t> (</a:t>
+            </a:r>
+            <a:r>
+              <a:rPr lang="en-GB" b="1" dirty="0" err="1">
+                <a:latin typeface="Consolas" panose="020B0609020204030204" pitchFamily="49" charset="0"/>
+              </a:rPr>
+              <a:t>bolsas</a:t>
+            </a:r>
+            <a:r>
+              <a:rPr lang="en-GB" b="1" dirty="0">
+                <a:latin typeface="Consolas" panose="020B0609020204030204" pitchFamily="49" charset="0"/>
+              </a:rPr>
+              <a:t> de horas)</a:t>
+            </a:r>
           </a:p>
         </p:txBody>
       </p:sp>

--- a/Equip_28/Results/Analisis_PAP_and_ABL_RapidExpres.pptx
+++ b/Equip_28/Results/Analisis_PAP_and_ABL_RapidExpres.pptx
@@ -209,7 +209,7 @@
           <a:p>
             <a:fld id="{443A06E2-0DF3-432C-9669-7DF986ACE8BA}" type="datetimeFigureOut">
               <a:rPr lang="en-GB" smtClean="0"/>
-              <a:t>23/04/2026</a:t>
+              <a:t>24/04/2026</a:t>
             </a:fld>
             <a:endParaRPr lang="en-GB"/>
           </a:p>
@@ -1502,7 +1502,7 @@
           <a:p>
             <a:fld id="{037D434A-83FD-40C7-B814-5B722EE835FE}" type="datetimeFigureOut">
               <a:rPr lang="en-GB" smtClean="0"/>
-              <a:t>23/04/2026</a:t>
+              <a:t>24/04/2026</a:t>
             </a:fld>
             <a:endParaRPr lang="en-GB"/>
           </a:p>
@@ -1702,7 +1702,7 @@
           <a:p>
             <a:fld id="{037D434A-83FD-40C7-B814-5B722EE835FE}" type="datetimeFigureOut">
               <a:rPr lang="en-GB" smtClean="0"/>
-              <a:t>23/04/2026</a:t>
+              <a:t>24/04/2026</a:t>
             </a:fld>
             <a:endParaRPr lang="en-GB"/>
           </a:p>
@@ -1912,7 +1912,7 @@
           <a:p>
             <a:fld id="{037D434A-83FD-40C7-B814-5B722EE835FE}" type="datetimeFigureOut">
               <a:rPr lang="en-GB" smtClean="0"/>
-              <a:t>23/04/2026</a:t>
+              <a:t>24/04/2026</a:t>
             </a:fld>
             <a:endParaRPr lang="en-GB"/>
           </a:p>
@@ -5944,7 +5944,7 @@
           <a:p>
             <a:fld id="{037D434A-83FD-40C7-B814-5B722EE835FE}" type="datetimeFigureOut">
               <a:rPr lang="en-GB" smtClean="0"/>
-              <a:t>23/04/2026</a:t>
+              <a:t>24/04/2026</a:t>
             </a:fld>
             <a:endParaRPr lang="en-GB"/>
           </a:p>
@@ -6220,7 +6220,7 @@
           <a:p>
             <a:fld id="{037D434A-83FD-40C7-B814-5B722EE835FE}" type="datetimeFigureOut">
               <a:rPr lang="en-GB" smtClean="0"/>
-              <a:t>23/04/2026</a:t>
+              <a:t>24/04/2026</a:t>
             </a:fld>
             <a:endParaRPr lang="en-GB"/>
           </a:p>
@@ -6488,7 +6488,7 @@
           <a:p>
             <a:fld id="{037D434A-83FD-40C7-B814-5B722EE835FE}" type="datetimeFigureOut">
               <a:rPr lang="en-GB" smtClean="0"/>
-              <a:t>23/04/2026</a:t>
+              <a:t>24/04/2026</a:t>
             </a:fld>
             <a:endParaRPr lang="en-GB"/>
           </a:p>
@@ -6903,7 +6903,7 @@
           <a:p>
             <a:fld id="{037D434A-83FD-40C7-B814-5B722EE835FE}" type="datetimeFigureOut">
               <a:rPr lang="en-GB" smtClean="0"/>
-              <a:t>23/04/2026</a:t>
+              <a:t>24/04/2026</a:t>
             </a:fld>
             <a:endParaRPr lang="en-GB"/>
           </a:p>
@@ -7045,7 +7045,7 @@
           <a:p>
             <a:fld id="{037D434A-83FD-40C7-B814-5B722EE835FE}" type="datetimeFigureOut">
               <a:rPr lang="en-GB" smtClean="0"/>
-              <a:t>23/04/2026</a:t>
+              <a:t>24/04/2026</a:t>
             </a:fld>
             <a:endParaRPr lang="en-GB"/>
           </a:p>
@@ -7158,7 +7158,7 @@
           <a:p>
             <a:fld id="{037D434A-83FD-40C7-B814-5B722EE835FE}" type="datetimeFigureOut">
               <a:rPr lang="en-GB" smtClean="0"/>
-              <a:t>23/04/2026</a:t>
+              <a:t>24/04/2026</a:t>
             </a:fld>
             <a:endParaRPr lang="en-GB"/>
           </a:p>
@@ -7471,7 +7471,7 @@
           <a:p>
             <a:fld id="{037D434A-83FD-40C7-B814-5B722EE835FE}" type="datetimeFigureOut">
               <a:rPr lang="en-GB" smtClean="0"/>
-              <a:t>23/04/2026</a:t>
+              <a:t>24/04/2026</a:t>
             </a:fld>
             <a:endParaRPr lang="en-GB"/>
           </a:p>
@@ -7760,7 +7760,7 @@
           <a:p>
             <a:fld id="{037D434A-83FD-40C7-B814-5B722EE835FE}" type="datetimeFigureOut">
               <a:rPr lang="en-GB" smtClean="0"/>
-              <a:t>23/04/2026</a:t>
+              <a:t>24/04/2026</a:t>
             </a:fld>
             <a:endParaRPr lang="en-GB"/>
           </a:p>
@@ -8003,7 +8003,7 @@
           <a:p>
             <a:fld id="{037D434A-83FD-40C7-B814-5B722EE835FE}" type="datetimeFigureOut">
               <a:rPr lang="en-GB" smtClean="0"/>
-              <a:t>23/04/2026</a:t>
+              <a:t>24/04/2026</a:t>
             </a:fld>
             <a:endParaRPr lang="en-GB"/>
           </a:p>
@@ -8676,7 +8676,23 @@
                   <a:schemeClr val="bg1"/>
                 </a:solidFill>
               </a:rPr>
-              <a:t> para reducer </a:t>
+              <a:t> para </a:t>
+            </a:r>
+            <a:r>
+              <a:rPr lang="en-US" dirty="0" err="1">
+                <a:solidFill>
+                  <a:schemeClr val="bg1"/>
+                </a:solidFill>
+              </a:rPr>
+              <a:t>reducir</a:t>
+            </a:r>
+            <a:r>
+              <a:rPr lang="en-US" dirty="0">
+                <a:solidFill>
+                  <a:schemeClr val="bg1"/>
+                </a:solidFill>
+              </a:rPr>
+              <a:t> </a:t>
             </a:r>
             <a:r>
               <a:rPr lang="en-US" dirty="0" err="1">
@@ -8739,10 +8755,6 @@
           <a:bodyPr/>
           <a:lstStyle/>
           <a:p>
-            <a:r>
-              <a:rPr lang="en-US" dirty="0" err="1"/>
-              <a:t>xxxxxxxx</a:t>
-            </a:r>
             <a:endParaRPr lang="en-US" dirty="0"/>
           </a:p>
         </p:txBody>
@@ -9047,12 +9059,209 @@
             <p:ph idx="30"/>
           </p:nvPr>
         </p:nvSpPr>
-        <p:spPr/>
+        <p:spPr>
+          <a:xfrm>
+            <a:off x="914398" y="2128603"/>
+            <a:ext cx="9653667" cy="3374136"/>
+          </a:xfrm>
+        </p:spPr>
         <p:txBody>
           <a:bodyPr/>
           <a:lstStyle/>
           <a:p>
+            <a:pPr marL="457200" lvl="1" indent="0">
+              <a:buNone/>
+            </a:pPr>
+            <a:r>
+              <a:rPr lang="es-ES" dirty="0"/>
+              <a:t>. </a:t>
+            </a:r>
+            <a:r>
+              <a:rPr lang="es-ES" b="1" dirty="0"/>
+              <a:t>Invierno</a:t>
+            </a:r>
+            <a:r>
+              <a:rPr lang="es-ES" dirty="0"/>
+              <a:t> - Campañas de salud, ergonomía, prevención de lesiones, vacunación</a:t>
+            </a:r>
+            <a:r>
+              <a:rPr lang="es-ES" b="1" dirty="0"/>
+              <a:t>.</a:t>
+            </a:r>
+          </a:p>
+          <a:p>
+            <a:pPr marL="457200" lvl="1" indent="0">
+              <a:buNone/>
+            </a:pPr>
             <a:endParaRPr lang="en-GB" dirty="0"/>
+          </a:p>
+          <a:p>
+            <a:pPr marL="457200" lvl="1" indent="0">
+              <a:buNone/>
+            </a:pPr>
+            <a:r>
+              <a:rPr lang="en-GB" dirty="0"/>
+              <a:t>. </a:t>
+            </a:r>
+            <a:r>
+              <a:rPr lang="en-GB" b="1" dirty="0"/>
+              <a:t>Meses </a:t>
+            </a:r>
+            <a:r>
+              <a:rPr lang="en-GB" b="1" dirty="0" err="1"/>
+              <a:t>pico</a:t>
+            </a:r>
+            <a:r>
+              <a:rPr lang="en-GB" b="1" dirty="0"/>
+              <a:t> (Marzo, Abril, Julio y </a:t>
+            </a:r>
+            <a:r>
+              <a:rPr lang="en-GB" b="1" dirty="0" err="1"/>
+              <a:t>Noviembre</a:t>
+            </a:r>
+            <a:r>
+              <a:rPr lang="en-GB" b="1" dirty="0"/>
+              <a:t>) </a:t>
+            </a:r>
+            <a:r>
+              <a:rPr lang="en-GB" dirty="0"/>
+              <a:t>- </a:t>
+            </a:r>
+            <a:r>
+              <a:rPr lang="en-GB" dirty="0" err="1"/>
+              <a:t>Redimensionar</a:t>
+            </a:r>
+            <a:r>
+              <a:rPr lang="en-GB" dirty="0"/>
+              <a:t> </a:t>
+            </a:r>
+            <a:r>
+              <a:rPr lang="en-GB" dirty="0" err="1"/>
+              <a:t>período</a:t>
+            </a:r>
+            <a:r>
+              <a:rPr lang="en-GB" dirty="0"/>
+              <a:t> </a:t>
+            </a:r>
+            <a:r>
+              <a:rPr lang="en-GB" dirty="0" err="1"/>
+              <a:t>vacacional</a:t>
+            </a:r>
+            <a:r>
+              <a:rPr lang="en-GB" dirty="0"/>
+              <a:t> </a:t>
+            </a:r>
+            <a:r>
+              <a:rPr lang="en-GB" dirty="0" err="1"/>
+              <a:t>acorde</a:t>
+            </a:r>
+            <a:r>
+              <a:rPr lang="en-GB" dirty="0"/>
+              <a:t> con </a:t>
+            </a:r>
+            <a:r>
+              <a:rPr lang="en-GB" dirty="0" err="1"/>
+              <a:t>los</a:t>
+            </a:r>
+            <a:r>
+              <a:rPr lang="en-GB" dirty="0"/>
+              <a:t> meses </a:t>
+            </a:r>
+            <a:r>
+              <a:rPr lang="en-GB" dirty="0" err="1"/>
+              <a:t>pico</a:t>
+            </a:r>
+            <a:r>
+              <a:rPr lang="en-GB" dirty="0"/>
+              <a:t> de </a:t>
+            </a:r>
+            <a:r>
+              <a:rPr lang="en-GB" dirty="0" err="1"/>
+              <a:t>ausentísmo</a:t>
+            </a:r>
+            <a:r>
+              <a:rPr lang="en-GB" dirty="0"/>
+              <a:t> (Marzo, Abril, Julio y Noviembe</a:t>
+            </a:r>
+          </a:p>
+          <a:p>
+            <a:pPr marL="457200" lvl="1" indent="0">
+              <a:buNone/>
+            </a:pPr>
+            <a:endParaRPr lang="en-GB" dirty="0"/>
+          </a:p>
+          <a:p>
+            <a:pPr marL="457200" lvl="1" indent="0">
+              <a:buNone/>
+            </a:pPr>
+            <a:r>
+              <a:rPr lang="en-GB" dirty="0"/>
+              <a:t>. </a:t>
+            </a:r>
+            <a:r>
+              <a:rPr lang="en-GB" b="1" dirty="0"/>
+              <a:t>Mayor </a:t>
+            </a:r>
+            <a:r>
+              <a:rPr lang="en-GB" b="1" dirty="0" err="1"/>
+              <a:t>acumulo</a:t>
+            </a:r>
+            <a:r>
+              <a:rPr lang="en-GB" b="1" dirty="0"/>
+              <a:t> de horas </a:t>
+            </a:r>
+            <a:r>
+              <a:rPr lang="en-GB" dirty="0"/>
+              <a:t>- </a:t>
+            </a:r>
+            <a:r>
+              <a:rPr lang="en-GB" dirty="0" err="1"/>
+              <a:t>Coordinación</a:t>
+            </a:r>
+            <a:r>
+              <a:rPr lang="en-GB" dirty="0"/>
+              <a:t> con </a:t>
+            </a:r>
+            <a:r>
+              <a:rPr lang="en-GB" dirty="0" err="1"/>
+              <a:t>servicios</a:t>
+            </a:r>
+            <a:r>
+              <a:rPr lang="en-GB" dirty="0"/>
+              <a:t> </a:t>
+            </a:r>
+            <a:r>
+              <a:rPr lang="en-GB" dirty="0" err="1"/>
+              <a:t>médicos</a:t>
+            </a:r>
+            <a:r>
+              <a:rPr lang="en-GB" dirty="0"/>
+              <a:t> para </a:t>
+            </a:r>
+            <a:r>
+              <a:rPr lang="en-GB" dirty="0" err="1"/>
+              <a:t>seguimiento</a:t>
+            </a:r>
+            <a:r>
+              <a:rPr lang="en-GB" dirty="0"/>
+              <a:t> </a:t>
+            </a:r>
+            <a:r>
+              <a:rPr lang="en-GB" dirty="0" err="1"/>
+              <a:t>temprano</a:t>
+            </a:r>
+            <a:r>
+              <a:rPr lang="en-GB" dirty="0"/>
+              <a:t> de </a:t>
+            </a:r>
+            <a:r>
+              <a:rPr lang="en-GB" dirty="0" err="1"/>
+              <a:t>casos</a:t>
+            </a:r>
+            <a:r>
+              <a:rPr lang="en-GB" dirty="0"/>
+              <a:t> &gt; 24h</a:t>
+            </a:r>
           </a:p>
         </p:txBody>
       </p:sp>
@@ -9127,18 +9336,13 @@
           <a:lstStyle/>
           <a:p>
             <a:r>
-              <a:rPr lang="en-US" dirty="0" err="1">
+              <a:rPr lang="en-US" dirty="0">
                 <a:solidFill>
                   <a:schemeClr val="bg1"/>
                 </a:solidFill>
               </a:rPr>
-              <a:t>Conclusiones</a:t>
-            </a:r>
-            <a:endParaRPr lang="en-US" dirty="0">
-              <a:solidFill>
-                <a:schemeClr val="bg1"/>
-              </a:solidFill>
-            </a:endParaRPr>
+              <a:t>KPIs</a:t>
+            </a:r>
           </a:p>
         </p:txBody>
       </p:sp>
@@ -9168,10 +9372,6 @@
           <a:bodyPr/>
           <a:lstStyle/>
           <a:p>
-            <a:r>
-              <a:rPr lang="en-US" dirty="0" err="1"/>
-              <a:t>xxxxxxxx</a:t>
-            </a:r>
             <a:endParaRPr lang="en-US" dirty="0"/>
           </a:p>
         </p:txBody>
@@ -9230,15 +9430,18 @@
         </p:nvSpPr>
         <p:spPr>
           <a:xfrm>
-            <a:off x="914400" y="731520"/>
-            <a:ext cx="4663440" cy="1737360"/>
+            <a:off x="529216" y="506667"/>
+            <a:ext cx="4463696" cy="692546"/>
           </a:xfrm>
         </p:spPr>
         <p:txBody>
           <a:bodyPr/>
           <a:lstStyle/>
           <a:p>
-            <a:endParaRPr lang="en-US" dirty="0"/>
+            <a:r>
+              <a:rPr lang="en-US" dirty="0"/>
+              <a:t>KPIs</a:t>
+            </a:r>
           </a:p>
         </p:txBody>
       </p:sp>
@@ -9260,14 +9463,50 @@
         </p:nvSpPr>
         <p:spPr>
           <a:xfrm>
-            <a:off x="5852160" y="731520"/>
-            <a:ext cx="5486400" cy="1737360"/>
+            <a:off x="598420" y="1722370"/>
+            <a:ext cx="4078512" cy="467693"/>
           </a:xfrm>
         </p:spPr>
         <p:txBody>
-          <a:bodyPr/>
+          <a:bodyPr>
+            <a:normAutofit/>
+          </a:bodyPr>
           <a:lstStyle/>
           <a:p>
+            <a:pPr marL="0" indent="0" algn="ctr">
+              <a:buNone/>
+            </a:pPr>
+            <a:r>
+              <a:rPr lang="en-US" b="1" dirty="0"/>
+              <a:t>% </a:t>
+            </a:r>
+            <a:r>
+              <a:rPr lang="en-US" b="1" dirty="0" err="1"/>
+              <a:t>Empleados</a:t>
+            </a:r>
+            <a:r>
+              <a:rPr lang="en-US" b="1" dirty="0"/>
+              <a:t> </a:t>
+            </a:r>
+            <a:r>
+              <a:rPr lang="en-US" b="1" dirty="0" err="1"/>
+              <a:t>ausentes</a:t>
+            </a:r>
+            <a:endParaRPr lang="en-US" b="1" dirty="0"/>
+          </a:p>
+          <a:p>
+            <a:endParaRPr lang="en-US" dirty="0"/>
+          </a:p>
+          <a:p>
+            <a:endParaRPr lang="en-US" dirty="0"/>
+          </a:p>
+          <a:p>
+            <a:endParaRPr lang="en-US" dirty="0"/>
+          </a:p>
+          <a:p>
+            <a:pPr marL="0" indent="0">
+              <a:buNone/>
+            </a:pPr>
             <a:endParaRPr lang="en-US" dirty="0"/>
           </a:p>
         </p:txBody>
@@ -9487,26 +9726,878 @@
       </p:sp>
       <p:sp>
         <p:nvSpPr>
-          <p:cNvPr id="5" name="Content Placeholder 4">
-            <a:extLst>
-              <a:ext uri="{FF2B5EF4-FFF2-40B4-BE49-F238E27FC236}">
-                <a16:creationId xmlns:a16="http://schemas.microsoft.com/office/drawing/2014/main" id="{68E02865-2722-71C6-B58E-F92A2A4DCBA1}"/>
-              </a:ext>
-            </a:extLst>
-          </p:cNvPr>
-          <p:cNvSpPr>
-            <a:spLocks noGrp="1"/>
-          </p:cNvSpPr>
-          <p:nvPr>
-            <p:ph idx="30"/>
-          </p:nvPr>
-        </p:nvSpPr>
-        <p:spPr/>
-        <p:txBody>
-          <a:bodyPr/>
+          <p:cNvPr id="4" name="Hexagon 3">
+            <a:extLst>
+              <a:ext uri="{FF2B5EF4-FFF2-40B4-BE49-F238E27FC236}">
+                <a16:creationId xmlns:a16="http://schemas.microsoft.com/office/drawing/2014/main" id="{01F53177-39F7-A239-33CD-3B0260322C63}"/>
+              </a:ext>
+            </a:extLst>
+          </p:cNvPr>
+          <p:cNvSpPr/>
+          <p:nvPr/>
+        </p:nvSpPr>
+        <p:spPr>
+          <a:xfrm>
+            <a:off x="2200808" y="2312233"/>
+            <a:ext cx="1280410" cy="1083039"/>
+          </a:xfrm>
+          <a:prstGeom prst="hexagon">
+            <a:avLst/>
+          </a:prstGeom>
+        </p:spPr>
+        <p:style>
+          <a:lnRef idx="2">
+            <a:schemeClr val="accent1">
+              <a:shade val="15000"/>
+            </a:schemeClr>
+          </a:lnRef>
+          <a:fillRef idx="1">
+            <a:schemeClr val="accent1"/>
+          </a:fillRef>
+          <a:effectRef idx="0">
+            <a:schemeClr val="accent1"/>
+          </a:effectRef>
+          <a:fontRef idx="minor">
+            <a:schemeClr val="lt1"/>
+          </a:fontRef>
+        </p:style>
+        <p:txBody>
+          <a:bodyPr rtlCol="0" anchor="ctr"/>
           <a:lstStyle/>
           <a:p>
-            <a:endParaRPr lang="en-GB"/>
+            <a:pPr algn="ctr"/>
+            <a:r>
+              <a:rPr lang="es-ES" dirty="0"/>
+              <a:t>91.67%</a:t>
+            </a:r>
+            <a:endParaRPr lang="en-GB" dirty="0"/>
+          </a:p>
+        </p:txBody>
+      </p:sp>
+      <p:sp>
+        <p:nvSpPr>
+          <p:cNvPr id="9" name="Content Placeholder 9">
+            <a:extLst>
+              <a:ext uri="{FF2B5EF4-FFF2-40B4-BE49-F238E27FC236}">
+                <a16:creationId xmlns:a16="http://schemas.microsoft.com/office/drawing/2014/main" id="{D4EDED24-0D6F-E763-C7E6-094DBD036F12}"/>
+              </a:ext>
+            </a:extLst>
+          </p:cNvPr>
+          <p:cNvSpPr txBox="1">
+            <a:spLocks/>
+          </p:cNvSpPr>
+          <p:nvPr/>
+        </p:nvSpPr>
+        <p:spPr>
+          <a:xfrm>
+            <a:off x="5972297" y="1661284"/>
+            <a:ext cx="4263953" cy="589863"/>
+          </a:xfrm>
+          <a:prstGeom prst="rect">
+            <a:avLst/>
+          </a:prstGeom>
+        </p:spPr>
+        <p:txBody>
+          <a:bodyPr vert="horz" lIns="91440" tIns="45720" rIns="91440" bIns="45720" rtlCol="0">
+            <a:normAutofit/>
+          </a:bodyPr>
+          <a:lstStyle>
+            <a:lvl1pPr marL="228600" indent="-228600" algn="l" defTabSz="914400" rtl="0" eaLnBrk="1" latinLnBrk="0" hangingPunct="1">
+              <a:lnSpc>
+                <a:spcPct val="90000"/>
+              </a:lnSpc>
+              <a:spcBef>
+                <a:spcPts val="1000"/>
+              </a:spcBef>
+              <a:buFont typeface="Arial" panose="020B0604020202020204" pitchFamily="34" charset="0"/>
+              <a:buChar char="•"/>
+              <a:defRPr sz="1800" kern="1200">
+                <a:solidFill>
+                  <a:schemeClr val="tx1"/>
+                </a:solidFill>
+                <a:latin typeface="+mn-lt"/>
+                <a:ea typeface="+mn-ea"/>
+                <a:cs typeface="+mn-cs"/>
+              </a:defRPr>
+            </a:lvl1pPr>
+            <a:lvl2pPr marL="685800" indent="-228600" algn="l" defTabSz="914400" rtl="0" eaLnBrk="1" latinLnBrk="0" hangingPunct="1">
+              <a:lnSpc>
+                <a:spcPct val="90000"/>
+              </a:lnSpc>
+              <a:spcBef>
+                <a:spcPts val="500"/>
+              </a:spcBef>
+              <a:buFont typeface="Arial" panose="020B0604020202020204" pitchFamily="34" charset="0"/>
+              <a:buChar char="•"/>
+              <a:defRPr sz="1800" kern="1200">
+                <a:solidFill>
+                  <a:schemeClr val="tx1"/>
+                </a:solidFill>
+                <a:latin typeface="+mn-lt"/>
+                <a:ea typeface="+mn-ea"/>
+                <a:cs typeface="+mn-cs"/>
+              </a:defRPr>
+            </a:lvl2pPr>
+            <a:lvl3pPr marL="1143000" indent="-228600" algn="l" defTabSz="914400" rtl="0" eaLnBrk="1" latinLnBrk="0" hangingPunct="1">
+              <a:lnSpc>
+                <a:spcPct val="90000"/>
+              </a:lnSpc>
+              <a:spcBef>
+                <a:spcPts val="500"/>
+              </a:spcBef>
+              <a:buFont typeface="Arial" panose="020B0604020202020204" pitchFamily="34" charset="0"/>
+              <a:buChar char="•"/>
+              <a:defRPr sz="1800" kern="1200">
+                <a:solidFill>
+                  <a:schemeClr val="tx1"/>
+                </a:solidFill>
+                <a:latin typeface="+mn-lt"/>
+                <a:ea typeface="+mn-ea"/>
+                <a:cs typeface="+mn-cs"/>
+              </a:defRPr>
+            </a:lvl3pPr>
+            <a:lvl4pPr marL="1600200" indent="-228600" algn="l" defTabSz="914400" rtl="0" eaLnBrk="1" latinLnBrk="0" hangingPunct="1">
+              <a:lnSpc>
+                <a:spcPct val="90000"/>
+              </a:lnSpc>
+              <a:spcBef>
+                <a:spcPts val="500"/>
+              </a:spcBef>
+              <a:buFont typeface="Arial" panose="020B0604020202020204" pitchFamily="34" charset="0"/>
+              <a:buChar char="•"/>
+              <a:defRPr sz="1800" kern="1200">
+                <a:solidFill>
+                  <a:schemeClr val="tx1"/>
+                </a:solidFill>
+                <a:latin typeface="+mn-lt"/>
+                <a:ea typeface="+mn-ea"/>
+                <a:cs typeface="+mn-cs"/>
+              </a:defRPr>
+            </a:lvl4pPr>
+            <a:lvl5pPr marL="2057400" indent="-228600" algn="l" defTabSz="914400" rtl="0" eaLnBrk="1" latinLnBrk="0" hangingPunct="1">
+              <a:lnSpc>
+                <a:spcPct val="90000"/>
+              </a:lnSpc>
+              <a:spcBef>
+                <a:spcPts val="500"/>
+              </a:spcBef>
+              <a:buFont typeface="Arial" panose="020B0604020202020204" pitchFamily="34" charset="0"/>
+              <a:buChar char="•"/>
+              <a:defRPr sz="1800" kern="1200">
+                <a:solidFill>
+                  <a:schemeClr val="tx1"/>
+                </a:solidFill>
+                <a:latin typeface="+mn-lt"/>
+                <a:ea typeface="+mn-ea"/>
+                <a:cs typeface="+mn-cs"/>
+              </a:defRPr>
+            </a:lvl5pPr>
+            <a:lvl6pPr marL="2514600" indent="-228600" algn="l" defTabSz="914400" rtl="0" eaLnBrk="1" latinLnBrk="0" hangingPunct="1">
+              <a:lnSpc>
+                <a:spcPct val="90000"/>
+              </a:lnSpc>
+              <a:spcBef>
+                <a:spcPts val="500"/>
+              </a:spcBef>
+              <a:buFont typeface="Arial" panose="020B0604020202020204" pitchFamily="34" charset="0"/>
+              <a:buChar char="•"/>
+              <a:defRPr sz="1800" kern="1200">
+                <a:solidFill>
+                  <a:schemeClr val="tx1"/>
+                </a:solidFill>
+                <a:latin typeface="+mn-lt"/>
+                <a:ea typeface="+mn-ea"/>
+                <a:cs typeface="+mn-cs"/>
+              </a:defRPr>
+            </a:lvl6pPr>
+            <a:lvl7pPr marL="2971800" indent="-228600" algn="l" defTabSz="914400" rtl="0" eaLnBrk="1" latinLnBrk="0" hangingPunct="1">
+              <a:lnSpc>
+                <a:spcPct val="90000"/>
+              </a:lnSpc>
+              <a:spcBef>
+                <a:spcPts val="500"/>
+              </a:spcBef>
+              <a:buFont typeface="Arial" panose="020B0604020202020204" pitchFamily="34" charset="0"/>
+              <a:buChar char="•"/>
+              <a:defRPr sz="1800" kern="1200">
+                <a:solidFill>
+                  <a:schemeClr val="tx1"/>
+                </a:solidFill>
+                <a:latin typeface="+mn-lt"/>
+                <a:ea typeface="+mn-ea"/>
+                <a:cs typeface="+mn-cs"/>
+              </a:defRPr>
+            </a:lvl7pPr>
+            <a:lvl8pPr marL="3429000" indent="-228600" algn="l" defTabSz="914400" rtl="0" eaLnBrk="1" latinLnBrk="0" hangingPunct="1">
+              <a:lnSpc>
+                <a:spcPct val="90000"/>
+              </a:lnSpc>
+              <a:spcBef>
+                <a:spcPts val="500"/>
+              </a:spcBef>
+              <a:buFont typeface="Arial" panose="020B0604020202020204" pitchFamily="34" charset="0"/>
+              <a:buChar char="•"/>
+              <a:defRPr sz="1800" kern="1200">
+                <a:solidFill>
+                  <a:schemeClr val="tx1"/>
+                </a:solidFill>
+                <a:latin typeface="+mn-lt"/>
+                <a:ea typeface="+mn-ea"/>
+                <a:cs typeface="+mn-cs"/>
+              </a:defRPr>
+            </a:lvl8pPr>
+            <a:lvl9pPr marL="3886200" indent="-228600" algn="l" defTabSz="914400" rtl="0" eaLnBrk="1" latinLnBrk="0" hangingPunct="1">
+              <a:lnSpc>
+                <a:spcPct val="90000"/>
+              </a:lnSpc>
+              <a:spcBef>
+                <a:spcPts val="500"/>
+              </a:spcBef>
+              <a:buFont typeface="Arial" panose="020B0604020202020204" pitchFamily="34" charset="0"/>
+              <a:buChar char="•"/>
+              <a:defRPr sz="1800" kern="1200">
+                <a:solidFill>
+                  <a:schemeClr val="tx1"/>
+                </a:solidFill>
+                <a:latin typeface="+mn-lt"/>
+                <a:ea typeface="+mn-ea"/>
+                <a:cs typeface="+mn-cs"/>
+              </a:defRPr>
+            </a:lvl9pPr>
+          </a:lstStyle>
+          <a:p>
+            <a:pPr marL="0" indent="0" algn="ctr">
+              <a:buNone/>
+            </a:pPr>
+            <a:r>
+              <a:rPr lang="en-US" b="1" dirty="0"/>
+              <a:t>Mes </a:t>
+            </a:r>
+            <a:r>
+              <a:rPr lang="en-US" b="1" dirty="0" err="1"/>
+              <a:t>pico</a:t>
+            </a:r>
+            <a:r>
+              <a:rPr lang="en-US" b="1" dirty="0"/>
+              <a:t> carga </a:t>
+            </a:r>
+            <a:r>
+              <a:rPr lang="en-US" b="1" dirty="0" err="1"/>
+              <a:t>ausencia</a:t>
+            </a:r>
+            <a:endParaRPr lang="en-US" b="1" dirty="0"/>
+          </a:p>
+          <a:p>
+            <a:pPr algn="ctr"/>
+            <a:endParaRPr lang="en-US" b="1" dirty="0"/>
+          </a:p>
+          <a:p>
+            <a:endParaRPr lang="en-US" dirty="0"/>
+          </a:p>
+        </p:txBody>
+      </p:sp>
+      <p:sp>
+        <p:nvSpPr>
+          <p:cNvPr id="11" name="Rectangle 10">
+            <a:extLst>
+              <a:ext uri="{FF2B5EF4-FFF2-40B4-BE49-F238E27FC236}">
+                <a16:creationId xmlns:a16="http://schemas.microsoft.com/office/drawing/2014/main" id="{55F28533-E21A-7FD1-BD00-211ED959FF57}"/>
+              </a:ext>
+            </a:extLst>
+          </p:cNvPr>
+          <p:cNvSpPr/>
+          <p:nvPr/>
+        </p:nvSpPr>
+        <p:spPr>
+          <a:xfrm>
+            <a:off x="7328317" y="2345961"/>
+            <a:ext cx="1282283" cy="1083039"/>
+          </a:xfrm>
+          <a:prstGeom prst="rect">
+            <a:avLst/>
+          </a:prstGeom>
+        </p:spPr>
+        <p:style>
+          <a:lnRef idx="2">
+            <a:schemeClr val="accent1">
+              <a:shade val="15000"/>
+            </a:schemeClr>
+          </a:lnRef>
+          <a:fillRef idx="1">
+            <a:schemeClr val="accent1"/>
+          </a:fillRef>
+          <a:effectRef idx="0">
+            <a:schemeClr val="accent1"/>
+          </a:effectRef>
+          <a:fontRef idx="minor">
+            <a:schemeClr val="lt1"/>
+          </a:fontRef>
+        </p:style>
+        <p:txBody>
+          <a:bodyPr rtlCol="0" anchor="ctr"/>
+          <a:lstStyle/>
+          <a:p>
+            <a:pPr algn="ctr"/>
+            <a:r>
+              <a:rPr lang="es-ES" dirty="0"/>
+              <a:t>Marzo </a:t>
+            </a:r>
+          </a:p>
+          <a:p>
+            <a:pPr algn="ctr"/>
+            <a:r>
+              <a:rPr lang="es-ES" dirty="0"/>
+              <a:t>755 horas</a:t>
+            </a:r>
+            <a:endParaRPr lang="en-GB" dirty="0"/>
+          </a:p>
+        </p:txBody>
+      </p:sp>
+      <p:sp>
+        <p:nvSpPr>
+          <p:cNvPr id="12" name="Content Placeholder 9">
+            <a:extLst>
+              <a:ext uri="{FF2B5EF4-FFF2-40B4-BE49-F238E27FC236}">
+                <a16:creationId xmlns:a16="http://schemas.microsoft.com/office/drawing/2014/main" id="{3742BE1F-0F1E-7F40-18C2-BA07939C6904}"/>
+              </a:ext>
+            </a:extLst>
+          </p:cNvPr>
+          <p:cNvSpPr txBox="1">
+            <a:spLocks/>
+          </p:cNvSpPr>
+          <p:nvPr/>
+        </p:nvSpPr>
+        <p:spPr>
+          <a:xfrm>
+            <a:off x="801757" y="4050717"/>
+            <a:ext cx="4078512" cy="731147"/>
+          </a:xfrm>
+          <a:prstGeom prst="rect">
+            <a:avLst/>
+          </a:prstGeom>
+        </p:spPr>
+        <p:txBody>
+          <a:bodyPr vert="horz" lIns="91440" tIns="45720" rIns="91440" bIns="45720" rtlCol="0">
+            <a:normAutofit/>
+          </a:bodyPr>
+          <a:lstStyle>
+            <a:lvl1pPr marL="228600" indent="-228600" algn="l" defTabSz="914400" rtl="0" eaLnBrk="1" latinLnBrk="0" hangingPunct="1">
+              <a:lnSpc>
+                <a:spcPct val="90000"/>
+              </a:lnSpc>
+              <a:spcBef>
+                <a:spcPts val="1000"/>
+              </a:spcBef>
+              <a:buFont typeface="Arial" panose="020B0604020202020204" pitchFamily="34" charset="0"/>
+              <a:buChar char="•"/>
+              <a:defRPr sz="1800" kern="1200">
+                <a:solidFill>
+                  <a:schemeClr val="tx1"/>
+                </a:solidFill>
+                <a:latin typeface="+mn-lt"/>
+                <a:ea typeface="+mn-ea"/>
+                <a:cs typeface="+mn-cs"/>
+              </a:defRPr>
+            </a:lvl1pPr>
+            <a:lvl2pPr marL="685800" indent="-228600" algn="l" defTabSz="914400" rtl="0" eaLnBrk="1" latinLnBrk="0" hangingPunct="1">
+              <a:lnSpc>
+                <a:spcPct val="90000"/>
+              </a:lnSpc>
+              <a:spcBef>
+                <a:spcPts val="500"/>
+              </a:spcBef>
+              <a:buFont typeface="Arial" panose="020B0604020202020204" pitchFamily="34" charset="0"/>
+              <a:buChar char="•"/>
+              <a:defRPr sz="1800" kern="1200">
+                <a:solidFill>
+                  <a:schemeClr val="tx1"/>
+                </a:solidFill>
+                <a:latin typeface="+mn-lt"/>
+                <a:ea typeface="+mn-ea"/>
+                <a:cs typeface="+mn-cs"/>
+              </a:defRPr>
+            </a:lvl2pPr>
+            <a:lvl3pPr marL="1143000" indent="-228600" algn="l" defTabSz="914400" rtl="0" eaLnBrk="1" latinLnBrk="0" hangingPunct="1">
+              <a:lnSpc>
+                <a:spcPct val="90000"/>
+              </a:lnSpc>
+              <a:spcBef>
+                <a:spcPts val="500"/>
+              </a:spcBef>
+              <a:buFont typeface="Arial" panose="020B0604020202020204" pitchFamily="34" charset="0"/>
+              <a:buChar char="•"/>
+              <a:defRPr sz="1800" kern="1200">
+                <a:solidFill>
+                  <a:schemeClr val="tx1"/>
+                </a:solidFill>
+                <a:latin typeface="+mn-lt"/>
+                <a:ea typeface="+mn-ea"/>
+                <a:cs typeface="+mn-cs"/>
+              </a:defRPr>
+            </a:lvl3pPr>
+            <a:lvl4pPr marL="1600200" indent="-228600" algn="l" defTabSz="914400" rtl="0" eaLnBrk="1" latinLnBrk="0" hangingPunct="1">
+              <a:lnSpc>
+                <a:spcPct val="90000"/>
+              </a:lnSpc>
+              <a:spcBef>
+                <a:spcPts val="500"/>
+              </a:spcBef>
+              <a:buFont typeface="Arial" panose="020B0604020202020204" pitchFamily="34" charset="0"/>
+              <a:buChar char="•"/>
+              <a:defRPr sz="1800" kern="1200">
+                <a:solidFill>
+                  <a:schemeClr val="tx1"/>
+                </a:solidFill>
+                <a:latin typeface="+mn-lt"/>
+                <a:ea typeface="+mn-ea"/>
+                <a:cs typeface="+mn-cs"/>
+              </a:defRPr>
+            </a:lvl4pPr>
+            <a:lvl5pPr marL="2057400" indent="-228600" algn="l" defTabSz="914400" rtl="0" eaLnBrk="1" latinLnBrk="0" hangingPunct="1">
+              <a:lnSpc>
+                <a:spcPct val="90000"/>
+              </a:lnSpc>
+              <a:spcBef>
+                <a:spcPts val="500"/>
+              </a:spcBef>
+              <a:buFont typeface="Arial" panose="020B0604020202020204" pitchFamily="34" charset="0"/>
+              <a:buChar char="•"/>
+              <a:defRPr sz="1800" kern="1200">
+                <a:solidFill>
+                  <a:schemeClr val="tx1"/>
+                </a:solidFill>
+                <a:latin typeface="+mn-lt"/>
+                <a:ea typeface="+mn-ea"/>
+                <a:cs typeface="+mn-cs"/>
+              </a:defRPr>
+            </a:lvl5pPr>
+            <a:lvl6pPr marL="2514600" indent="-228600" algn="l" defTabSz="914400" rtl="0" eaLnBrk="1" latinLnBrk="0" hangingPunct="1">
+              <a:lnSpc>
+                <a:spcPct val="90000"/>
+              </a:lnSpc>
+              <a:spcBef>
+                <a:spcPts val="500"/>
+              </a:spcBef>
+              <a:buFont typeface="Arial" panose="020B0604020202020204" pitchFamily="34" charset="0"/>
+              <a:buChar char="•"/>
+              <a:defRPr sz="1800" kern="1200">
+                <a:solidFill>
+                  <a:schemeClr val="tx1"/>
+                </a:solidFill>
+                <a:latin typeface="+mn-lt"/>
+                <a:ea typeface="+mn-ea"/>
+                <a:cs typeface="+mn-cs"/>
+              </a:defRPr>
+            </a:lvl6pPr>
+            <a:lvl7pPr marL="2971800" indent="-228600" algn="l" defTabSz="914400" rtl="0" eaLnBrk="1" latinLnBrk="0" hangingPunct="1">
+              <a:lnSpc>
+                <a:spcPct val="90000"/>
+              </a:lnSpc>
+              <a:spcBef>
+                <a:spcPts val="500"/>
+              </a:spcBef>
+              <a:buFont typeface="Arial" panose="020B0604020202020204" pitchFamily="34" charset="0"/>
+              <a:buChar char="•"/>
+              <a:defRPr sz="1800" kern="1200">
+                <a:solidFill>
+                  <a:schemeClr val="tx1"/>
+                </a:solidFill>
+                <a:latin typeface="+mn-lt"/>
+                <a:ea typeface="+mn-ea"/>
+                <a:cs typeface="+mn-cs"/>
+              </a:defRPr>
+            </a:lvl7pPr>
+            <a:lvl8pPr marL="3429000" indent="-228600" algn="l" defTabSz="914400" rtl="0" eaLnBrk="1" latinLnBrk="0" hangingPunct="1">
+              <a:lnSpc>
+                <a:spcPct val="90000"/>
+              </a:lnSpc>
+              <a:spcBef>
+                <a:spcPts val="500"/>
+              </a:spcBef>
+              <a:buFont typeface="Arial" panose="020B0604020202020204" pitchFamily="34" charset="0"/>
+              <a:buChar char="•"/>
+              <a:defRPr sz="1800" kern="1200">
+                <a:solidFill>
+                  <a:schemeClr val="tx1"/>
+                </a:solidFill>
+                <a:latin typeface="+mn-lt"/>
+                <a:ea typeface="+mn-ea"/>
+                <a:cs typeface="+mn-cs"/>
+              </a:defRPr>
+            </a:lvl8pPr>
+            <a:lvl9pPr marL="3886200" indent="-228600" algn="l" defTabSz="914400" rtl="0" eaLnBrk="1" latinLnBrk="0" hangingPunct="1">
+              <a:lnSpc>
+                <a:spcPct val="90000"/>
+              </a:lnSpc>
+              <a:spcBef>
+                <a:spcPts val="500"/>
+              </a:spcBef>
+              <a:buFont typeface="Arial" panose="020B0604020202020204" pitchFamily="34" charset="0"/>
+              <a:buChar char="•"/>
+              <a:defRPr sz="1800" kern="1200">
+                <a:solidFill>
+                  <a:schemeClr val="tx1"/>
+                </a:solidFill>
+                <a:latin typeface="+mn-lt"/>
+                <a:ea typeface="+mn-ea"/>
+                <a:cs typeface="+mn-cs"/>
+              </a:defRPr>
+            </a:lvl9pPr>
+          </a:lstStyle>
+          <a:p>
+            <a:pPr marL="0" indent="0" algn="ctr">
+              <a:buNone/>
+            </a:pPr>
+            <a:r>
+              <a:rPr lang="en-US" b="1" dirty="0" err="1"/>
+              <a:t>Motivo</a:t>
+            </a:r>
+            <a:r>
+              <a:rPr lang="en-US" b="1" dirty="0"/>
+              <a:t> Modal</a:t>
+            </a:r>
+          </a:p>
+        </p:txBody>
+      </p:sp>
+      <p:sp>
+        <p:nvSpPr>
+          <p:cNvPr id="13" name="Content Placeholder 9">
+            <a:extLst>
+              <a:ext uri="{FF2B5EF4-FFF2-40B4-BE49-F238E27FC236}">
+                <a16:creationId xmlns:a16="http://schemas.microsoft.com/office/drawing/2014/main" id="{853AF8A3-DBD5-D710-5706-36F80DB2CF6B}"/>
+              </a:ext>
+            </a:extLst>
+          </p:cNvPr>
+          <p:cNvSpPr txBox="1">
+            <a:spLocks/>
+          </p:cNvSpPr>
+          <p:nvPr/>
+        </p:nvSpPr>
+        <p:spPr>
+          <a:xfrm>
+            <a:off x="6030384" y="4082123"/>
+            <a:ext cx="4772055" cy="731147"/>
+          </a:xfrm>
+          <a:prstGeom prst="rect">
+            <a:avLst/>
+          </a:prstGeom>
+        </p:spPr>
+        <p:txBody>
+          <a:bodyPr vert="horz" lIns="91440" tIns="45720" rIns="91440" bIns="45720" rtlCol="0">
+            <a:normAutofit/>
+          </a:bodyPr>
+          <a:lstStyle>
+            <a:lvl1pPr marL="228600" indent="-228600" algn="l" defTabSz="914400" rtl="0" eaLnBrk="1" latinLnBrk="0" hangingPunct="1">
+              <a:lnSpc>
+                <a:spcPct val="90000"/>
+              </a:lnSpc>
+              <a:spcBef>
+                <a:spcPts val="1000"/>
+              </a:spcBef>
+              <a:buFont typeface="Arial" panose="020B0604020202020204" pitchFamily="34" charset="0"/>
+              <a:buChar char="•"/>
+              <a:defRPr sz="1800" kern="1200">
+                <a:solidFill>
+                  <a:schemeClr val="tx1"/>
+                </a:solidFill>
+                <a:latin typeface="+mn-lt"/>
+                <a:ea typeface="+mn-ea"/>
+                <a:cs typeface="+mn-cs"/>
+              </a:defRPr>
+            </a:lvl1pPr>
+            <a:lvl2pPr marL="685800" indent="-228600" algn="l" defTabSz="914400" rtl="0" eaLnBrk="1" latinLnBrk="0" hangingPunct="1">
+              <a:lnSpc>
+                <a:spcPct val="90000"/>
+              </a:lnSpc>
+              <a:spcBef>
+                <a:spcPts val="500"/>
+              </a:spcBef>
+              <a:buFont typeface="Arial" panose="020B0604020202020204" pitchFamily="34" charset="0"/>
+              <a:buChar char="•"/>
+              <a:defRPr sz="1800" kern="1200">
+                <a:solidFill>
+                  <a:schemeClr val="tx1"/>
+                </a:solidFill>
+                <a:latin typeface="+mn-lt"/>
+                <a:ea typeface="+mn-ea"/>
+                <a:cs typeface="+mn-cs"/>
+              </a:defRPr>
+            </a:lvl2pPr>
+            <a:lvl3pPr marL="1143000" indent="-228600" algn="l" defTabSz="914400" rtl="0" eaLnBrk="1" latinLnBrk="0" hangingPunct="1">
+              <a:lnSpc>
+                <a:spcPct val="90000"/>
+              </a:lnSpc>
+              <a:spcBef>
+                <a:spcPts val="500"/>
+              </a:spcBef>
+              <a:buFont typeface="Arial" panose="020B0604020202020204" pitchFamily="34" charset="0"/>
+              <a:buChar char="•"/>
+              <a:defRPr sz="1800" kern="1200">
+                <a:solidFill>
+                  <a:schemeClr val="tx1"/>
+                </a:solidFill>
+                <a:latin typeface="+mn-lt"/>
+                <a:ea typeface="+mn-ea"/>
+                <a:cs typeface="+mn-cs"/>
+              </a:defRPr>
+            </a:lvl3pPr>
+            <a:lvl4pPr marL="1600200" indent="-228600" algn="l" defTabSz="914400" rtl="0" eaLnBrk="1" latinLnBrk="0" hangingPunct="1">
+              <a:lnSpc>
+                <a:spcPct val="90000"/>
+              </a:lnSpc>
+              <a:spcBef>
+                <a:spcPts val="500"/>
+              </a:spcBef>
+              <a:buFont typeface="Arial" panose="020B0604020202020204" pitchFamily="34" charset="0"/>
+              <a:buChar char="•"/>
+              <a:defRPr sz="1800" kern="1200">
+                <a:solidFill>
+                  <a:schemeClr val="tx1"/>
+                </a:solidFill>
+                <a:latin typeface="+mn-lt"/>
+                <a:ea typeface="+mn-ea"/>
+                <a:cs typeface="+mn-cs"/>
+              </a:defRPr>
+            </a:lvl4pPr>
+            <a:lvl5pPr marL="2057400" indent="-228600" algn="l" defTabSz="914400" rtl="0" eaLnBrk="1" latinLnBrk="0" hangingPunct="1">
+              <a:lnSpc>
+                <a:spcPct val="90000"/>
+              </a:lnSpc>
+              <a:spcBef>
+                <a:spcPts val="500"/>
+              </a:spcBef>
+              <a:buFont typeface="Arial" panose="020B0604020202020204" pitchFamily="34" charset="0"/>
+              <a:buChar char="•"/>
+              <a:defRPr sz="1800" kern="1200">
+                <a:solidFill>
+                  <a:schemeClr val="tx1"/>
+                </a:solidFill>
+                <a:latin typeface="+mn-lt"/>
+                <a:ea typeface="+mn-ea"/>
+                <a:cs typeface="+mn-cs"/>
+              </a:defRPr>
+            </a:lvl5pPr>
+            <a:lvl6pPr marL="2514600" indent="-228600" algn="l" defTabSz="914400" rtl="0" eaLnBrk="1" latinLnBrk="0" hangingPunct="1">
+              <a:lnSpc>
+                <a:spcPct val="90000"/>
+              </a:lnSpc>
+              <a:spcBef>
+                <a:spcPts val="500"/>
+              </a:spcBef>
+              <a:buFont typeface="Arial" panose="020B0604020202020204" pitchFamily="34" charset="0"/>
+              <a:buChar char="•"/>
+              <a:defRPr sz="1800" kern="1200">
+                <a:solidFill>
+                  <a:schemeClr val="tx1"/>
+                </a:solidFill>
+                <a:latin typeface="+mn-lt"/>
+                <a:ea typeface="+mn-ea"/>
+                <a:cs typeface="+mn-cs"/>
+              </a:defRPr>
+            </a:lvl6pPr>
+            <a:lvl7pPr marL="2971800" indent="-228600" algn="l" defTabSz="914400" rtl="0" eaLnBrk="1" latinLnBrk="0" hangingPunct="1">
+              <a:lnSpc>
+                <a:spcPct val="90000"/>
+              </a:lnSpc>
+              <a:spcBef>
+                <a:spcPts val="500"/>
+              </a:spcBef>
+              <a:buFont typeface="Arial" panose="020B0604020202020204" pitchFamily="34" charset="0"/>
+              <a:buChar char="•"/>
+              <a:defRPr sz="1800" kern="1200">
+                <a:solidFill>
+                  <a:schemeClr val="tx1"/>
+                </a:solidFill>
+                <a:latin typeface="+mn-lt"/>
+                <a:ea typeface="+mn-ea"/>
+                <a:cs typeface="+mn-cs"/>
+              </a:defRPr>
+            </a:lvl7pPr>
+            <a:lvl8pPr marL="3429000" indent="-228600" algn="l" defTabSz="914400" rtl="0" eaLnBrk="1" latinLnBrk="0" hangingPunct="1">
+              <a:lnSpc>
+                <a:spcPct val="90000"/>
+              </a:lnSpc>
+              <a:spcBef>
+                <a:spcPts val="500"/>
+              </a:spcBef>
+              <a:buFont typeface="Arial" panose="020B0604020202020204" pitchFamily="34" charset="0"/>
+              <a:buChar char="•"/>
+              <a:defRPr sz="1800" kern="1200">
+                <a:solidFill>
+                  <a:schemeClr val="tx1"/>
+                </a:solidFill>
+                <a:latin typeface="+mn-lt"/>
+                <a:ea typeface="+mn-ea"/>
+                <a:cs typeface="+mn-cs"/>
+              </a:defRPr>
+            </a:lvl8pPr>
+            <a:lvl9pPr marL="3886200" indent="-228600" algn="l" defTabSz="914400" rtl="0" eaLnBrk="1" latinLnBrk="0" hangingPunct="1">
+              <a:lnSpc>
+                <a:spcPct val="90000"/>
+              </a:lnSpc>
+              <a:spcBef>
+                <a:spcPts val="500"/>
+              </a:spcBef>
+              <a:buFont typeface="Arial" panose="020B0604020202020204" pitchFamily="34" charset="0"/>
+              <a:buChar char="•"/>
+              <a:defRPr sz="1800" kern="1200">
+                <a:solidFill>
+                  <a:schemeClr val="tx1"/>
+                </a:solidFill>
+                <a:latin typeface="+mn-lt"/>
+                <a:ea typeface="+mn-ea"/>
+                <a:cs typeface="+mn-cs"/>
+              </a:defRPr>
+            </a:lvl9pPr>
+          </a:lstStyle>
+          <a:p>
+            <a:pPr marL="0" indent="0">
+              <a:buNone/>
+            </a:pPr>
+            <a:r>
+              <a:rPr lang="en-US" b="1" dirty="0" err="1"/>
+              <a:t>Indice</a:t>
+            </a:r>
+            <a:r>
+              <a:rPr lang="en-US" b="1" dirty="0"/>
+              <a:t> </a:t>
+            </a:r>
+            <a:r>
+              <a:rPr lang="en-US" b="1" dirty="0" err="1"/>
+              <a:t>Eficiencia</a:t>
+            </a:r>
+            <a:r>
+              <a:rPr lang="en-US" b="1" dirty="0"/>
+              <a:t> </a:t>
+            </a:r>
+            <a:r>
+              <a:rPr lang="en-US" b="1" dirty="0" err="1"/>
+              <a:t>relativa</a:t>
+            </a:r>
+            <a:r>
+              <a:rPr lang="en-US" b="1" dirty="0"/>
+              <a:t> carga </a:t>
+            </a:r>
+            <a:r>
+              <a:rPr lang="en-US" b="1" dirty="0" err="1"/>
+              <a:t>laboral</a:t>
+            </a:r>
+            <a:endParaRPr lang="en-US" b="1" dirty="0"/>
+          </a:p>
+        </p:txBody>
+      </p:sp>
+      <p:sp>
+        <p:nvSpPr>
+          <p:cNvPr id="14" name="Rectangle 13">
+            <a:extLst>
+              <a:ext uri="{FF2B5EF4-FFF2-40B4-BE49-F238E27FC236}">
+                <a16:creationId xmlns:a16="http://schemas.microsoft.com/office/drawing/2014/main" id="{80625F6E-D523-8C5A-9383-8290B01EB7CC}"/>
+              </a:ext>
+            </a:extLst>
+          </p:cNvPr>
+          <p:cNvSpPr/>
+          <p:nvPr/>
+        </p:nvSpPr>
+        <p:spPr>
+          <a:xfrm>
+            <a:off x="1302958" y="4966617"/>
+            <a:ext cx="4078511" cy="1083039"/>
+          </a:xfrm>
+          <a:prstGeom prst="rect">
+            <a:avLst/>
+          </a:prstGeom>
+        </p:spPr>
+        <p:style>
+          <a:lnRef idx="2">
+            <a:schemeClr val="accent1">
+              <a:shade val="15000"/>
+            </a:schemeClr>
+          </a:lnRef>
+          <a:fillRef idx="1">
+            <a:schemeClr val="accent1"/>
+          </a:fillRef>
+          <a:effectRef idx="0">
+            <a:schemeClr val="accent1"/>
+          </a:effectRef>
+          <a:fontRef idx="minor">
+            <a:schemeClr val="lt1"/>
+          </a:fontRef>
+        </p:style>
+        <p:txBody>
+          <a:bodyPr rtlCol="0" anchor="ctr"/>
+          <a:lstStyle/>
+          <a:p>
+            <a:pPr algn="ctr"/>
+            <a:r>
+              <a:rPr lang="es-ES" dirty="0"/>
+              <a:t>Medical </a:t>
+            </a:r>
+            <a:r>
+              <a:rPr lang="es-ES" dirty="0" err="1"/>
+              <a:t>Consultation</a:t>
+            </a:r>
+            <a:r>
+              <a:rPr lang="es-ES" dirty="0"/>
+              <a:t> </a:t>
+            </a:r>
+          </a:p>
+          <a:p>
+            <a:pPr algn="ctr"/>
+            <a:r>
+              <a:rPr lang="es-ES" dirty="0"/>
+              <a:t>142 eventos</a:t>
+            </a:r>
+            <a:endParaRPr lang="en-GB" dirty="0"/>
+          </a:p>
+        </p:txBody>
+      </p:sp>
+      <p:sp>
+        <p:nvSpPr>
+          <p:cNvPr id="15" name="Hexagon 14">
+            <a:extLst>
+              <a:ext uri="{FF2B5EF4-FFF2-40B4-BE49-F238E27FC236}">
+                <a16:creationId xmlns:a16="http://schemas.microsoft.com/office/drawing/2014/main" id="{135604CC-F702-6577-CEC7-9CC52B942FAD}"/>
+              </a:ext>
+            </a:extLst>
+          </p:cNvPr>
+          <p:cNvSpPr/>
+          <p:nvPr/>
+        </p:nvSpPr>
+        <p:spPr>
+          <a:xfrm>
+            <a:off x="7464068" y="4953955"/>
+            <a:ext cx="1280410" cy="1083039"/>
+          </a:xfrm>
+          <a:prstGeom prst="hexagon">
+            <a:avLst/>
+          </a:prstGeom>
+        </p:spPr>
+        <p:style>
+          <a:lnRef idx="2">
+            <a:schemeClr val="accent1">
+              <a:shade val="15000"/>
+            </a:schemeClr>
+          </a:lnRef>
+          <a:fillRef idx="1">
+            <a:schemeClr val="accent1"/>
+          </a:fillRef>
+          <a:effectRef idx="0">
+            <a:schemeClr val="accent1"/>
+          </a:effectRef>
+          <a:fontRef idx="minor">
+            <a:schemeClr val="lt1"/>
+          </a:fontRef>
+        </p:style>
+        <p:txBody>
+          <a:bodyPr rtlCol="0" anchor="ctr"/>
+          <a:lstStyle/>
+          <a:p>
+            <a:pPr algn="ctr"/>
+            <a:r>
+              <a:rPr lang="es-ES" dirty="0"/>
+              <a:t>0.35</a:t>
+            </a:r>
+            <a:endParaRPr lang="en-GB" dirty="0"/>
           </a:p>
         </p:txBody>
       </p:sp>
@@ -9597,7 +10688,7 @@
         </p:spPr>
         <p:txBody>
           <a:bodyPr anchor="t" anchorCtr="0">
-            <a:normAutofit/>
+            <a:normAutofit fontScale="92500" lnSpcReduction="10000"/>
           </a:bodyPr>
           <a:lstStyle/>
           <a:p>
@@ -9702,6 +10793,12 @@
             <a:r>
               <a:rPr lang="en-US" dirty="0"/>
               <a:t> </a:t>
+            </a:r>
+          </a:p>
+          <a:p>
+            <a:r>
+              <a:rPr lang="en-US" dirty="0"/>
+              <a:t>KPIs</a:t>
             </a:r>
           </a:p>
         </p:txBody>
@@ -9865,10 +10962,6 @@
           <a:bodyPr/>
           <a:lstStyle/>
           <a:p>
-            <a:r>
-              <a:rPr lang="en-US" dirty="0" err="1"/>
-              <a:t>xxxxxxx</a:t>
-            </a:r>
             <a:endParaRPr lang="en-US" dirty="0"/>
           </a:p>
         </p:txBody>
@@ -10461,10 +11554,6 @@
           <a:bodyPr/>
           <a:lstStyle/>
           <a:p>
-            <a:r>
-              <a:rPr lang="en-US" dirty="0" err="1"/>
-              <a:t>xxxxxxxx</a:t>
-            </a:r>
             <a:endParaRPr lang="en-US" dirty="0"/>
           </a:p>
         </p:txBody>
@@ -11338,31 +12427,68 @@
           </a:p>
         </p:txBody>
       </p:sp>
-      <p:sp>
-        <p:nvSpPr>
-          <p:cNvPr id="5" name="Content Placeholder 4">
-            <a:extLst>
-              <a:ext uri="{FF2B5EF4-FFF2-40B4-BE49-F238E27FC236}">
-                <a16:creationId xmlns:a16="http://schemas.microsoft.com/office/drawing/2014/main" id="{60980DF7-A09D-57C4-737A-0D3BF8348406}"/>
-              </a:ext>
-            </a:extLst>
-          </p:cNvPr>
-          <p:cNvSpPr>
-            <a:spLocks noGrp="1"/>
-          </p:cNvSpPr>
+      <p:pic>
+        <p:nvPicPr>
+          <p:cNvPr id="7" name="Content Placeholder 6">
+            <a:extLst>
+              <a:ext uri="{FF2B5EF4-FFF2-40B4-BE49-F238E27FC236}">
+                <a16:creationId xmlns:a16="http://schemas.microsoft.com/office/drawing/2014/main" id="{E343A460-0061-9980-BD58-1B802E49313E}"/>
+              </a:ext>
+            </a:extLst>
+          </p:cNvPr>
+          <p:cNvPicPr>
+            <a:picLocks noGrp="1" noChangeAspect="1"/>
+          </p:cNvPicPr>
           <p:nvPr>
             <p:ph idx="30"/>
           </p:nvPr>
-        </p:nvSpPr>
-        <p:spPr/>
-        <p:txBody>
-          <a:bodyPr/>
-          <a:lstStyle/>
-          <a:p>
-            <a:endParaRPr lang="en-GB" dirty="0"/>
-          </a:p>
-        </p:txBody>
-      </p:sp>
+        </p:nvPicPr>
+        <p:blipFill>
+          <a:blip r:embed="rId3"/>
+          <a:stretch>
+            <a:fillRect/>
+          </a:stretch>
+        </p:blipFill>
+        <p:spPr>
+          <a:xfrm>
+            <a:off x="333652" y="2053653"/>
+            <a:ext cx="5336668" cy="3373438"/>
+          </a:xfrm>
+          <a:prstGeom prst="rect">
+            <a:avLst/>
+          </a:prstGeom>
+        </p:spPr>
+      </p:pic>
+      <p:pic>
+        <p:nvPicPr>
+          <p:cNvPr id="5" name="Picture 4">
+            <a:extLst>
+              <a:ext uri="{FF2B5EF4-FFF2-40B4-BE49-F238E27FC236}">
+                <a16:creationId xmlns:a16="http://schemas.microsoft.com/office/drawing/2014/main" id="{4FE71423-B06A-2A95-FE4C-ECAF5CB44988}"/>
+              </a:ext>
+            </a:extLst>
+          </p:cNvPr>
+          <p:cNvPicPr>
+            <a:picLocks noChangeAspect="1"/>
+          </p:cNvPicPr>
+          <p:nvPr/>
+        </p:nvPicPr>
+        <p:blipFill>
+          <a:blip r:embed="rId4"/>
+          <a:stretch>
+            <a:fillRect/>
+          </a:stretch>
+        </p:blipFill>
+        <p:spPr>
+          <a:xfrm>
+            <a:off x="6091550" y="1834548"/>
+            <a:ext cx="5038100" cy="3592543"/>
+          </a:xfrm>
+          <a:prstGeom prst="rect">
+            <a:avLst/>
+          </a:prstGeom>
+        </p:spPr>
+      </p:pic>
     </p:spTree>
     <p:extLst>
       <p:ext uri="{BB962C8B-B14F-4D97-AF65-F5344CB8AC3E}">
@@ -11651,31 +12777,98 @@
           </a:p>
         </p:txBody>
       </p:sp>
-      <p:sp>
-        <p:nvSpPr>
-          <p:cNvPr id="5" name="Content Placeholder 4">
-            <a:extLst>
-              <a:ext uri="{FF2B5EF4-FFF2-40B4-BE49-F238E27FC236}">
-                <a16:creationId xmlns:a16="http://schemas.microsoft.com/office/drawing/2014/main" id="{60980DF7-A09D-57C4-737A-0D3BF8348406}"/>
-              </a:ext>
-            </a:extLst>
-          </p:cNvPr>
-          <p:cNvSpPr>
-            <a:spLocks noGrp="1"/>
-          </p:cNvSpPr>
+      <p:pic>
+        <p:nvPicPr>
+          <p:cNvPr id="7" name="Content Placeholder 6">
+            <a:extLst>
+              <a:ext uri="{FF2B5EF4-FFF2-40B4-BE49-F238E27FC236}">
+                <a16:creationId xmlns:a16="http://schemas.microsoft.com/office/drawing/2014/main" id="{4CA7B066-56F3-903C-55CF-5E4907F2B09E}"/>
+              </a:ext>
+            </a:extLst>
+          </p:cNvPr>
+          <p:cNvPicPr>
+            <a:picLocks noGrp="1" noChangeAspect="1"/>
+          </p:cNvPicPr>
           <p:nvPr>
             <p:ph idx="30"/>
           </p:nvPr>
-        </p:nvSpPr>
-        <p:spPr/>
-        <p:txBody>
-          <a:bodyPr/>
-          <a:lstStyle/>
-          <a:p>
-            <a:endParaRPr lang="en-GB" dirty="0"/>
-          </a:p>
-        </p:txBody>
-      </p:sp>
+        </p:nvPicPr>
+        <p:blipFill>
+          <a:blip r:embed="rId3"/>
+          <a:stretch>
+            <a:fillRect/>
+          </a:stretch>
+        </p:blipFill>
+        <p:spPr>
+          <a:xfrm>
+            <a:off x="528612" y="1708879"/>
+            <a:ext cx="4507604" cy="2492440"/>
+          </a:xfrm>
+          <a:prstGeom prst="rect">
+            <a:avLst/>
+          </a:prstGeom>
+        </p:spPr>
+      </p:pic>
+      <p:pic>
+        <p:nvPicPr>
+          <p:cNvPr id="9" name="Picture 8">
+            <a:extLst>
+              <a:ext uri="{FF2B5EF4-FFF2-40B4-BE49-F238E27FC236}">
+                <a16:creationId xmlns:a16="http://schemas.microsoft.com/office/drawing/2014/main" id="{939BC8FE-223B-9DD7-262A-A777F126EA64}"/>
+              </a:ext>
+            </a:extLst>
+          </p:cNvPr>
+          <p:cNvPicPr>
+            <a:picLocks noChangeAspect="1"/>
+          </p:cNvPicPr>
+          <p:nvPr/>
+        </p:nvPicPr>
+        <p:blipFill>
+          <a:blip r:embed="rId4"/>
+          <a:stretch>
+            <a:fillRect/>
+          </a:stretch>
+        </p:blipFill>
+        <p:spPr>
+          <a:xfrm>
+            <a:off x="3746382" y="4153915"/>
+            <a:ext cx="4041775" cy="2704085"/>
+          </a:xfrm>
+          <a:prstGeom prst="rect">
+            <a:avLst/>
+          </a:prstGeom>
+        </p:spPr>
+      </p:pic>
+      <p:pic>
+        <p:nvPicPr>
+          <p:cNvPr id="11" name="Picture 10">
+            <a:extLst>
+              <a:ext uri="{FF2B5EF4-FFF2-40B4-BE49-F238E27FC236}">
+                <a16:creationId xmlns:a16="http://schemas.microsoft.com/office/drawing/2014/main" id="{E0CAEE3F-AF86-05B7-D1DC-1E272BD82B3E}"/>
+              </a:ext>
+            </a:extLst>
+          </p:cNvPr>
+          <p:cNvPicPr>
+            <a:picLocks noChangeAspect="1"/>
+          </p:cNvPicPr>
+          <p:nvPr/>
+        </p:nvPicPr>
+        <p:blipFill>
+          <a:blip r:embed="rId5"/>
+          <a:stretch>
+            <a:fillRect/>
+          </a:stretch>
+        </p:blipFill>
+        <p:spPr>
+          <a:xfrm>
+            <a:off x="6424731" y="1805261"/>
+            <a:ext cx="5112606" cy="2396058"/>
+          </a:xfrm>
+          <a:prstGeom prst="rect">
+            <a:avLst/>
+          </a:prstGeom>
+        </p:spPr>
+      </p:pic>
     </p:spTree>
     <p:extLst>
       <p:ext uri="{BB962C8B-B14F-4D97-AF65-F5344CB8AC3E}">

--- a/Equip_28/Results/Analisis_PAP_and_ABL_RapidExpres.pptx
+++ b/Equip_28/Results/Analisis_PAP_and_ABL_RapidExpres.pptx
@@ -209,7 +209,7 @@
           <a:p>
             <a:fld id="{443A06E2-0DF3-432C-9669-7DF986ACE8BA}" type="datetimeFigureOut">
               <a:rPr lang="en-GB" smtClean="0"/>
-              <a:t>24/04/2026</a:t>
+              <a:t>27/04/2026</a:t>
             </a:fld>
             <a:endParaRPr lang="en-GB"/>
           </a:p>
@@ -368,7 +368,7 @@
           <a:p>
             <a:fld id="{005AAB3B-1C4E-4889-8450-736287798921}" type="slidenum">
               <a:rPr lang="en-GB" smtClean="0"/>
-              <a:t>‹#›</a:t>
+              <a:t>‹Nº›</a:t>
             </a:fld>
             <a:endParaRPr lang="en-GB"/>
           </a:p>
@@ -1502,7 +1502,7 @@
           <a:p>
             <a:fld id="{037D434A-83FD-40C7-B814-5B722EE835FE}" type="datetimeFigureOut">
               <a:rPr lang="en-GB" smtClean="0"/>
-              <a:t>24/04/2026</a:t>
+              <a:t>27/04/2026</a:t>
             </a:fld>
             <a:endParaRPr lang="en-GB"/>
           </a:p>
@@ -1556,7 +1556,7 @@
           <a:p>
             <a:fld id="{BE6A8D57-9D10-4D47-9091-49E61AADFCFC}" type="slidenum">
               <a:rPr lang="en-GB" smtClean="0"/>
-              <a:t>‹#›</a:t>
+              <a:t>‹Nº›</a:t>
             </a:fld>
             <a:endParaRPr lang="en-GB"/>
           </a:p>
@@ -1702,7 +1702,7 @@
           <a:p>
             <a:fld id="{037D434A-83FD-40C7-B814-5B722EE835FE}" type="datetimeFigureOut">
               <a:rPr lang="en-GB" smtClean="0"/>
-              <a:t>24/04/2026</a:t>
+              <a:t>27/04/2026</a:t>
             </a:fld>
             <a:endParaRPr lang="en-GB"/>
           </a:p>
@@ -1756,7 +1756,7 @@
           <a:p>
             <a:fld id="{BE6A8D57-9D10-4D47-9091-49E61AADFCFC}" type="slidenum">
               <a:rPr lang="en-GB" smtClean="0"/>
-              <a:t>‹#›</a:t>
+              <a:t>‹Nº›</a:t>
             </a:fld>
             <a:endParaRPr lang="en-GB"/>
           </a:p>
@@ -1912,7 +1912,7 @@
           <a:p>
             <a:fld id="{037D434A-83FD-40C7-B814-5B722EE835FE}" type="datetimeFigureOut">
               <a:rPr lang="en-GB" smtClean="0"/>
-              <a:t>24/04/2026</a:t>
+              <a:t>27/04/2026</a:t>
             </a:fld>
             <a:endParaRPr lang="en-GB"/>
           </a:p>
@@ -1966,7 +1966,7 @@
           <a:p>
             <a:fld id="{BE6A8D57-9D10-4D47-9091-49E61AADFCFC}" type="slidenum">
               <a:rPr lang="en-GB" smtClean="0"/>
-              <a:t>‹#›</a:t>
+              <a:t>‹Nº›</a:t>
             </a:fld>
             <a:endParaRPr lang="en-GB"/>
           </a:p>
@@ -3910,7 +3910,7 @@
             <a:fld id="{47FEACEE-25B4-4A2D-B147-27296E36371D}" type="slidenum">
               <a:rPr lang="en-US" altLang="zh-CN" noProof="0" smtClean="0"/>
               <a:pPr/>
-              <a:t>‹#›</a:t>
+              <a:t>‹Nº›</a:t>
             </a:fld>
             <a:endParaRPr lang="en-US" altLang="zh-CN" noProof="0" dirty="0"/>
           </a:p>
@@ -5798,7 +5798,7 @@
             <a:fld id="{47FEACEE-25B4-4A2D-B147-27296E36371D}" type="slidenum">
               <a:rPr lang="en-US" altLang="zh-CN" noProof="0" smtClean="0"/>
               <a:pPr/>
-              <a:t>‹#›</a:t>
+              <a:t>‹Nº›</a:t>
             </a:fld>
             <a:endParaRPr lang="en-US" altLang="zh-CN" noProof="0" dirty="0"/>
           </a:p>
@@ -5944,7 +5944,7 @@
           <a:p>
             <a:fld id="{037D434A-83FD-40C7-B814-5B722EE835FE}" type="datetimeFigureOut">
               <a:rPr lang="en-GB" smtClean="0"/>
-              <a:t>24/04/2026</a:t>
+              <a:t>27/04/2026</a:t>
             </a:fld>
             <a:endParaRPr lang="en-GB"/>
           </a:p>
@@ -5998,7 +5998,7 @@
           <a:p>
             <a:fld id="{BE6A8D57-9D10-4D47-9091-49E61AADFCFC}" type="slidenum">
               <a:rPr lang="en-GB" smtClean="0"/>
-              <a:t>‹#›</a:t>
+              <a:t>‹Nº›</a:t>
             </a:fld>
             <a:endParaRPr lang="en-GB"/>
           </a:p>
@@ -6220,7 +6220,7 @@
           <a:p>
             <a:fld id="{037D434A-83FD-40C7-B814-5B722EE835FE}" type="datetimeFigureOut">
               <a:rPr lang="en-GB" smtClean="0"/>
-              <a:t>24/04/2026</a:t>
+              <a:t>27/04/2026</a:t>
             </a:fld>
             <a:endParaRPr lang="en-GB"/>
           </a:p>
@@ -6274,7 +6274,7 @@
           <a:p>
             <a:fld id="{BE6A8D57-9D10-4D47-9091-49E61AADFCFC}" type="slidenum">
               <a:rPr lang="en-GB" smtClean="0"/>
-              <a:t>‹#›</a:t>
+              <a:t>‹Nº›</a:t>
             </a:fld>
             <a:endParaRPr lang="en-GB"/>
           </a:p>
@@ -6488,7 +6488,7 @@
           <a:p>
             <a:fld id="{037D434A-83FD-40C7-B814-5B722EE835FE}" type="datetimeFigureOut">
               <a:rPr lang="en-GB" smtClean="0"/>
-              <a:t>24/04/2026</a:t>
+              <a:t>27/04/2026</a:t>
             </a:fld>
             <a:endParaRPr lang="en-GB"/>
           </a:p>
@@ -6542,7 +6542,7 @@
           <a:p>
             <a:fld id="{BE6A8D57-9D10-4D47-9091-49E61AADFCFC}" type="slidenum">
               <a:rPr lang="en-GB" smtClean="0"/>
-              <a:t>‹#›</a:t>
+              <a:t>‹Nº›</a:t>
             </a:fld>
             <a:endParaRPr lang="en-GB"/>
           </a:p>
@@ -6903,7 +6903,7 @@
           <a:p>
             <a:fld id="{037D434A-83FD-40C7-B814-5B722EE835FE}" type="datetimeFigureOut">
               <a:rPr lang="en-GB" smtClean="0"/>
-              <a:t>24/04/2026</a:t>
+              <a:t>27/04/2026</a:t>
             </a:fld>
             <a:endParaRPr lang="en-GB"/>
           </a:p>
@@ -6957,7 +6957,7 @@
           <a:p>
             <a:fld id="{BE6A8D57-9D10-4D47-9091-49E61AADFCFC}" type="slidenum">
               <a:rPr lang="en-GB" smtClean="0"/>
-              <a:t>‹#›</a:t>
+              <a:t>‹Nº›</a:t>
             </a:fld>
             <a:endParaRPr lang="en-GB"/>
           </a:p>
@@ -7045,7 +7045,7 @@
           <a:p>
             <a:fld id="{037D434A-83FD-40C7-B814-5B722EE835FE}" type="datetimeFigureOut">
               <a:rPr lang="en-GB" smtClean="0"/>
-              <a:t>24/04/2026</a:t>
+              <a:t>27/04/2026</a:t>
             </a:fld>
             <a:endParaRPr lang="en-GB"/>
           </a:p>
@@ -7099,7 +7099,7 @@
           <a:p>
             <a:fld id="{BE6A8D57-9D10-4D47-9091-49E61AADFCFC}" type="slidenum">
               <a:rPr lang="en-GB" smtClean="0"/>
-              <a:t>‹#›</a:t>
+              <a:t>‹Nº›</a:t>
             </a:fld>
             <a:endParaRPr lang="en-GB"/>
           </a:p>
@@ -7158,7 +7158,7 @@
           <a:p>
             <a:fld id="{037D434A-83FD-40C7-B814-5B722EE835FE}" type="datetimeFigureOut">
               <a:rPr lang="en-GB" smtClean="0"/>
-              <a:t>24/04/2026</a:t>
+              <a:t>27/04/2026</a:t>
             </a:fld>
             <a:endParaRPr lang="en-GB"/>
           </a:p>
@@ -7212,7 +7212,7 @@
           <a:p>
             <a:fld id="{BE6A8D57-9D10-4D47-9091-49E61AADFCFC}" type="slidenum">
               <a:rPr lang="en-GB" smtClean="0"/>
-              <a:t>‹#›</a:t>
+              <a:t>‹Nº›</a:t>
             </a:fld>
             <a:endParaRPr lang="en-GB"/>
           </a:p>
@@ -7471,7 +7471,7 @@
           <a:p>
             <a:fld id="{037D434A-83FD-40C7-B814-5B722EE835FE}" type="datetimeFigureOut">
               <a:rPr lang="en-GB" smtClean="0"/>
-              <a:t>24/04/2026</a:t>
+              <a:t>27/04/2026</a:t>
             </a:fld>
             <a:endParaRPr lang="en-GB"/>
           </a:p>
@@ -7525,7 +7525,7 @@
           <a:p>
             <a:fld id="{BE6A8D57-9D10-4D47-9091-49E61AADFCFC}" type="slidenum">
               <a:rPr lang="en-GB" smtClean="0"/>
-              <a:t>‹#›</a:t>
+              <a:t>‹Nº›</a:t>
             </a:fld>
             <a:endParaRPr lang="en-GB"/>
           </a:p>
@@ -7760,7 +7760,7 @@
           <a:p>
             <a:fld id="{037D434A-83FD-40C7-B814-5B722EE835FE}" type="datetimeFigureOut">
               <a:rPr lang="en-GB" smtClean="0"/>
-              <a:t>24/04/2026</a:t>
+              <a:t>27/04/2026</a:t>
             </a:fld>
             <a:endParaRPr lang="en-GB"/>
           </a:p>
@@ -7814,7 +7814,7 @@
           <a:p>
             <a:fld id="{BE6A8D57-9D10-4D47-9091-49E61AADFCFC}" type="slidenum">
               <a:rPr lang="en-GB" smtClean="0"/>
-              <a:t>‹#›</a:t>
+              <a:t>‹Nº›</a:t>
             </a:fld>
             <a:endParaRPr lang="en-GB"/>
           </a:p>
@@ -8003,7 +8003,7 @@
           <a:p>
             <a:fld id="{037D434A-83FD-40C7-B814-5B722EE835FE}" type="datetimeFigureOut">
               <a:rPr lang="en-GB" smtClean="0"/>
-              <a:t>24/04/2026</a:t>
+              <a:t>27/04/2026</a:t>
             </a:fld>
             <a:endParaRPr lang="en-GB"/>
           </a:p>
@@ -8093,7 +8093,7 @@
           <a:p>
             <a:fld id="{BE6A8D57-9D10-4D47-9091-49E61AADFCFC}" type="slidenum">
               <a:rPr lang="en-GB" smtClean="0"/>
-              <a:t>‹#›</a:t>
+              <a:t>‹Nº›</a:t>
             </a:fld>
             <a:endParaRPr lang="en-GB"/>
           </a:p>
@@ -8459,65 +8459,28 @@
           <a:lstStyle/>
           <a:p>
             <a:r>
-              <a:rPr lang="en-US" altLang="zh-CN" dirty="0">
+              <a:rPr lang="es-ES_tradnl" noProof="1">
                 <a:solidFill>
                   <a:schemeClr val="bg1"/>
                 </a:solidFill>
               </a:rPr>
-              <a:t>Rapid Express – </a:t>
-            </a:r>
-            <a:r>
-              <a:rPr lang="en-US" altLang="zh-CN" dirty="0" err="1">
-                <a:solidFill>
-                  <a:schemeClr val="bg1"/>
-                </a:solidFill>
-              </a:rPr>
-              <a:t>Analisis</a:t>
-            </a:r>
-            <a:r>
-              <a:rPr lang="en-US" altLang="zh-CN" dirty="0">
-                <a:solidFill>
-                  <a:schemeClr val="bg1"/>
-                </a:solidFill>
-              </a:rPr>
-              <a:t> </a:t>
+              <a:t>Rapid Express – Análisis </a:t>
             </a:r>
             <a:br>
-              <a:rPr lang="en-US" altLang="zh-CN" dirty="0">
+              <a:rPr lang="es-ES_tradnl" noProof="1">
                 <a:solidFill>
                   <a:schemeClr val="bg1"/>
                 </a:solidFill>
               </a:rPr>
             </a:br>
             <a:r>
-              <a:rPr lang="en-US" altLang="zh-CN" dirty="0" err="1">
+              <a:rPr lang="es-ES_tradnl" noProof="1">
                 <a:solidFill>
                   <a:schemeClr val="bg1"/>
                 </a:solidFill>
               </a:rPr>
-              <a:t>Perfil</a:t>
-            </a:r>
-            <a:r>
-              <a:rPr lang="en-US" altLang="zh-CN" dirty="0">
-                <a:solidFill>
-                  <a:schemeClr val="bg1"/>
-                </a:solidFill>
-              </a:rPr>
-              <a:t> de Empleado y </a:t>
-            </a:r>
-            <a:r>
-              <a:rPr lang="en-US" altLang="zh-CN" dirty="0" err="1">
-                <a:solidFill>
-                  <a:schemeClr val="bg1"/>
-                </a:solidFill>
-              </a:rPr>
-              <a:t>Absentismo</a:t>
-            </a:r>
-            <a:endParaRPr lang="en-US" dirty="0">
-              <a:solidFill>
-                <a:schemeClr val="bg1"/>
-              </a:solidFill>
-            </a:endParaRPr>
+              <a:t>Perfil de Empleado y Absentismo</a:t>
+            </a:r>
           </a:p>
         </p:txBody>
       </p:sp>
@@ -8548,17 +8511,13 @@
           <a:lstStyle/>
           <a:p>
             <a:r>
-              <a:rPr lang="en-US" dirty="0" err="1"/>
-              <a:t>Equipo</a:t>
-            </a:r>
-            <a:r>
-              <a:rPr lang="en-US" dirty="0"/>
-              <a:t> 28</a:t>
-            </a:r>
-          </a:p>
-          <a:p>
-            <a:r>
-              <a:rPr lang="en-US" dirty="0"/>
+              <a:rPr lang="es-ES_tradnl" noProof="1"/>
+              <a:t>Equipo 28</a:t>
+            </a:r>
+          </a:p>
+          <a:p>
+            <a:r>
+              <a:rPr lang="es-ES_tradnl" noProof="1"/>
               <a:t>Emilio T., Núria P., Andrea C. &amp; Ana C.</a:t>
             </a:r>
           </a:p>
@@ -8663,65 +8622,17 @@
           <a:lstStyle/>
           <a:p>
             <a:r>
-              <a:rPr lang="en-US" dirty="0" err="1">
+              <a:rPr lang="es-ES_tradnl" noProof="1">
                 <a:solidFill>
                   <a:schemeClr val="bg1"/>
                 </a:solidFill>
               </a:rPr>
-              <a:t>Estrategias</a:t>
-            </a:r>
-            <a:r>
-              <a:rPr lang="en-US" dirty="0">
-                <a:solidFill>
-                  <a:schemeClr val="bg1"/>
-                </a:solidFill>
-              </a:rPr>
-              <a:t> para </a:t>
-            </a:r>
-            <a:r>
-              <a:rPr lang="en-US" dirty="0" err="1">
-                <a:solidFill>
-                  <a:schemeClr val="bg1"/>
-                </a:solidFill>
-              </a:rPr>
-              <a:t>reducir</a:t>
-            </a:r>
-            <a:r>
-              <a:rPr lang="en-US" dirty="0">
-                <a:solidFill>
-                  <a:schemeClr val="bg1"/>
-                </a:solidFill>
-              </a:rPr>
-              <a:t> </a:t>
-            </a:r>
-            <a:r>
-              <a:rPr lang="en-US" dirty="0" err="1">
-                <a:solidFill>
-                  <a:schemeClr val="bg1"/>
-                </a:solidFill>
-              </a:rPr>
-              <a:t>el</a:t>
-            </a:r>
-            <a:r>
-              <a:rPr lang="en-US" dirty="0">
-                <a:solidFill>
-                  <a:schemeClr val="bg1"/>
-                </a:solidFill>
-              </a:rPr>
-              <a:t> </a:t>
-            </a:r>
-            <a:r>
-              <a:rPr lang="en-US" dirty="0" err="1">
-                <a:solidFill>
-                  <a:schemeClr val="bg1"/>
-                </a:solidFill>
-              </a:rPr>
-              <a:t>ausentismo</a:t>
+              <a:t>Estrategias para reducir el ausentismo</a:t>
             </a:r>
             <a:br>
-              <a:rPr lang="en-US" dirty="0"/>
+              <a:rPr lang="es-ES_tradnl" noProof="1"/>
             </a:br>
-            <a:endParaRPr lang="en-US" dirty="0">
+            <a:endParaRPr lang="es-ES_tradnl" noProof="1">
               <a:solidFill>
                 <a:schemeClr val="bg1"/>
               </a:solidFill>
@@ -8755,7 +8666,7 @@
           <a:bodyPr/>
           <a:lstStyle/>
           <a:p>
-            <a:endParaRPr lang="en-US" dirty="0"/>
+            <a:endParaRPr lang="es-ES_tradnl" noProof="1"/>
           </a:p>
         </p:txBody>
       </p:sp>
@@ -8824,7 +8735,7 @@
           <a:lstStyle/>
           <a:p>
             <a:r>
-              <a:rPr lang="es-ES" dirty="0"/>
+              <a:rPr lang="es-ES_tradnl" noProof="1"/>
               <a:t>Estrategias para reducir el Ausentismo</a:t>
             </a:r>
           </a:p>
@@ -8969,7 +8880,7 @@
               <a:defRPr/>
             </a:pPr>
             <a:fld id="{47FEACEE-25B4-4A2D-B147-27296E36371D}" type="slidenum">
-              <a:rPr kumimoji="0" lang="en-US" altLang="zh-CN" sz="1200" u="none" strike="noStrike" kern="1200" cap="none" spc="0" normalizeH="0" baseline="0" smtClean="0">
+              <a:rPr kumimoji="0" lang="es-ES_tradnl" sz="1200" u="none" strike="noStrike" kern="1200" cap="none" spc="0" normalizeH="0" baseline="0" noProof="1" smtClean="0">
                 <a:ln>
                   <a:noFill/>
                 </a:ln>
@@ -8999,7 +8910,7 @@
               </a:pPr>
               <a:t>11</a:t>
             </a:fld>
-            <a:endParaRPr kumimoji="0" lang="en-US" altLang="zh-CN" sz="1200" u="none" strike="noStrike" kern="1200" cap="none" spc="0" normalizeH="0" baseline="0" dirty="0">
+            <a:endParaRPr kumimoji="0" lang="es-ES_tradnl" sz="1200" u="none" strike="noStrike" kern="1200" cap="none" spc="0" normalizeH="0" baseline="0" noProof="1">
               <a:ln>
                 <a:noFill/>
               </a:ln>
@@ -9035,11 +8946,11 @@
           <a:lstStyle/>
           <a:p>
             <a:fld id="{47FEACEE-25B4-4A2D-B147-27296E36371D}" type="slidenum">
-              <a:rPr lang="en-US" altLang="zh-CN" noProof="0" smtClean="0"/>
+              <a:rPr lang="es-ES_tradnl" noProof="1" smtClean="0"/>
               <a:pPr/>
               <a:t>11</a:t>
             </a:fld>
-            <a:endParaRPr lang="en-US" altLang="zh-CN" noProof="0" dirty="0"/>
+            <a:endParaRPr lang="es-ES_tradnl" noProof="1"/>
           </a:p>
         </p:txBody>
       </p:sp>
@@ -9073,19 +8984,19 @@
               <a:buNone/>
             </a:pPr>
             <a:r>
-              <a:rPr lang="es-ES" dirty="0"/>
+              <a:rPr lang="es-ES_tradnl" noProof="1"/>
               <a:t>. </a:t>
             </a:r>
             <a:r>
-              <a:rPr lang="es-ES" b="1" dirty="0"/>
+              <a:rPr lang="es-ES_tradnl" b="1" noProof="1"/>
               <a:t>Invierno</a:t>
             </a:r>
             <a:r>
-              <a:rPr lang="es-ES" dirty="0"/>
+              <a:rPr lang="es-ES_tradnl" noProof="1"/>
               <a:t> - Campañas de salud, ergonomía, prevención de lesiones, vacunación</a:t>
             </a:r>
             <a:r>
-              <a:rPr lang="es-ES" b="1" dirty="0"/>
+              <a:rPr lang="es-ES_tradnl" b="1" noProof="1"/>
               <a:t>.</a:t>
             </a:r>
           </a:p>
@@ -9093,174 +9004,46 @@
             <a:pPr marL="457200" lvl="1" indent="0">
               <a:buNone/>
             </a:pPr>
-            <a:endParaRPr lang="en-GB" dirty="0"/>
+            <a:endParaRPr lang="es-ES_tradnl" noProof="1"/>
           </a:p>
           <a:p>
             <a:pPr marL="457200" lvl="1" indent="0">
               <a:buNone/>
             </a:pPr>
             <a:r>
-              <a:rPr lang="en-GB" dirty="0"/>
+              <a:rPr lang="es-ES_tradnl" noProof="1"/>
               <a:t>. </a:t>
             </a:r>
             <a:r>
-              <a:rPr lang="en-GB" b="1" dirty="0"/>
-              <a:t>Meses </a:t>
-            </a:r>
-            <a:r>
-              <a:rPr lang="en-GB" b="1" dirty="0" err="1"/>
-              <a:t>pico</a:t>
-            </a:r>
-            <a:r>
-              <a:rPr lang="en-GB" b="1" dirty="0"/>
-              <a:t> (Marzo, Abril, Julio y </a:t>
-            </a:r>
-            <a:r>
-              <a:rPr lang="en-GB" b="1" dirty="0" err="1"/>
-              <a:t>Noviembre</a:t>
-            </a:r>
-            <a:r>
-              <a:rPr lang="en-GB" b="1" dirty="0"/>
-              <a:t>) </a:t>
-            </a:r>
-            <a:r>
-              <a:rPr lang="en-GB" dirty="0"/>
-              <a:t>- </a:t>
-            </a:r>
-            <a:r>
-              <a:rPr lang="en-GB" dirty="0" err="1"/>
-              <a:t>Redimensionar</a:t>
-            </a:r>
-            <a:r>
-              <a:rPr lang="en-GB" dirty="0"/>
-              <a:t> </a:t>
-            </a:r>
-            <a:r>
-              <a:rPr lang="en-GB" dirty="0" err="1"/>
-              <a:t>período</a:t>
-            </a:r>
-            <a:r>
-              <a:rPr lang="en-GB" dirty="0"/>
-              <a:t> </a:t>
-            </a:r>
-            <a:r>
-              <a:rPr lang="en-GB" dirty="0" err="1"/>
-              <a:t>vacacional</a:t>
-            </a:r>
-            <a:r>
-              <a:rPr lang="en-GB" dirty="0"/>
-              <a:t> </a:t>
-            </a:r>
-            <a:r>
-              <a:rPr lang="en-GB" dirty="0" err="1"/>
-              <a:t>acorde</a:t>
-            </a:r>
-            <a:r>
-              <a:rPr lang="en-GB" dirty="0"/>
-              <a:t> con </a:t>
-            </a:r>
-            <a:r>
-              <a:rPr lang="en-GB" dirty="0" err="1"/>
-              <a:t>los</a:t>
-            </a:r>
-            <a:r>
-              <a:rPr lang="en-GB" dirty="0"/>
-              <a:t> meses </a:t>
-            </a:r>
-            <a:r>
-              <a:rPr lang="en-GB" dirty="0" err="1"/>
-              <a:t>pico</a:t>
-            </a:r>
-            <a:r>
-              <a:rPr lang="en-GB" dirty="0"/>
-              <a:t> de </a:t>
-            </a:r>
-            <a:r>
-              <a:rPr lang="en-GB" dirty="0" err="1"/>
-              <a:t>ausentísmo</a:t>
-            </a:r>
-            <a:r>
-              <a:rPr lang="en-GB" dirty="0"/>
-              <a:t> (Marzo, Abril, Julio y Noviembe</a:t>
+              <a:rPr lang="es-ES_tradnl" b="1" noProof="1"/>
+              <a:t>Meses pico (Marzo, Abril, Julio y Noviembre) </a:t>
+            </a:r>
+            <a:r>
+              <a:rPr lang="es-ES_tradnl" noProof="1"/>
+              <a:t>- Redimensionar período vacacional acorde con los meses pico de ausentísmo (Marzo, Abril, Julio y Noviembe</a:t>
             </a:r>
           </a:p>
           <a:p>
             <a:pPr marL="457200" lvl="1" indent="0">
               <a:buNone/>
             </a:pPr>
-            <a:endParaRPr lang="en-GB" dirty="0"/>
+            <a:endParaRPr lang="es-ES_tradnl" noProof="1"/>
           </a:p>
           <a:p>
             <a:pPr marL="457200" lvl="1" indent="0">
               <a:buNone/>
             </a:pPr>
             <a:r>
-              <a:rPr lang="en-GB" dirty="0"/>
+              <a:rPr lang="es-ES_tradnl" noProof="1"/>
               <a:t>. </a:t>
             </a:r>
             <a:r>
-              <a:rPr lang="en-GB" b="1" dirty="0"/>
-              <a:t>Mayor </a:t>
-            </a:r>
-            <a:r>
-              <a:rPr lang="en-GB" b="1" dirty="0" err="1"/>
-              <a:t>acumulo</a:t>
-            </a:r>
-            <a:r>
-              <a:rPr lang="en-GB" b="1" dirty="0"/>
-              <a:t> de horas </a:t>
-            </a:r>
-            <a:r>
-              <a:rPr lang="en-GB" dirty="0"/>
-              <a:t>- </a:t>
-            </a:r>
-            <a:r>
-              <a:rPr lang="en-GB" dirty="0" err="1"/>
-              <a:t>Coordinación</a:t>
-            </a:r>
-            <a:r>
-              <a:rPr lang="en-GB" dirty="0"/>
-              <a:t> con </a:t>
-            </a:r>
-            <a:r>
-              <a:rPr lang="en-GB" dirty="0" err="1"/>
-              <a:t>servicios</a:t>
-            </a:r>
-            <a:r>
-              <a:rPr lang="en-GB" dirty="0"/>
-              <a:t> </a:t>
-            </a:r>
-            <a:r>
-              <a:rPr lang="en-GB" dirty="0" err="1"/>
-              <a:t>médicos</a:t>
-            </a:r>
-            <a:r>
-              <a:rPr lang="en-GB" dirty="0"/>
-              <a:t> para </a:t>
-            </a:r>
-            <a:r>
-              <a:rPr lang="en-GB" dirty="0" err="1"/>
-              <a:t>seguimiento</a:t>
-            </a:r>
-            <a:r>
-              <a:rPr lang="en-GB" dirty="0"/>
-              <a:t> </a:t>
-            </a:r>
-            <a:r>
-              <a:rPr lang="en-GB" dirty="0" err="1"/>
-              <a:t>temprano</a:t>
-            </a:r>
-            <a:r>
-              <a:rPr lang="en-GB" dirty="0"/>
-              <a:t> de </a:t>
-            </a:r>
-            <a:r>
-              <a:rPr lang="en-GB" dirty="0" err="1"/>
-              <a:t>casos</a:t>
-            </a:r>
-            <a:r>
-              <a:rPr lang="en-GB" dirty="0"/>
-              <a:t> &gt; 24h</a:t>
+              <a:rPr lang="es-ES_tradnl" b="1" noProof="1"/>
+              <a:t>Mayor acumulo de horas </a:t>
+            </a:r>
+            <a:r>
+              <a:rPr lang="es-ES_tradnl" noProof="1"/>
+              <a:t>- Coordinación con servicios médicos para seguimiento temprano de casos &gt; 24h</a:t>
             </a:r>
           </a:p>
         </p:txBody>
@@ -9336,7 +9119,7 @@
           <a:lstStyle/>
           <a:p>
             <a:r>
-              <a:rPr lang="en-US" dirty="0">
+              <a:rPr lang="es-ES_tradnl" noProof="1">
                 <a:solidFill>
                   <a:schemeClr val="bg1"/>
                 </a:solidFill>
@@ -9372,7 +9155,7 @@
           <a:bodyPr/>
           <a:lstStyle/>
           <a:p>
-            <a:endParaRPr lang="en-US" dirty="0"/>
+            <a:endParaRPr lang="es-ES_tradnl" noProof="1"/>
           </a:p>
         </p:txBody>
       </p:sp>
@@ -9439,7 +9222,7 @@
           <a:lstStyle/>
           <a:p>
             <a:r>
-              <a:rPr lang="en-US" dirty="0"/>
+              <a:rPr lang="es-ES_tradnl" noProof="1"/>
               <a:t>KPIs</a:t>
             </a:r>
           </a:p>
@@ -9477,37 +9260,24 @@
               <a:buNone/>
             </a:pPr>
             <a:r>
-              <a:rPr lang="en-US" b="1" dirty="0"/>
-              <a:t>% </a:t>
-            </a:r>
-            <a:r>
-              <a:rPr lang="en-US" b="1" dirty="0" err="1"/>
-              <a:t>Empleados</a:t>
-            </a:r>
-            <a:r>
-              <a:rPr lang="en-US" b="1" dirty="0"/>
-              <a:t> </a:t>
-            </a:r>
-            <a:r>
-              <a:rPr lang="en-US" b="1" dirty="0" err="1"/>
-              <a:t>ausentes</a:t>
-            </a:r>
-            <a:endParaRPr lang="en-US" b="1" dirty="0"/>
-          </a:p>
-          <a:p>
-            <a:endParaRPr lang="en-US" dirty="0"/>
-          </a:p>
-          <a:p>
-            <a:endParaRPr lang="en-US" dirty="0"/>
-          </a:p>
-          <a:p>
-            <a:endParaRPr lang="en-US" dirty="0"/>
+              <a:rPr lang="es-ES_tradnl" b="1" noProof="1"/>
+              <a:t>% Empleados ausentes</a:t>
+            </a:r>
+          </a:p>
+          <a:p>
+            <a:endParaRPr lang="es-ES_tradnl" noProof="1"/>
+          </a:p>
+          <a:p>
+            <a:endParaRPr lang="es-ES_tradnl" noProof="1"/>
+          </a:p>
+          <a:p>
+            <a:endParaRPr lang="es-ES_tradnl" noProof="1"/>
           </a:p>
           <a:p>
             <a:pPr marL="0" indent="0">
               <a:buNone/>
             </a:pPr>
-            <a:endParaRPr lang="en-US" dirty="0"/>
+            <a:endParaRPr lang="es-ES_tradnl" noProof="1"/>
           </a:p>
         </p:txBody>
       </p:sp>
@@ -9650,7 +9420,7 @@
               <a:defRPr/>
             </a:pPr>
             <a:fld id="{47FEACEE-25B4-4A2D-B147-27296E36371D}" type="slidenum">
-              <a:rPr kumimoji="0" lang="en-US" altLang="zh-CN" sz="1200" u="none" strike="noStrike" kern="1200" cap="none" spc="0" normalizeH="0" baseline="0" smtClean="0">
+              <a:rPr kumimoji="0" lang="es-ES_tradnl" sz="1200" u="none" strike="noStrike" kern="1200" cap="none" spc="0" normalizeH="0" baseline="0" noProof="1" smtClean="0">
                 <a:ln>
                   <a:noFill/>
                 </a:ln>
@@ -9680,7 +9450,7 @@
               </a:pPr>
               <a:t>13</a:t>
             </a:fld>
-            <a:endParaRPr kumimoji="0" lang="en-US" altLang="zh-CN" sz="1200" u="none" strike="noStrike" kern="1200" cap="none" spc="0" normalizeH="0" baseline="0" dirty="0">
+            <a:endParaRPr kumimoji="0" lang="es-ES_tradnl" sz="1200" u="none" strike="noStrike" kern="1200" cap="none" spc="0" normalizeH="0" baseline="0" noProof="1">
               <a:ln>
                 <a:noFill/>
               </a:ln>
@@ -9716,11 +9486,11 @@
           <a:lstStyle/>
           <a:p>
             <a:fld id="{47FEACEE-25B4-4A2D-B147-27296E36371D}" type="slidenum">
-              <a:rPr lang="en-US" altLang="zh-CN" noProof="0" smtClean="0"/>
+              <a:rPr lang="es-ES_tradnl" noProof="1" smtClean="0"/>
               <a:pPr/>
               <a:t>13</a:t>
             </a:fld>
-            <a:endParaRPr lang="en-US" altLang="zh-CN" noProof="0" dirty="0"/>
+            <a:endParaRPr lang="es-ES_tradnl" noProof="1"/>
           </a:p>
         </p:txBody>
       </p:sp>
@@ -9767,10 +9537,9 @@
           <a:p>
             <a:pPr algn="ctr"/>
             <a:r>
-              <a:rPr lang="es-ES" dirty="0"/>
+              <a:rPr lang="es-ES_tradnl" noProof="1"/>
               <a:t>91.67%</a:t>
             </a:r>
-            <a:endParaRPr lang="en-GB" dirty="0"/>
           </a:p>
         </p:txBody>
       </p:sp>
@@ -9970,29 +9739,16 @@
               <a:buNone/>
             </a:pPr>
             <a:r>
-              <a:rPr lang="en-US" b="1" dirty="0"/>
-              <a:t>Mes </a:t>
-            </a:r>
-            <a:r>
-              <a:rPr lang="en-US" b="1" dirty="0" err="1"/>
-              <a:t>pico</a:t>
-            </a:r>
-            <a:r>
-              <a:rPr lang="en-US" b="1" dirty="0"/>
-              <a:t> carga </a:t>
-            </a:r>
-            <a:r>
-              <a:rPr lang="en-US" b="1" dirty="0" err="1"/>
-              <a:t>ausencia</a:t>
-            </a:r>
-            <a:endParaRPr lang="en-US" b="1" dirty="0"/>
+              <a:rPr lang="es-ES_tradnl" b="1" noProof="1"/>
+              <a:t>Mes pico carga ausencia</a:t>
+            </a:r>
           </a:p>
           <a:p>
             <a:pPr algn="ctr"/>
-            <a:endParaRPr lang="en-US" b="1" dirty="0"/>
-          </a:p>
-          <a:p>
-            <a:endParaRPr lang="en-US" dirty="0"/>
+            <a:endParaRPr lang="es-ES_tradnl" b="1" noProof="1"/>
+          </a:p>
+          <a:p>
+            <a:endParaRPr lang="es-ES_tradnl" noProof="1"/>
           </a:p>
         </p:txBody>
       </p:sp>
@@ -10039,17 +9795,16 @@
           <a:p>
             <a:pPr algn="ctr"/>
             <a:r>
-              <a:rPr lang="es-ES" dirty="0"/>
+              <a:rPr lang="es-ES_tradnl" noProof="1"/>
               <a:t>Marzo </a:t>
             </a:r>
           </a:p>
           <a:p>
             <a:pPr algn="ctr"/>
             <a:r>
-              <a:rPr lang="es-ES" dirty="0"/>
+              <a:rPr lang="es-ES_tradnl" noProof="1"/>
               <a:t>755 horas</a:t>
             </a:r>
-            <a:endParaRPr lang="en-GB" dirty="0"/>
           </a:p>
         </p:txBody>
       </p:sp>
@@ -10249,12 +10004,8 @@
               <a:buNone/>
             </a:pPr>
             <a:r>
-              <a:rPr lang="en-US" b="1" dirty="0" err="1"/>
-              <a:t>Motivo</a:t>
-            </a:r>
-            <a:r>
-              <a:rPr lang="en-US" b="1" dirty="0"/>
-              <a:t> Modal</a:t>
+              <a:rPr lang="es-ES_tradnl" b="1" noProof="1"/>
+              <a:t>Motivo Modal</a:t>
             </a:r>
           </a:p>
         </p:txBody>
@@ -10455,34 +10206,9 @@
               <a:buNone/>
             </a:pPr>
             <a:r>
-              <a:rPr lang="en-US" b="1" dirty="0" err="1"/>
-              <a:t>Indice</a:t>
-            </a:r>
-            <a:r>
-              <a:rPr lang="en-US" b="1" dirty="0"/>
-              <a:t> </a:t>
-            </a:r>
-            <a:r>
-              <a:rPr lang="en-US" b="1" dirty="0" err="1"/>
-              <a:t>Eficiencia</a:t>
-            </a:r>
-            <a:r>
-              <a:rPr lang="en-US" b="1" dirty="0"/>
-              <a:t> </a:t>
-            </a:r>
-            <a:r>
-              <a:rPr lang="en-US" b="1" dirty="0" err="1"/>
-              <a:t>relativa</a:t>
-            </a:r>
-            <a:r>
-              <a:rPr lang="en-US" b="1" dirty="0"/>
-              <a:t> carga </a:t>
-            </a:r>
-            <a:r>
-              <a:rPr lang="en-US" b="1" dirty="0" err="1"/>
-              <a:t>laboral</a:t>
-            </a:r>
-            <a:endParaRPr lang="en-US" b="1" dirty="0"/>
+              <a:rPr lang="es-ES_tradnl" b="1" noProof="1"/>
+              <a:t>Indice Eficiencia relativa carga laboral</a:t>
+            </a:r>
           </a:p>
         </p:txBody>
       </p:sp>
@@ -10529,25 +10255,16 @@
           <a:p>
             <a:pPr algn="ctr"/>
             <a:r>
-              <a:rPr lang="es-ES" dirty="0"/>
-              <a:t>Medical </a:t>
-            </a:r>
-            <a:r>
-              <a:rPr lang="es-ES" dirty="0" err="1"/>
-              <a:t>Consultation</a:t>
-            </a:r>
-            <a:r>
-              <a:rPr lang="es-ES" dirty="0"/>
-              <a:t> </a:t>
+              <a:rPr lang="es-ES_tradnl" noProof="1"/>
+              <a:t>Medical Consultation </a:t>
             </a:r>
           </a:p>
           <a:p>
             <a:pPr algn="ctr"/>
             <a:r>
-              <a:rPr lang="es-ES" dirty="0"/>
+              <a:rPr lang="es-ES_tradnl" noProof="1"/>
               <a:t>142 eventos</a:t>
             </a:r>
-            <a:endParaRPr lang="en-GB" dirty="0"/>
           </a:p>
         </p:txBody>
       </p:sp>
@@ -10594,10 +10311,9 @@
           <a:p>
             <a:pPr algn="ctr"/>
             <a:r>
-              <a:rPr lang="es-ES" dirty="0"/>
+              <a:rPr lang="es-ES_tradnl" noProof="1"/>
               <a:t>0.35</a:t>
             </a:r>
-            <a:endParaRPr lang="en-GB" dirty="0"/>
           </a:p>
         </p:txBody>
       </p:sp>
@@ -10658,7 +10374,7 @@
           <a:lstStyle/>
           <a:p>
             <a:r>
-              <a:rPr lang="en-US" dirty="0"/>
+              <a:rPr lang="es-ES_tradnl" noProof="1"/>
               <a:t>Agenda </a:t>
             </a:r>
           </a:p>
@@ -10692,112 +10408,35 @@
           </a:bodyPr>
           <a:lstStyle/>
           <a:p>
-            <a:endParaRPr lang="en-US" dirty="0"/>
-          </a:p>
-          <a:p>
-            <a:r>
-              <a:rPr lang="en-US" dirty="0" err="1"/>
-              <a:t>Perfil</a:t>
-            </a:r>
-            <a:r>
-              <a:rPr lang="en-US" dirty="0"/>
-              <a:t> </a:t>
-            </a:r>
-            <a:r>
-              <a:rPr lang="en-US" dirty="0" err="1"/>
-              <a:t>sociodemográfico</a:t>
-            </a:r>
-            <a:endParaRPr lang="en-US" dirty="0"/>
-          </a:p>
-          <a:p>
-            <a:r>
-              <a:rPr lang="en-US" dirty="0" err="1"/>
-              <a:t>Estrategias</a:t>
-            </a:r>
-            <a:r>
-              <a:rPr lang="en-US" dirty="0"/>
-              <a:t> de </a:t>
-            </a:r>
-            <a:r>
-              <a:rPr lang="en-US" dirty="0" err="1"/>
-              <a:t>Compromiso</a:t>
-            </a:r>
-            <a:r>
-              <a:rPr lang="en-US" dirty="0"/>
-              <a:t> y Desarrollo</a:t>
-            </a:r>
-          </a:p>
-          <a:p>
-            <a:r>
-              <a:rPr lang="en-US" dirty="0" err="1"/>
-              <a:t>Analisis</a:t>
-            </a:r>
-            <a:r>
-              <a:rPr lang="en-US" dirty="0"/>
-              <a:t> de </a:t>
-            </a:r>
-            <a:r>
-              <a:rPr lang="en-US" dirty="0" err="1"/>
-              <a:t>Ausentismo</a:t>
-            </a:r>
-            <a:r>
-              <a:rPr lang="en-US" dirty="0"/>
-              <a:t>: </a:t>
-            </a:r>
-            <a:r>
-              <a:rPr lang="en-US" dirty="0" err="1"/>
-              <a:t>Magnitud</a:t>
-            </a:r>
-            <a:r>
-              <a:rPr lang="en-US" dirty="0"/>
-              <a:t> y </a:t>
-            </a:r>
-            <a:r>
-              <a:rPr lang="en-US" dirty="0" err="1"/>
-              <a:t>variación</a:t>
-            </a:r>
-            <a:r>
-              <a:rPr lang="en-US" dirty="0"/>
-              <a:t> temporal</a:t>
-            </a:r>
-          </a:p>
-          <a:p>
-            <a:r>
-              <a:rPr lang="en-US" dirty="0" err="1"/>
-              <a:t>Estrategias</a:t>
-            </a:r>
-            <a:r>
-              <a:rPr lang="en-US" dirty="0"/>
-              <a:t> para </a:t>
-            </a:r>
-            <a:r>
-              <a:rPr lang="en-US" dirty="0" err="1"/>
-              <a:t>reducir</a:t>
-            </a:r>
-            <a:r>
-              <a:rPr lang="en-US" dirty="0"/>
-              <a:t> </a:t>
-            </a:r>
-            <a:r>
-              <a:rPr lang="en-US" dirty="0" err="1"/>
-              <a:t>el</a:t>
-            </a:r>
-            <a:r>
-              <a:rPr lang="en-US" dirty="0"/>
-              <a:t> </a:t>
-            </a:r>
-            <a:r>
-              <a:rPr lang="en-US" dirty="0" err="1"/>
-              <a:t>Ausentismo</a:t>
-            </a:r>
-            <a:r>
-              <a:rPr lang="en-US" dirty="0"/>
-              <a:t> </a:t>
-            </a:r>
-          </a:p>
-          <a:p>
-            <a:r>
-              <a:rPr lang="en-US" dirty="0"/>
+            <a:endParaRPr lang="es-ES_tradnl" noProof="1"/>
+          </a:p>
+          <a:p>
+            <a:r>
+              <a:rPr lang="es-ES_tradnl" noProof="1"/>
+              <a:t>Perfil sociodemográfico</a:t>
+            </a:r>
+          </a:p>
+          <a:p>
+            <a:r>
+              <a:rPr lang="es-ES_tradnl" noProof="1"/>
+              <a:t>Estrategias de Compromiso y Desarrollo</a:t>
+            </a:r>
+          </a:p>
+          <a:p>
+            <a:r>
+              <a:rPr lang="es-ES_tradnl" noProof="1"/>
+              <a:t>Análisis de Ausentismo: Magnitud y variación temporal</a:t>
+            </a:r>
+          </a:p>
+          <a:p>
+            <a:r>
+              <a:rPr lang="es-ES_tradnl" noProof="1"/>
+              <a:t>Estrategias para reducir el Ausentismo </a:t>
+            </a:r>
+          </a:p>
+          <a:p>
+            <a:r>
+              <a:rPr lang="es-ES_tradnl" noProof="1"/>
               <a:t>KPIs</a:t>
             </a:r>
           </a:p>
@@ -10825,11 +10464,11 @@
           <a:lstStyle/>
           <a:p>
             <a:fld id="{47FEACEE-25B4-4A2D-B147-27296E36371D}" type="slidenum">
-              <a:rPr lang="en-US" altLang="zh-CN" noProof="0" smtClean="0"/>
+              <a:rPr lang="es-ES_tradnl" noProof="1" smtClean="0"/>
               <a:pPr/>
               <a:t>2</a:t>
             </a:fld>
-            <a:endParaRPr lang="en-US" altLang="zh-CN" noProof="0" dirty="0"/>
+            <a:endParaRPr lang="es-ES_tradnl" noProof="1"/>
           </a:p>
         </p:txBody>
       </p:sp>
@@ -10898,37 +10537,21 @@
           <a:lstStyle/>
           <a:p>
             <a:r>
-              <a:rPr lang="en-US" dirty="0" err="1">
+              <a:rPr lang="es-ES_tradnl" noProof="1">
                 <a:solidFill>
                   <a:schemeClr val="bg1"/>
                 </a:solidFill>
               </a:rPr>
-              <a:t>Perfil</a:t>
-            </a:r>
-            <a:r>
-              <a:rPr lang="en-US" dirty="0">
-                <a:solidFill>
-                  <a:schemeClr val="bg1"/>
-                </a:solidFill>
-              </a:rPr>
-              <a:t> </a:t>
-            </a:r>
-            <a:r>
-              <a:rPr lang="en-US" dirty="0" err="1">
-                <a:solidFill>
-                  <a:schemeClr val="bg1"/>
-                </a:solidFill>
-              </a:rPr>
-              <a:t>sociodemográfico</a:t>
+              <a:t>Perfil sociodemográfico</a:t>
             </a:r>
             <a:br>
-              <a:rPr lang="en-US" dirty="0">
+              <a:rPr lang="es-ES_tradnl" noProof="1">
                 <a:solidFill>
                   <a:schemeClr val="bg1"/>
                 </a:solidFill>
               </a:rPr>
             </a:br>
-            <a:endParaRPr lang="en-US" dirty="0">
+            <a:endParaRPr lang="es-ES_tradnl" noProof="1">
               <a:solidFill>
                 <a:schemeClr val="bg1"/>
               </a:solidFill>
@@ -10962,7 +10585,7 @@
           <a:bodyPr/>
           <a:lstStyle/>
           <a:p>
-            <a:endParaRPr lang="en-US" dirty="0"/>
+            <a:endParaRPr lang="es-ES_tradnl" noProof="1"/>
           </a:p>
         </p:txBody>
       </p:sp>
@@ -11135,7 +10758,7 @@
               <a:defRPr/>
             </a:pPr>
             <a:fld id="{47FEACEE-25B4-4A2D-B147-27296E36371D}" type="slidenum">
-              <a:rPr kumimoji="0" lang="en-US" altLang="zh-CN" sz="1200" u="none" strike="noStrike" kern="1200" cap="none" spc="0" normalizeH="0" baseline="0" smtClean="0">
+              <a:rPr kumimoji="0" lang="es-ES_tradnl" sz="1200" u="none" strike="noStrike" kern="1200" cap="none" spc="0" normalizeH="0" baseline="0" noProof="1" smtClean="0">
                 <a:ln>
                   <a:noFill/>
                 </a:ln>
@@ -11165,7 +10788,7 @@
               </a:pPr>
               <a:t>4</a:t>
             </a:fld>
-            <a:endParaRPr kumimoji="0" lang="en-US" altLang="zh-CN" sz="1200" u="none" strike="noStrike" kern="1200" cap="none" spc="0" normalizeH="0" baseline="0" dirty="0">
+            <a:endParaRPr kumimoji="0" lang="es-ES_tradnl" sz="1200" u="none" strike="noStrike" kern="1200" cap="none" spc="0" normalizeH="0" baseline="0" noProof="1">
               <a:ln>
                 <a:noFill/>
               </a:ln>
@@ -11201,11 +10824,11 @@
           <a:lstStyle/>
           <a:p>
             <a:fld id="{47FEACEE-25B4-4A2D-B147-27296E36371D}" type="slidenum">
-              <a:rPr lang="en-US" altLang="zh-CN" noProof="0" smtClean="0"/>
+              <a:rPr lang="es-ES_tradnl" noProof="1" smtClean="0"/>
               <a:pPr/>
               <a:t>4</a:t>
             </a:fld>
-            <a:endParaRPr lang="en-US" altLang="zh-CN" noProof="0" dirty="0"/>
+            <a:endParaRPr lang="es-ES_tradnl" noProof="1"/>
           </a:p>
         </p:txBody>
       </p:sp>
@@ -11238,10 +10861,9 @@
           <a:lstStyle/>
           <a:p>
             <a:r>
-              <a:rPr lang="es-ES" sz="4000" dirty="0"/>
+              <a:rPr lang="es-ES_tradnl" sz="4000" noProof="1"/>
               <a:t>Perfil sociodemográfico</a:t>
             </a:r>
-            <a:endParaRPr lang="en-GB" sz="4000" dirty="0"/>
           </a:p>
         </p:txBody>
       </p:sp>
@@ -11295,7 +10917,7 @@
         <p:spPr>
           <a:xfrm>
             <a:off x="1031358" y="5018567"/>
-            <a:ext cx="3477875" cy="369332"/>
+            <a:ext cx="3755259" cy="369332"/>
           </a:xfrm>
           <a:prstGeom prst="rect">
             <a:avLst/>
@@ -11309,15 +10931,11 @@
           <a:lstStyle/>
           <a:p>
             <a:r>
-              <a:rPr lang="es-ES" b="1" dirty="0" err="1"/>
-              <a:t>Educacion</a:t>
-            </a:r>
-            <a:r>
-              <a:rPr lang="es-ES" b="1" dirty="0"/>
-              <a:t>: </a:t>
-            </a:r>
-            <a:r>
-              <a:rPr lang="es-ES" dirty="0"/>
+              <a:rPr lang="es-ES_tradnl" b="1" noProof="1"/>
+              <a:t>Educación: </a:t>
+            </a:r>
+            <a:r>
+              <a:rPr lang="es-ES_tradnl" noProof="1"/>
               <a:t>77.8% No universitarios</a:t>
             </a:r>
           </a:p>
@@ -11352,24 +10970,24 @@
           <a:lstStyle/>
           <a:p>
             <a:r>
-              <a:rPr lang="es-ES" b="1" dirty="0"/>
+              <a:rPr lang="es-ES_tradnl" b="1" noProof="1"/>
               <a:t>Edad media: </a:t>
             </a:r>
             <a:r>
-              <a:rPr lang="es-ES" dirty="0"/>
+              <a:rPr lang="es-ES_tradnl" noProof="1"/>
               <a:t>38 años</a:t>
             </a:r>
           </a:p>
           <a:p>
-            <a:endParaRPr lang="es-ES" b="1" dirty="0"/>
-          </a:p>
-          <a:p>
-            <a:r>
-              <a:rPr lang="es-ES" b="1" dirty="0"/>
+            <a:endParaRPr lang="es-ES_tradnl" b="1" noProof="1"/>
+          </a:p>
+          <a:p>
+            <a:r>
+              <a:rPr lang="es-ES_tradnl" b="1" noProof="1"/>
               <a:t>Intervalo: </a:t>
             </a:r>
             <a:r>
-              <a:rPr lang="es-ES" dirty="0"/>
+              <a:rPr lang="es-ES_tradnl" noProof="1"/>
               <a:t>27-58 años</a:t>
             </a:r>
           </a:p>
@@ -11404,14 +11022,10 @@
           <a:lstStyle/>
           <a:p>
             <a:r>
-              <a:rPr lang="es-ES" b="1" dirty="0" err="1"/>
-              <a:t>Num</a:t>
-            </a:r>
-            <a:r>
-              <a:rPr lang="es-ES" b="1" dirty="0"/>
-              <a:t>. Hijos: entre 0-4</a:t>
-            </a:r>
-            <a:endParaRPr lang="es-ES" dirty="0"/>
+              <a:rPr lang="es-ES_tradnl" b="1" noProof="1"/>
+              <a:t>Num. Hijos: entre 0-4</a:t>
+            </a:r>
+            <a:endParaRPr lang="es-ES_tradnl" noProof="1"/>
           </a:p>
         </p:txBody>
       </p:sp>
@@ -11486,41 +11100,17 @@
           <a:lstStyle/>
           <a:p>
             <a:r>
-              <a:rPr lang="en-US" dirty="0" err="1">
+              <a:rPr lang="es-ES_tradnl" noProof="1">
                 <a:solidFill>
                   <a:schemeClr val="bg1"/>
                 </a:solidFill>
               </a:rPr>
-              <a:t>Estrategias</a:t>
-            </a:r>
-            <a:r>
-              <a:rPr lang="en-US" dirty="0">
-                <a:solidFill>
-                  <a:schemeClr val="bg1"/>
-                </a:solidFill>
-              </a:rPr>
-              <a:t> de </a:t>
-            </a:r>
-            <a:r>
-              <a:rPr lang="en-US" dirty="0" err="1">
-                <a:solidFill>
-                  <a:schemeClr val="bg1"/>
-                </a:solidFill>
-              </a:rPr>
-              <a:t>Compromiso</a:t>
-            </a:r>
-            <a:r>
-              <a:rPr lang="en-US" dirty="0">
-                <a:solidFill>
-                  <a:schemeClr val="bg1"/>
-                </a:solidFill>
-              </a:rPr>
-              <a:t> y Desarrollo</a:t>
+              <a:t>Estrategias de Compromiso y Desarrollo</a:t>
             </a:r>
             <a:br>
-              <a:rPr lang="en-US" dirty="0"/>
+              <a:rPr lang="es-ES_tradnl" noProof="1"/>
             </a:br>
-            <a:endParaRPr lang="en-US" dirty="0">
+            <a:endParaRPr lang="es-ES_tradnl" noProof="1">
               <a:solidFill>
                 <a:schemeClr val="bg1"/>
               </a:solidFill>
@@ -11554,7 +11144,7 @@
           <a:bodyPr/>
           <a:lstStyle/>
           <a:p>
-            <a:endParaRPr lang="en-US" dirty="0"/>
+            <a:endParaRPr lang="es-ES_tradnl" noProof="1"/>
           </a:p>
         </p:txBody>
       </p:sp>
@@ -11621,20 +11211,8 @@
           <a:lstStyle/>
           <a:p>
             <a:r>
-              <a:rPr lang="en-US" dirty="0" err="1"/>
-              <a:t>Estrategias</a:t>
-            </a:r>
-            <a:r>
-              <a:rPr lang="en-US" dirty="0"/>
-              <a:t> de </a:t>
-            </a:r>
-            <a:r>
-              <a:rPr lang="en-US" dirty="0" err="1"/>
-              <a:t>Compromiso</a:t>
-            </a:r>
-            <a:r>
-              <a:rPr lang="en-US" dirty="0"/>
-              <a:t> y Desarrollo</a:t>
+              <a:rPr lang="es-ES_tradnl" noProof="1"/>
+              <a:t>Estrategias de Compromiso y Desarrollo</a:t>
             </a:r>
           </a:p>
         </p:txBody>
@@ -11778,7 +11356,7 @@
               <a:defRPr/>
             </a:pPr>
             <a:fld id="{47FEACEE-25B4-4A2D-B147-27296E36371D}" type="slidenum">
-              <a:rPr kumimoji="0" lang="en-US" altLang="zh-CN" sz="1200" u="none" strike="noStrike" kern="1200" cap="none" spc="0" normalizeH="0" baseline="0" smtClean="0">
+              <a:rPr kumimoji="0" lang="es-ES_tradnl" sz="1200" u="none" strike="noStrike" kern="1200" cap="none" spc="0" normalizeH="0" baseline="0" noProof="1" smtClean="0">
                 <a:ln>
                   <a:noFill/>
                 </a:ln>
@@ -11808,7 +11386,7 @@
               </a:pPr>
               <a:t>6</a:t>
             </a:fld>
-            <a:endParaRPr kumimoji="0" lang="en-US" altLang="zh-CN" sz="1200" u="none" strike="noStrike" kern="1200" cap="none" spc="0" normalizeH="0" baseline="0" dirty="0">
+            <a:endParaRPr kumimoji="0" lang="es-ES_tradnl" sz="1200" u="none" strike="noStrike" kern="1200" cap="none" spc="0" normalizeH="0" baseline="0" noProof="1">
               <a:ln>
                 <a:noFill/>
               </a:ln>
@@ -11844,11 +11422,11 @@
           <a:lstStyle/>
           <a:p>
             <a:fld id="{47FEACEE-25B4-4A2D-B147-27296E36371D}" type="slidenum">
-              <a:rPr lang="en-US" altLang="zh-CN" noProof="0" smtClean="0"/>
+              <a:rPr lang="es-ES_tradnl" noProof="1" smtClean="0"/>
               <a:pPr/>
               <a:t>6</a:t>
             </a:fld>
-            <a:endParaRPr lang="en-US" altLang="zh-CN" noProof="0" dirty="0"/>
+            <a:endParaRPr lang="es-ES_tradnl" noProof="1"/>
           </a:p>
         </p:txBody>
       </p:sp>
@@ -11874,122 +11452,52 @@
           <a:lstStyle/>
           <a:p>
             <a:r>
-              <a:rPr lang="es-ES" b="1" dirty="0">
+              <a:rPr lang="es-ES_tradnl" b="1" noProof="1">
                 <a:effectLst/>
                 <a:latin typeface="Consolas" panose="020B0609020204030204" pitchFamily="49" charset="0"/>
               </a:rPr>
-              <a:t>Planes de </a:t>
-            </a:r>
-            <a:r>
-              <a:rPr lang="es-ES" b="1" dirty="0" err="1">
-                <a:effectLst/>
+              <a:t>Planes de micro-formación y Upskilling</a:t>
+            </a:r>
+          </a:p>
+          <a:p>
+            <a:pPr lvl="1"/>
+            <a:r>
+              <a:rPr lang="es-ES_tradnl" b="1" noProof="1">
                 <a:latin typeface="Consolas" panose="020B0609020204030204" pitchFamily="49" charset="0"/>
               </a:rPr>
-              <a:t>micro-formación</a:t>
-            </a:r>
-            <a:r>
-              <a:rPr lang="es-ES" b="1" dirty="0">
-                <a:effectLst/>
-                <a:latin typeface="Consolas" panose="020B0609020204030204" pitchFamily="49" charset="0"/>
-              </a:rPr>
-              <a:t> y </a:t>
-            </a:r>
-            <a:r>
-              <a:rPr lang="es-ES" b="1" dirty="0" err="1">
-                <a:effectLst/>
-                <a:latin typeface="Consolas" panose="020B0609020204030204" pitchFamily="49" charset="0"/>
-              </a:rPr>
-              <a:t>Upskilling</a:t>
-            </a:r>
-            <a:endParaRPr lang="es-ES" b="1" dirty="0">
+              <a:t>Certificaciones técnicas y otros Desarrollos Profesionales</a:t>
+            </a:r>
+            <a:endParaRPr lang="es-ES_tradnl" b="1" noProof="1">
               <a:effectLst/>
               <a:latin typeface="Consolas" panose="020B0609020204030204" pitchFamily="49" charset="0"/>
             </a:endParaRPr>
           </a:p>
           <a:p>
-            <a:pPr lvl="1"/>
-            <a:r>
-              <a:rPr lang="es-ES" b="1" dirty="0">
-                <a:latin typeface="Consolas" panose="020B0609020204030204" pitchFamily="49" charset="0"/>
-              </a:rPr>
-              <a:t>Certificaciones técnicas y otros Desarrollos Professional</a:t>
-            </a:r>
-            <a:endParaRPr lang="es-ES" b="1" dirty="0">
+            <a:endParaRPr lang="es-ES_tradnl" b="1" noProof="1">
+              <a:latin typeface="Consolas" panose="020B0609020204030204" pitchFamily="49" charset="0"/>
+            </a:endParaRPr>
+          </a:p>
+          <a:p>
+            <a:endParaRPr lang="es-ES_tradnl" b="0" noProof="1">
               <a:effectLst/>
               <a:latin typeface="Consolas" panose="020B0609020204030204" pitchFamily="49" charset="0"/>
             </a:endParaRPr>
           </a:p>
           <a:p>
-            <a:endParaRPr lang="es-ES" b="1" dirty="0">
-              <a:latin typeface="Consolas" panose="020B0609020204030204" pitchFamily="49" charset="0"/>
-            </a:endParaRPr>
-          </a:p>
-          <a:p>
-            <a:endParaRPr lang="es-ES" b="0" dirty="0">
-              <a:effectLst/>
-              <a:latin typeface="Consolas" panose="020B0609020204030204" pitchFamily="49" charset="0"/>
-            </a:endParaRPr>
-          </a:p>
-          <a:p>
-            <a:r>
-              <a:rPr lang="en-GB" b="1" dirty="0" err="1">
+            <a:r>
+              <a:rPr lang="es-ES_tradnl" b="1" noProof="1">
                 <a:latin typeface="Consolas" panose="020B0609020204030204" pitchFamily="49" charset="0"/>
               </a:rPr>
-              <a:t>Politicas</a:t>
-            </a:r>
-            <a:r>
-              <a:rPr lang="en-GB" b="1" dirty="0">
+              <a:t>Políticas de conciliación</a:t>
+            </a:r>
+          </a:p>
+          <a:p>
+            <a:pPr lvl="1"/>
+            <a:r>
+              <a:rPr lang="es-ES_tradnl" b="1" noProof="1">
                 <a:latin typeface="Consolas" panose="020B0609020204030204" pitchFamily="49" charset="0"/>
               </a:rPr>
-              <a:t> de </a:t>
-            </a:r>
-            <a:r>
-              <a:rPr lang="en-GB" b="1" dirty="0" err="1">
-                <a:latin typeface="Consolas" panose="020B0609020204030204" pitchFamily="49" charset="0"/>
-              </a:rPr>
-              <a:t>conciliación</a:t>
-            </a:r>
-            <a:endParaRPr lang="en-GB" b="1" dirty="0">
-              <a:latin typeface="Consolas" panose="020B0609020204030204" pitchFamily="49" charset="0"/>
-            </a:endParaRPr>
-          </a:p>
-          <a:p>
-            <a:pPr lvl="1"/>
-            <a:r>
-              <a:rPr lang="en-GB" b="1" dirty="0" err="1">
-                <a:latin typeface="Consolas" panose="020B0609020204030204" pitchFamily="49" charset="0"/>
-              </a:rPr>
-              <a:t>Flexibilidad</a:t>
-            </a:r>
-            <a:r>
-              <a:rPr lang="en-GB" b="1" dirty="0">
-                <a:latin typeface="Consolas" panose="020B0609020204030204" pitchFamily="49" charset="0"/>
-              </a:rPr>
-              <a:t> </a:t>
-            </a:r>
-            <a:r>
-              <a:rPr lang="en-GB" b="1" dirty="0" err="1">
-                <a:latin typeface="Consolas" panose="020B0609020204030204" pitchFamily="49" charset="0"/>
-              </a:rPr>
-              <a:t>horaria</a:t>
-            </a:r>
-            <a:r>
-              <a:rPr lang="en-GB" b="1" dirty="0">
-                <a:latin typeface="Consolas" panose="020B0609020204030204" pitchFamily="49" charset="0"/>
-              </a:rPr>
-              <a:t> (</a:t>
-            </a:r>
-            <a:r>
-              <a:rPr lang="en-GB" b="1" dirty="0" err="1">
-                <a:latin typeface="Consolas" panose="020B0609020204030204" pitchFamily="49" charset="0"/>
-              </a:rPr>
-              <a:t>bolsas</a:t>
-            </a:r>
-            <a:r>
-              <a:rPr lang="en-GB" b="1" dirty="0">
-                <a:latin typeface="Consolas" panose="020B0609020204030204" pitchFamily="49" charset="0"/>
-              </a:rPr>
-              <a:t> de horas)</a:t>
+              <a:t>Flexibilidad horaria (bolsas de horas)</a:t>
             </a:r>
           </a:p>
         </p:txBody>
@@ -12065,34 +11573,13 @@
           <a:lstStyle/>
           <a:p>
             <a:r>
-              <a:rPr lang="en-US" dirty="0" err="1">
+              <a:rPr lang="es-ES_tradnl" noProof="1">
                 <a:solidFill>
                   <a:schemeClr val="bg1"/>
                 </a:solidFill>
               </a:rPr>
-              <a:t>Analisis</a:t>
-            </a:r>
-            <a:r>
-              <a:rPr lang="en-US" dirty="0">
-                <a:solidFill>
-                  <a:schemeClr val="bg1"/>
-                </a:solidFill>
-              </a:rPr>
-              <a:t> </a:t>
-            </a:r>
-            <a:r>
-              <a:rPr lang="en-US" dirty="0" err="1">
-                <a:solidFill>
-                  <a:schemeClr val="bg1"/>
-                </a:solidFill>
-              </a:rPr>
-              <a:t>Ausentismo</a:t>
-            </a:r>
-            <a:endParaRPr lang="en-US" dirty="0">
-              <a:solidFill>
-                <a:schemeClr val="bg1"/>
-              </a:solidFill>
-            </a:endParaRPr>
+              <a:t>Analisis Ausentismo</a:t>
+            </a:r>
           </a:p>
         </p:txBody>
       </p:sp>
@@ -12123,20 +11610,8 @@
           <a:lstStyle/>
           <a:p>
             <a:r>
-              <a:rPr lang="en-US" dirty="0" err="1"/>
-              <a:t>Magnitud</a:t>
-            </a:r>
-            <a:r>
-              <a:rPr lang="en-US" dirty="0"/>
-              <a:t> y </a:t>
-            </a:r>
-            <a:r>
-              <a:rPr lang="en-US" dirty="0" err="1"/>
-              <a:t>análisis</a:t>
-            </a:r>
-            <a:r>
-              <a:rPr lang="en-US" dirty="0"/>
-              <a:t> temporal</a:t>
+              <a:rPr lang="es-ES_tradnl" noProof="1"/>
+              <a:t>Magnitud y análisis temporal</a:t>
             </a:r>
           </a:p>
         </p:txBody>
@@ -12204,12 +11679,8 @@
           <a:lstStyle/>
           <a:p>
             <a:r>
-              <a:rPr lang="es-ES" dirty="0" err="1"/>
-              <a:t>Analisis</a:t>
-            </a:r>
-            <a:r>
-              <a:rPr lang="es-ES" dirty="0"/>
-              <a:t> de la Magnitud del Ausentismo</a:t>
+              <a:rPr lang="es-ES_tradnl" noProof="1"/>
+              <a:t>Analisis de la Magnitud del Ausentismo</a:t>
             </a:r>
           </a:p>
         </p:txBody>
@@ -12353,7 +11824,7 @@
               <a:defRPr/>
             </a:pPr>
             <a:fld id="{47FEACEE-25B4-4A2D-B147-27296E36371D}" type="slidenum">
-              <a:rPr kumimoji="0" lang="en-US" altLang="zh-CN" sz="1200" u="none" strike="noStrike" kern="1200" cap="none" spc="0" normalizeH="0" baseline="0" smtClean="0">
+              <a:rPr kumimoji="0" lang="es-ES_tradnl" sz="1200" u="none" strike="noStrike" kern="1200" cap="none" spc="0" normalizeH="0" baseline="0" noProof="1" smtClean="0">
                 <a:ln>
                   <a:noFill/>
                 </a:ln>
@@ -12383,7 +11854,7 @@
               </a:pPr>
               <a:t>8</a:t>
             </a:fld>
-            <a:endParaRPr kumimoji="0" lang="en-US" altLang="zh-CN" sz="1200" u="none" strike="noStrike" kern="1200" cap="none" spc="0" normalizeH="0" baseline="0" dirty="0">
+            <a:endParaRPr kumimoji="0" lang="es-ES_tradnl" sz="1200" u="none" strike="noStrike" kern="1200" cap="none" spc="0" normalizeH="0" baseline="0" noProof="1">
               <a:ln>
                 <a:noFill/>
               </a:ln>
@@ -12419,11 +11890,11 @@
           <a:lstStyle/>
           <a:p>
             <a:fld id="{47FEACEE-25B4-4A2D-B147-27296E36371D}" type="slidenum">
-              <a:rPr lang="en-US" altLang="zh-CN" noProof="0" smtClean="0"/>
+              <a:rPr lang="es-ES_tradnl" noProof="1" smtClean="0"/>
               <a:pPr/>
               <a:t>8</a:t>
             </a:fld>
-            <a:endParaRPr lang="en-US" altLang="zh-CN" noProof="0" dirty="0"/>
+            <a:endParaRPr lang="es-ES_tradnl" noProof="1"/>
           </a:p>
         </p:txBody>
       </p:sp>
@@ -12554,12 +12025,8 @@
           <a:lstStyle/>
           <a:p>
             <a:r>
-              <a:rPr lang="es-ES" dirty="0" err="1"/>
-              <a:t>Analisis</a:t>
-            </a:r>
-            <a:r>
-              <a:rPr lang="es-ES" dirty="0"/>
-              <a:t> de la Variación Temporal del Ausentismo</a:t>
+              <a:rPr lang="es-ES_tradnl" noProof="1"/>
+              <a:t>Analisis de la Variación Temporal del Ausentismo</a:t>
             </a:r>
           </a:p>
         </p:txBody>
@@ -12703,7 +12170,7 @@
               <a:defRPr/>
             </a:pPr>
             <a:fld id="{47FEACEE-25B4-4A2D-B147-27296E36371D}" type="slidenum">
-              <a:rPr kumimoji="0" lang="en-US" altLang="zh-CN" sz="1200" u="none" strike="noStrike" kern="1200" cap="none" spc="0" normalizeH="0" baseline="0" smtClean="0">
+              <a:rPr kumimoji="0" lang="es-ES_tradnl" sz="1200" u="none" strike="noStrike" kern="1200" cap="none" spc="0" normalizeH="0" baseline="0" noProof="1" smtClean="0">
                 <a:ln>
                   <a:noFill/>
                 </a:ln>
@@ -12733,7 +12200,7 @@
               </a:pPr>
               <a:t>9</a:t>
             </a:fld>
-            <a:endParaRPr kumimoji="0" lang="en-US" altLang="zh-CN" sz="1200" u="none" strike="noStrike" kern="1200" cap="none" spc="0" normalizeH="0" baseline="0" dirty="0">
+            <a:endParaRPr kumimoji="0" lang="es-ES_tradnl" sz="1200" u="none" strike="noStrike" kern="1200" cap="none" spc="0" normalizeH="0" baseline="0" noProof="1">
               <a:ln>
                 <a:noFill/>
               </a:ln>
@@ -12769,11 +12236,11 @@
           <a:lstStyle/>
           <a:p>
             <a:fld id="{47FEACEE-25B4-4A2D-B147-27296E36371D}" type="slidenum">
-              <a:rPr lang="en-US" altLang="zh-CN" noProof="0" smtClean="0"/>
+              <a:rPr lang="es-ES_tradnl" noProof="1" smtClean="0"/>
               <a:pPr/>
               <a:t>9</a:t>
             </a:fld>
-            <a:endParaRPr lang="en-US" altLang="zh-CN" noProof="0" dirty="0"/>
+            <a:endParaRPr lang="es-ES_tradnl" noProof="1"/>
           </a:p>
         </p:txBody>
       </p:sp>

--- a/Equip_28/Results/Analisis_PAP_and_ABL_RapidExpres.pptx
+++ b/Equip_28/Results/Analisis_PAP_and_ABL_RapidExpres.pptx
@@ -5,7 +5,7 @@
     <p:sldMasterId id="2147483648" r:id="rId1"/>
   </p:sldMasterIdLst>
   <p:notesMasterIdLst>
-    <p:notesMasterId r:id="rId15"/>
+    <p:notesMasterId r:id="rId14"/>
   </p:notesMasterIdLst>
   <p:sldIdLst>
     <p:sldId id="292" r:id="rId2"/>
@@ -15,12 +15,11 @@
     <p:sldId id="300" r:id="rId6"/>
     <p:sldId id="306" r:id="rId7"/>
     <p:sldId id="302" r:id="rId8"/>
-    <p:sldId id="301" r:id="rId9"/>
-    <p:sldId id="307" r:id="rId10"/>
+    <p:sldId id="310" r:id="rId9"/>
+    <p:sldId id="311" r:id="rId10"/>
     <p:sldId id="308" r:id="rId11"/>
     <p:sldId id="309" r:id="rId12"/>
-    <p:sldId id="304" r:id="rId13"/>
-    <p:sldId id="305" r:id="rId14"/>
+    <p:sldId id="313" r:id="rId13"/>
   </p:sldIdLst>
   <p:sldSz cx="12192000" cy="6858000"/>
   <p:notesSz cx="6858000" cy="9144000"/>
@@ -833,7 +832,7 @@
         <p:cNvPr id="1" name="">
           <a:extLst>
             <a:ext uri="{FF2B5EF4-FFF2-40B4-BE49-F238E27FC236}">
-              <a16:creationId xmlns:a16="http://schemas.microsoft.com/office/drawing/2014/main" id="{44994D7A-605A-4AA1-B711-5FA23C46FD43}"/>
+              <a16:creationId xmlns:a16="http://schemas.microsoft.com/office/drawing/2014/main" id="{B3B23558-8D18-A916-C2A8-525967662B90}"/>
             </a:ext>
           </a:extLst>
         </p:cNvPr>
@@ -853,7 +852,7 @@
           <p:cNvPr id="2" name="Slide Image Placeholder 1">
             <a:extLst>
               <a:ext uri="{FF2B5EF4-FFF2-40B4-BE49-F238E27FC236}">
-                <a16:creationId xmlns:a16="http://schemas.microsoft.com/office/drawing/2014/main" id="{BEE335B2-AB66-DB4F-B453-0B60065C02B3}"/>
+                <a16:creationId xmlns:a16="http://schemas.microsoft.com/office/drawing/2014/main" id="{916579E2-C281-1DB2-C75B-231EF8FABD68}"/>
               </a:ext>
             </a:extLst>
           </p:cNvPr>
@@ -879,7 +878,7 @@
           <p:cNvPr id="3" name="Notes Placeholder 2">
             <a:extLst>
               <a:ext uri="{FF2B5EF4-FFF2-40B4-BE49-F238E27FC236}">
-                <a16:creationId xmlns:a16="http://schemas.microsoft.com/office/drawing/2014/main" id="{55FFEAF8-3741-61E3-B146-374C0A3C7119}"/>
+                <a16:creationId xmlns:a16="http://schemas.microsoft.com/office/drawing/2014/main" id="{A1096211-FF13-3AAD-B419-D2CDFB51D3F6}"/>
               </a:ext>
             </a:extLst>
           </p:cNvPr>
@@ -903,6 +902,14 @@
           <a:bodyPr/>
           <a:lstStyle/>
           <a:p>
+            <a:r>
+              <a:rPr lang="en-US" dirty="0"/>
+              <a:t>Long – 1.752 – 28 solicitudes – 15 </a:t>
+            </a:r>
+            <a:r>
+              <a:rPr lang="en-US" dirty="0" err="1"/>
+              <a:t>empleados</a:t>
+            </a:r>
             <a:endParaRPr lang="en-US" dirty="0"/>
           </a:p>
         </p:txBody>
@@ -912,7 +919,7 @@
           <p:cNvPr id="4" name="Slide Number Placeholder 3">
             <a:extLst>
               <a:ext uri="{FF2B5EF4-FFF2-40B4-BE49-F238E27FC236}">
-                <a16:creationId xmlns:a16="http://schemas.microsoft.com/office/drawing/2014/main" id="{8BD16D24-00CD-CF58-4F7A-66E42C844356}"/>
+                <a16:creationId xmlns:a16="http://schemas.microsoft.com/office/drawing/2014/main" id="{90C20C9E-AC80-D854-2674-32EA9D7F1B26}"/>
               </a:ext>
             </a:extLst>
           </p:cNvPr>
@@ -947,7 +954,7 @@
     </p:spTree>
     <p:extLst>
       <p:ext uri="{BB962C8B-B14F-4D97-AF65-F5344CB8AC3E}">
-        <p14:creationId xmlns:p14="http://schemas.microsoft.com/office/powerpoint/2010/main" val="1612105309"/>
+        <p14:creationId xmlns:p14="http://schemas.microsoft.com/office/powerpoint/2010/main" val="1146685068"/>
       </p:ext>
     </p:extLst>
   </p:cSld>
@@ -965,7 +972,7 @@
         <p:cNvPr id="1" name="">
           <a:extLst>
             <a:ext uri="{FF2B5EF4-FFF2-40B4-BE49-F238E27FC236}">
-              <a16:creationId xmlns:a16="http://schemas.microsoft.com/office/drawing/2014/main" id="{44994D7A-605A-4AA1-B711-5FA23C46FD43}"/>
+              <a16:creationId xmlns:a16="http://schemas.microsoft.com/office/drawing/2014/main" id="{2716EB67-9CBD-8A9E-BA3E-981A31B8918C}"/>
             </a:ext>
           </a:extLst>
         </p:cNvPr>
@@ -985,7 +992,7 @@
           <p:cNvPr id="2" name="Slide Image Placeholder 1">
             <a:extLst>
               <a:ext uri="{FF2B5EF4-FFF2-40B4-BE49-F238E27FC236}">
-                <a16:creationId xmlns:a16="http://schemas.microsoft.com/office/drawing/2014/main" id="{BEE335B2-AB66-DB4F-B453-0B60065C02B3}"/>
+                <a16:creationId xmlns:a16="http://schemas.microsoft.com/office/drawing/2014/main" id="{E90F6861-43D4-BB77-3E16-B67DF4C1388B}"/>
               </a:ext>
             </a:extLst>
           </p:cNvPr>
@@ -1011,7 +1018,7 @@
           <p:cNvPr id="3" name="Notes Placeholder 2">
             <a:extLst>
               <a:ext uri="{FF2B5EF4-FFF2-40B4-BE49-F238E27FC236}">
-                <a16:creationId xmlns:a16="http://schemas.microsoft.com/office/drawing/2014/main" id="{55FFEAF8-3741-61E3-B146-374C0A3C7119}"/>
+                <a16:creationId xmlns:a16="http://schemas.microsoft.com/office/drawing/2014/main" id="{B2123BAF-59A4-F45B-1ECE-F7696CEF0431}"/>
               </a:ext>
             </a:extLst>
           </p:cNvPr>
@@ -1044,7 +1051,7 @@
           <p:cNvPr id="4" name="Slide Number Placeholder 3">
             <a:extLst>
               <a:ext uri="{FF2B5EF4-FFF2-40B4-BE49-F238E27FC236}">
-                <a16:creationId xmlns:a16="http://schemas.microsoft.com/office/drawing/2014/main" id="{8BD16D24-00CD-CF58-4F7A-66E42C844356}"/>
+                <a16:creationId xmlns:a16="http://schemas.microsoft.com/office/drawing/2014/main" id="{4A05DF66-C78F-A47A-774E-5220A9C03491}"/>
               </a:ext>
             </a:extLst>
           </p:cNvPr>
@@ -1079,7 +1086,7 @@
     </p:spTree>
     <p:extLst>
       <p:ext uri="{BB962C8B-B14F-4D97-AF65-F5344CB8AC3E}">
-        <p14:creationId xmlns:p14="http://schemas.microsoft.com/office/powerpoint/2010/main" val="708850650"/>
+        <p14:creationId xmlns:p14="http://schemas.microsoft.com/office/powerpoint/2010/main" val="1767513100"/>
       </p:ext>
     </p:extLst>
   </p:cSld>
@@ -1226,13 +1233,7 @@
   <p:cSld>
     <p:spTree>
       <p:nvGrpSpPr>
-        <p:cNvPr id="1" name="">
-          <a:extLst>
-            <a:ext uri="{FF2B5EF4-FFF2-40B4-BE49-F238E27FC236}">
-              <a16:creationId xmlns:a16="http://schemas.microsoft.com/office/drawing/2014/main" id="{9D29074C-77A2-7240-B244-AF356ACE5E36}"/>
-            </a:ext>
-          </a:extLst>
-        </p:cNvPr>
+        <p:cNvPr id="1" name=""/>
         <p:cNvGrpSpPr/>
         <p:nvPr/>
       </p:nvGrpSpPr>
@@ -1246,13 +1247,7 @@
       </p:grpSpPr>
       <p:sp>
         <p:nvSpPr>
-          <p:cNvPr id="2" name="Slide Image Placeholder 1">
-            <a:extLst>
-              <a:ext uri="{FF2B5EF4-FFF2-40B4-BE49-F238E27FC236}">
-                <a16:creationId xmlns:a16="http://schemas.microsoft.com/office/drawing/2014/main" id="{7783A008-BA98-7279-801F-7CC20F22BC50}"/>
-              </a:ext>
-            </a:extLst>
-          </p:cNvPr>
+          <p:cNvPr id="2" name="Slide Image Placeholder 1"/>
           <p:cNvSpPr>
             <a:spLocks noGrp="1" noRot="1" noChangeAspect="1"/>
           </p:cNvSpPr>
@@ -1272,13 +1267,7 @@
       </p:sp>
       <p:sp>
         <p:nvSpPr>
-          <p:cNvPr id="3" name="Notes Placeholder 2">
-            <a:extLst>
-              <a:ext uri="{FF2B5EF4-FFF2-40B4-BE49-F238E27FC236}">
-                <a16:creationId xmlns:a16="http://schemas.microsoft.com/office/drawing/2014/main" id="{59444793-56C3-7E9D-EEE0-28D19EC1319A}"/>
-              </a:ext>
-            </a:extLst>
-          </p:cNvPr>
+          <p:cNvPr id="3" name="Notes Placeholder 2"/>
           <p:cNvSpPr>
             <a:spLocks noGrp="1"/>
           </p:cNvSpPr>
@@ -1305,13 +1294,7 @@
       </p:sp>
       <p:sp>
         <p:nvSpPr>
-          <p:cNvPr id="4" name="Slide Number Placeholder 3">
-            <a:extLst>
-              <a:ext uri="{FF2B5EF4-FFF2-40B4-BE49-F238E27FC236}">
-                <a16:creationId xmlns:a16="http://schemas.microsoft.com/office/drawing/2014/main" id="{3B3CE3A0-0AFA-EB68-1884-62C62F957C93}"/>
-              </a:ext>
-            </a:extLst>
-          </p:cNvPr>
+          <p:cNvPr id="4" name="Slide Number Placeholder 3"/>
           <p:cNvSpPr>
             <a:spLocks noGrp="1"/>
           </p:cNvSpPr>
@@ -1334,7 +1317,7 @@
           <a:p>
             <a:fld id="{017105BD-6D6F-49DB-9DE4-D4A6452D7E5F}" type="slidenum">
               <a:rPr lang="en-US" altLang="zh-CN" smtClean="0"/>
-              <a:t>13</a:t>
+              <a:t>12</a:t>
             </a:fld>
             <a:endParaRPr lang="en-US" altLang="zh-CN" dirty="0"/>
           </a:p>
@@ -1343,7 +1326,7 @@
     </p:spTree>
     <p:extLst>
       <p:ext uri="{BB962C8B-B14F-4D97-AF65-F5344CB8AC3E}">
-        <p14:creationId xmlns:p14="http://schemas.microsoft.com/office/powerpoint/2010/main" val="2202495378"/>
+        <p14:creationId xmlns:p14="http://schemas.microsoft.com/office/powerpoint/2010/main" val="2880906100"/>
       </p:ext>
     </p:extLst>
   </p:cSld>
@@ -8459,28 +8442,65 @@
           <a:lstStyle/>
           <a:p>
             <a:r>
-              <a:rPr lang="es-ES_tradnl" noProof="1">
+              <a:rPr lang="en-US" altLang="zh-CN" dirty="0">
                 <a:solidFill>
                   <a:schemeClr val="bg1"/>
                 </a:solidFill>
               </a:rPr>
-              <a:t>Rapid Express – Análisis </a:t>
+              <a:t>Rapid Express – </a:t>
+            </a:r>
+            <a:r>
+              <a:rPr lang="en-US" altLang="zh-CN" dirty="0" err="1">
+                <a:solidFill>
+                  <a:schemeClr val="bg1"/>
+                </a:solidFill>
+              </a:rPr>
+              <a:t>Análisis</a:t>
+            </a:r>
+            <a:r>
+              <a:rPr lang="en-US" altLang="zh-CN" dirty="0">
+                <a:solidFill>
+                  <a:schemeClr val="bg1"/>
+                </a:solidFill>
+              </a:rPr>
+              <a:t> </a:t>
             </a:r>
             <a:br>
-              <a:rPr lang="es-ES_tradnl" noProof="1">
+              <a:rPr lang="en-US" altLang="zh-CN" dirty="0">
                 <a:solidFill>
                   <a:schemeClr val="bg1"/>
                 </a:solidFill>
               </a:rPr>
             </a:br>
             <a:r>
-              <a:rPr lang="es-ES_tradnl" noProof="1">
+              <a:rPr lang="en-US" altLang="zh-CN" dirty="0" err="1">
                 <a:solidFill>
                   <a:schemeClr val="bg1"/>
                 </a:solidFill>
               </a:rPr>
-              <a:t>Perfil de Empleado y Absentismo</a:t>
-            </a:r>
+              <a:t>Perfil</a:t>
+            </a:r>
+            <a:r>
+              <a:rPr lang="en-US" altLang="zh-CN" dirty="0">
+                <a:solidFill>
+                  <a:schemeClr val="bg1"/>
+                </a:solidFill>
+              </a:rPr>
+              <a:t> de Empleado y </a:t>
+            </a:r>
+            <a:r>
+              <a:rPr lang="en-US" altLang="zh-CN" dirty="0" err="1">
+                <a:solidFill>
+                  <a:schemeClr val="bg1"/>
+                </a:solidFill>
+              </a:rPr>
+              <a:t>Absentismo</a:t>
+            </a:r>
+            <a:endParaRPr lang="en-US" dirty="0">
+              <a:solidFill>
+                <a:schemeClr val="bg1"/>
+              </a:solidFill>
+            </a:endParaRPr>
           </a:p>
         </p:txBody>
       </p:sp>
@@ -8511,13 +8531,17 @@
           <a:lstStyle/>
           <a:p>
             <a:r>
-              <a:rPr lang="es-ES_tradnl" noProof="1"/>
-              <a:t>Equipo 28</a:t>
-            </a:r>
-          </a:p>
-          <a:p>
-            <a:r>
-              <a:rPr lang="es-ES_tradnl" noProof="1"/>
+              <a:rPr lang="en-US" dirty="0" err="1"/>
+              <a:t>Equipo</a:t>
+            </a:r>
+            <a:r>
+              <a:rPr lang="en-US" dirty="0"/>
+              <a:t> 28</a:t>
+            </a:r>
+          </a:p>
+          <a:p>
+            <a:r>
+              <a:rPr lang="en-US" dirty="0"/>
               <a:t>Emilio T., Núria P., Andrea C. &amp; Ana C.</a:t>
             </a:r>
           </a:p>
@@ -8622,17 +8646,65 @@
           <a:lstStyle/>
           <a:p>
             <a:r>
-              <a:rPr lang="es-ES_tradnl" noProof="1">
+              <a:rPr lang="en-US" dirty="0" err="1">
                 <a:solidFill>
                   <a:schemeClr val="bg1"/>
                 </a:solidFill>
               </a:rPr>
-              <a:t>Estrategias para reducir el ausentismo</a:t>
+              <a:t>Estrategias</a:t>
+            </a:r>
+            <a:r>
+              <a:rPr lang="en-US" dirty="0">
+                <a:solidFill>
+                  <a:schemeClr val="bg1"/>
+                </a:solidFill>
+              </a:rPr>
+              <a:t> para </a:t>
+            </a:r>
+            <a:r>
+              <a:rPr lang="en-US" dirty="0" err="1">
+                <a:solidFill>
+                  <a:schemeClr val="bg1"/>
+                </a:solidFill>
+              </a:rPr>
+              <a:t>reducir</a:t>
+            </a:r>
+            <a:r>
+              <a:rPr lang="en-US" dirty="0">
+                <a:solidFill>
+                  <a:schemeClr val="bg1"/>
+                </a:solidFill>
+              </a:rPr>
+              <a:t> </a:t>
+            </a:r>
+            <a:r>
+              <a:rPr lang="en-US" dirty="0" err="1">
+                <a:solidFill>
+                  <a:schemeClr val="bg1"/>
+                </a:solidFill>
+              </a:rPr>
+              <a:t>el</a:t>
+            </a:r>
+            <a:r>
+              <a:rPr lang="en-US" dirty="0">
+                <a:solidFill>
+                  <a:schemeClr val="bg1"/>
+                </a:solidFill>
+              </a:rPr>
+              <a:t> </a:t>
+            </a:r>
+            <a:r>
+              <a:rPr lang="en-US" dirty="0" err="1">
+                <a:solidFill>
+                  <a:schemeClr val="bg1"/>
+                </a:solidFill>
+              </a:rPr>
+              <a:t>ausentismo</a:t>
             </a:r>
             <a:br>
-              <a:rPr lang="es-ES_tradnl" noProof="1"/>
+              <a:rPr lang="en-US" dirty="0"/>
             </a:br>
-            <a:endParaRPr lang="es-ES_tradnl" noProof="1">
+            <a:endParaRPr lang="en-US" dirty="0">
               <a:solidFill>
                 <a:schemeClr val="bg1"/>
               </a:solidFill>
@@ -8666,7 +8738,7 @@
           <a:bodyPr/>
           <a:lstStyle/>
           <a:p>
-            <a:endParaRPr lang="es-ES_tradnl" noProof="1"/>
+            <a:endParaRPr lang="en-US" dirty="0"/>
           </a:p>
         </p:txBody>
       </p:sp>
@@ -8724,7 +8796,7 @@
         </p:nvSpPr>
         <p:spPr>
           <a:xfrm>
-            <a:off x="914399" y="731520"/>
+            <a:off x="254832" y="136525"/>
             <a:ext cx="8867553" cy="788936"/>
           </a:xfrm>
         </p:spPr>
@@ -8735,7 +8807,7 @@
           <a:lstStyle/>
           <a:p>
             <a:r>
-              <a:rPr lang="es-ES_tradnl" noProof="1"/>
+              <a:rPr lang="es-ES" dirty="0"/>
               <a:t>Estrategias para reducir el Ausentismo</a:t>
             </a:r>
           </a:p>
@@ -8880,7 +8952,7 @@
               <a:defRPr/>
             </a:pPr>
             <a:fld id="{47FEACEE-25B4-4A2D-B147-27296E36371D}" type="slidenum">
-              <a:rPr kumimoji="0" lang="es-ES_tradnl" sz="1200" u="none" strike="noStrike" kern="1200" cap="none" spc="0" normalizeH="0" baseline="0" noProof="1" smtClean="0">
+              <a:rPr kumimoji="0" lang="en-US" altLang="zh-CN" sz="1200" u="none" strike="noStrike" kern="1200" cap="none" spc="0" normalizeH="0" baseline="0" smtClean="0">
                 <a:ln>
                   <a:noFill/>
                 </a:ln>
@@ -8910,7 +8982,7 @@
               </a:pPr>
               <a:t>11</a:t>
             </a:fld>
-            <a:endParaRPr kumimoji="0" lang="es-ES_tradnl" sz="1200" u="none" strike="noStrike" kern="1200" cap="none" spc="0" normalizeH="0" baseline="0" noProof="1">
+            <a:endParaRPr kumimoji="0" lang="en-US" altLang="zh-CN" sz="1200" u="none" strike="noStrike" kern="1200" cap="none" spc="0" normalizeH="0" baseline="0" dirty="0">
               <a:ln>
                 <a:noFill/>
               </a:ln>
@@ -8946,11 +9018,11 @@
           <a:lstStyle/>
           <a:p>
             <a:fld id="{47FEACEE-25B4-4A2D-B147-27296E36371D}" type="slidenum">
-              <a:rPr lang="es-ES_tradnl" noProof="1" smtClean="0"/>
+              <a:rPr lang="en-US" altLang="zh-CN" noProof="0" smtClean="0"/>
               <a:pPr/>
               <a:t>11</a:t>
             </a:fld>
-            <a:endParaRPr lang="es-ES_tradnl" noProof="1"/>
+            <a:endParaRPr lang="en-US" altLang="zh-CN" noProof="0" dirty="0"/>
           </a:p>
         </p:txBody>
       </p:sp>
@@ -8972,79 +9044,309 @@
         </p:nvSpPr>
         <p:spPr>
           <a:xfrm>
-            <a:off x="914398" y="2128603"/>
-            <a:ext cx="9653667" cy="3374136"/>
+            <a:off x="254832" y="1224803"/>
+            <a:ext cx="9653667" cy="4520677"/>
           </a:xfrm>
         </p:spPr>
         <p:txBody>
-          <a:bodyPr/>
+          <a:bodyPr>
+            <a:noAutofit/>
+          </a:bodyPr>
           <a:lstStyle/>
           <a:p>
             <a:pPr marL="457200" lvl="1" indent="0">
               <a:buNone/>
             </a:pPr>
             <a:r>
-              <a:rPr lang="es-ES_tradnl" noProof="1"/>
-              <a:t>. </a:t>
-            </a:r>
-            <a:r>
-              <a:rPr lang="es-ES_tradnl" b="1" noProof="1"/>
-              <a:t>Invierno</a:t>
-            </a:r>
-            <a:r>
-              <a:rPr lang="es-ES_tradnl" noProof="1"/>
-              <a:t> - Campañas de salud, ergonomía, prevención de lesiones, vacunación</a:t>
-            </a:r>
-            <a:r>
-              <a:rPr lang="es-ES_tradnl" b="1" noProof="1"/>
-              <a:t>.</a:t>
+              <a:rPr lang="es-ES" sz="1600" b="1" dirty="0"/>
+              <a:t>Las enfermedades más observadas son:</a:t>
             </a:r>
           </a:p>
           <a:p>
             <a:pPr marL="457200" lvl="1" indent="0">
               <a:buNone/>
             </a:pPr>
-            <a:endParaRPr lang="es-ES_tradnl" noProof="1"/>
+            <a:endParaRPr lang="es-ES" sz="1600" dirty="0"/>
+          </a:p>
+          <a:p>
+            <a:pPr lvl="1"/>
+            <a:r>
+              <a:rPr lang="en-GB" sz="1600" dirty="0"/>
+              <a:t>Diseases of the musculoskeletal system and connective tissue </a:t>
+            </a:r>
+          </a:p>
+          <a:p>
+            <a:pPr lvl="1"/>
+            <a:r>
+              <a:rPr lang="en-GB" sz="1600" dirty="0"/>
+              <a:t>Injury, poisoning and other consequences of external causes</a:t>
+            </a:r>
           </a:p>
           <a:p>
             <a:pPr marL="457200" lvl="1" indent="0">
               <a:buNone/>
             </a:pPr>
-            <a:r>
-              <a:rPr lang="es-ES_tradnl" noProof="1"/>
-              <a:t>. </a:t>
-            </a:r>
-            <a:r>
-              <a:rPr lang="es-ES_tradnl" b="1" noProof="1"/>
-              <a:t>Meses pico (Marzo, Abril, Julio y Noviembre) </a:t>
-            </a:r>
-            <a:r>
-              <a:rPr lang="es-ES_tradnl" noProof="1"/>
-              <a:t>- Redimensionar período vacacional acorde con los meses pico de ausentísmo (Marzo, Abril, Julio y Noviembe</a:t>
-            </a:r>
+            <a:endParaRPr lang="es-ES" sz="1600" dirty="0"/>
           </a:p>
           <a:p>
             <a:pPr marL="457200" lvl="1" indent="0">
               <a:buNone/>
             </a:pPr>
-            <a:endParaRPr lang="es-ES_tradnl" noProof="1"/>
+            <a:r>
+              <a:rPr lang="es-ES" sz="1600" b="1" dirty="0"/>
+              <a:t>Propuestas:</a:t>
+            </a:r>
+          </a:p>
+          <a:p>
+            <a:pPr lvl="1">
+              <a:buFontTx/>
+              <a:buChar char="-"/>
+            </a:pPr>
+            <a:r>
+              <a:rPr lang="es-ES" sz="1600" dirty="0"/>
+              <a:t>Programa de prevención física para asegurar manipulación correcta de paquetes</a:t>
+            </a:r>
+          </a:p>
+          <a:p>
+            <a:pPr lvl="1">
+              <a:buFontTx/>
+              <a:buChar char="-"/>
+            </a:pPr>
+            <a:r>
+              <a:rPr lang="es-ES" sz="1600" dirty="0"/>
+              <a:t>Uso obligatorio de equipamientos de protección</a:t>
+            </a:r>
+          </a:p>
+          <a:p>
+            <a:pPr lvl="1">
+              <a:buFontTx/>
+              <a:buChar char="-"/>
+            </a:pPr>
+            <a:r>
+              <a:rPr lang="es-ES" sz="1600" dirty="0"/>
+              <a:t>Medicina preventiva – ergonomía, </a:t>
+            </a:r>
+            <a:r>
+              <a:rPr lang="es-ES" sz="1600" dirty="0" err="1"/>
+              <a:t>fisioterápia</a:t>
+            </a:r>
+            <a:endParaRPr lang="es-ES" sz="1600" dirty="0"/>
           </a:p>
           <a:p>
             <a:pPr marL="457200" lvl="1" indent="0">
               <a:buNone/>
             </a:pPr>
-            <a:r>
-              <a:rPr lang="es-ES_tradnl" noProof="1"/>
+            <a:endParaRPr lang="en-GB" sz="1600" dirty="0"/>
+          </a:p>
+          <a:p>
+            <a:pPr marL="457200" lvl="1" indent="0">
+              <a:buNone/>
+            </a:pPr>
+            <a:r>
+              <a:rPr lang="en-GB" sz="1600" dirty="0"/>
+              <a:t>- </a:t>
+            </a:r>
+            <a:r>
+              <a:rPr lang="en-GB" sz="1600" dirty="0" err="1"/>
+              <a:t>Revisar</a:t>
+            </a:r>
+            <a:r>
+              <a:rPr lang="en-GB" sz="1600" dirty="0"/>
+              <a:t> </a:t>
+            </a:r>
+            <a:r>
+              <a:rPr lang="en-GB" sz="1600" dirty="0" err="1"/>
+              <a:t>el</a:t>
+            </a:r>
+            <a:r>
+              <a:rPr lang="en-GB" sz="1600" dirty="0"/>
+              <a:t>  </a:t>
+            </a:r>
+            <a:r>
+              <a:rPr lang="en-GB" sz="1600" dirty="0" err="1"/>
+              <a:t>periodo</a:t>
+            </a:r>
+            <a:r>
+              <a:rPr lang="en-GB" sz="1600" dirty="0"/>
+              <a:t> </a:t>
+            </a:r>
+            <a:r>
+              <a:rPr lang="en-GB" sz="1600" dirty="0" err="1"/>
+              <a:t>vacacional</a:t>
+            </a:r>
+            <a:r>
+              <a:rPr lang="en-GB" sz="1600" dirty="0"/>
+              <a:t> </a:t>
+            </a:r>
+            <a:r>
+              <a:rPr lang="en-GB" sz="1600" dirty="0" err="1"/>
+              <a:t>acorde</a:t>
+            </a:r>
+            <a:r>
+              <a:rPr lang="en-GB" sz="1600" dirty="0"/>
+              <a:t> con </a:t>
+            </a:r>
+            <a:r>
+              <a:rPr lang="en-GB" sz="1600" dirty="0" err="1"/>
+              <a:t>los</a:t>
+            </a:r>
+            <a:r>
+              <a:rPr lang="en-GB" sz="1600" dirty="0"/>
+              <a:t> meses </a:t>
+            </a:r>
+            <a:r>
+              <a:rPr lang="en-GB" sz="1600" dirty="0" err="1"/>
+              <a:t>pico</a:t>
+            </a:r>
+            <a:r>
+              <a:rPr lang="en-GB" sz="1600" dirty="0"/>
+              <a:t> de </a:t>
+            </a:r>
+            <a:r>
+              <a:rPr lang="en-GB" sz="1600" dirty="0" err="1"/>
+              <a:t>ausentísmo</a:t>
+            </a:r>
+            <a:r>
+              <a:rPr lang="en-GB" sz="1600" dirty="0"/>
+              <a:t>.</a:t>
+            </a:r>
+          </a:p>
+          <a:p>
+            <a:pPr marL="457200" lvl="1" indent="0">
+              <a:buNone/>
+            </a:pPr>
+            <a:endParaRPr lang="en-GB" sz="1600" dirty="0"/>
+          </a:p>
+          <a:p>
+            <a:pPr marL="457200" lvl="1" indent="0">
+              <a:buNone/>
+            </a:pPr>
+            <a:r>
+              <a:rPr lang="en-GB" sz="1600" dirty="0"/>
               <a:t>. </a:t>
             </a:r>
             <a:r>
-              <a:rPr lang="es-ES_tradnl" b="1" noProof="1"/>
-              <a:t>Mayor acumulo de horas </a:t>
-            </a:r>
-            <a:r>
-              <a:rPr lang="es-ES_tradnl" noProof="1"/>
-              <a:t>- Coordinación con servicios médicos para seguimiento temprano de casos &gt; 24h</a:t>
-            </a:r>
+              <a:rPr lang="en-GB" sz="1600" b="1" dirty="0"/>
+              <a:t>Mayor </a:t>
+            </a:r>
+            <a:r>
+              <a:rPr lang="en-GB" sz="1600" b="1" dirty="0" err="1"/>
+              <a:t>acumulo</a:t>
+            </a:r>
+            <a:r>
+              <a:rPr lang="en-GB" sz="1600" b="1" dirty="0"/>
+              <a:t> de horas</a:t>
+            </a:r>
+          </a:p>
+          <a:p>
+            <a:pPr marL="457200" lvl="1" indent="0">
+              <a:buNone/>
+            </a:pPr>
+            <a:r>
+              <a:rPr lang="en-GB" sz="1600" b="1" dirty="0"/>
+              <a:t> </a:t>
+            </a:r>
+            <a:r>
+              <a:rPr lang="en-GB" sz="1600" dirty="0"/>
+              <a:t>- </a:t>
+            </a:r>
+            <a:r>
+              <a:rPr lang="en-GB" sz="1600" dirty="0" err="1"/>
+              <a:t>Coordinación</a:t>
+            </a:r>
+            <a:r>
+              <a:rPr lang="en-GB" sz="1600" dirty="0"/>
+              <a:t> con </a:t>
+            </a:r>
+            <a:r>
+              <a:rPr lang="en-GB" sz="1600" dirty="0" err="1"/>
+              <a:t>servicios</a:t>
+            </a:r>
+            <a:r>
+              <a:rPr lang="en-GB" sz="1600" dirty="0"/>
+              <a:t> </a:t>
+            </a:r>
+            <a:r>
+              <a:rPr lang="en-GB" sz="1600" dirty="0" err="1"/>
+              <a:t>médicos</a:t>
+            </a:r>
+            <a:r>
+              <a:rPr lang="en-GB" sz="1600" dirty="0"/>
+              <a:t> para </a:t>
+            </a:r>
+            <a:r>
+              <a:rPr lang="en-GB" sz="1600" dirty="0" err="1"/>
+              <a:t>seguimiento</a:t>
+            </a:r>
+            <a:r>
+              <a:rPr lang="en-GB" sz="1600" dirty="0"/>
+              <a:t> </a:t>
+            </a:r>
+            <a:r>
+              <a:rPr lang="en-GB" sz="1600" dirty="0" err="1"/>
+              <a:t>temprano</a:t>
+            </a:r>
+            <a:r>
+              <a:rPr lang="en-GB" sz="1600" dirty="0"/>
+              <a:t> de </a:t>
+            </a:r>
+            <a:r>
+              <a:rPr lang="en-GB" sz="1600" dirty="0" err="1"/>
+              <a:t>casos</a:t>
+            </a:r>
+            <a:r>
+              <a:rPr lang="en-GB" sz="1600" dirty="0"/>
+              <a:t> &gt; 24h</a:t>
+            </a:r>
+          </a:p>
+        </p:txBody>
+      </p:sp>
+      <p:sp>
+        <p:nvSpPr>
+          <p:cNvPr id="4" name="Rectangle 3">
+            <a:extLst>
+              <a:ext uri="{FF2B5EF4-FFF2-40B4-BE49-F238E27FC236}">
+                <a16:creationId xmlns:a16="http://schemas.microsoft.com/office/drawing/2014/main" id="{FBE44C10-C1E7-A9E1-17AD-11A2CA6F229A}"/>
+              </a:ext>
+            </a:extLst>
+          </p:cNvPr>
+          <p:cNvSpPr/>
+          <p:nvPr/>
+        </p:nvSpPr>
+        <p:spPr>
+          <a:xfrm>
+            <a:off x="69121" y="825263"/>
+            <a:ext cx="10598046" cy="45719"/>
+          </a:xfrm>
+          <a:prstGeom prst="rect">
+            <a:avLst/>
+          </a:prstGeom>
+          <a:ln>
+            <a:noFill/>
+          </a:ln>
+        </p:spPr>
+        <p:style>
+          <a:lnRef idx="2">
+            <a:schemeClr val="accent1">
+              <a:shade val="15000"/>
+            </a:schemeClr>
+          </a:lnRef>
+          <a:fillRef idx="1">
+            <a:schemeClr val="accent1"/>
+          </a:fillRef>
+          <a:effectRef idx="0">
+            <a:schemeClr val="accent1"/>
+          </a:effectRef>
+          <a:fontRef idx="minor">
+            <a:schemeClr val="lt1"/>
+          </a:fontRef>
+        </p:style>
+        <p:txBody>
+          <a:bodyPr rtlCol="0" anchor="ctr"/>
+          <a:lstStyle/>
+          <a:p>
+            <a:pPr algn="ctr"/>
+            <a:endParaRPr lang="en-GB"/>
           </a:p>
         </p:txBody>
       </p:sp>
@@ -9074,13 +9376,7 @@
     </p:bg>
     <p:spTree>
       <p:nvGrpSpPr>
-        <p:cNvPr id="1" name="">
-          <a:extLst>
-            <a:ext uri="{FF2B5EF4-FFF2-40B4-BE49-F238E27FC236}">
-              <a16:creationId xmlns:a16="http://schemas.microsoft.com/office/drawing/2014/main" id="{F0584F02-A2B9-2345-0DE0-93652818AAF0}"/>
-            </a:ext>
-          </a:extLst>
-        </p:cNvPr>
+        <p:cNvPr id="1" name=""/>
         <p:cNvGrpSpPr/>
         <p:nvPr/>
       </p:nvGrpSpPr>
@@ -9094,10 +9390,10 @@
       </p:grpSpPr>
       <p:sp>
         <p:nvSpPr>
-          <p:cNvPr id="2" name="Title 1">
-            <a:extLst>
-              <a:ext uri="{FF2B5EF4-FFF2-40B4-BE49-F238E27FC236}">
-                <a16:creationId xmlns:a16="http://schemas.microsoft.com/office/drawing/2014/main" id="{AFD4D8CD-615F-2FDF-60D6-6BB24283F874}"/>
+          <p:cNvPr id="3" name="Title 2">
+            <a:extLst>
+              <a:ext uri="{FF2B5EF4-FFF2-40B4-BE49-F238E27FC236}">
+                <a16:creationId xmlns:a16="http://schemas.microsoft.com/office/drawing/2014/main" id="{4379BBF1-9BC2-6DCE-0154-8873469878A5}"/>
               </a:ext>
             </a:extLst>
           </p:cNvPr>
@@ -9110,16 +9406,16 @@
         </p:nvSpPr>
         <p:spPr>
           <a:xfrm>
-            <a:off x="5998464" y="731520"/>
-            <a:ext cx="5029200" cy="3291840"/>
+            <a:off x="914400" y="731520"/>
+            <a:ext cx="4663440" cy="1737360"/>
           </a:xfrm>
         </p:spPr>
         <p:txBody>
-          <a:bodyPr lIns="0" anchor="b" anchorCtr="0"/>
+          <a:bodyPr/>
           <a:lstStyle/>
           <a:p>
             <a:r>
-              <a:rPr lang="es-ES_tradnl" noProof="1">
+              <a:rPr lang="en-US" b="1" dirty="0">
                 <a:solidFill>
                   <a:schemeClr val="bg1"/>
                 </a:solidFill>
@@ -9131,162 +9427,10 @@
       </p:sp>
       <p:sp>
         <p:nvSpPr>
-          <p:cNvPr id="3" name="Text Placeholder 2">
-            <a:extLst>
-              <a:ext uri="{FF2B5EF4-FFF2-40B4-BE49-F238E27FC236}">
-                <a16:creationId xmlns:a16="http://schemas.microsoft.com/office/drawing/2014/main" id="{53DB6762-01B2-5A22-68D7-13B14882B78D}"/>
-              </a:ext>
-            </a:extLst>
-          </p:cNvPr>
-          <p:cNvSpPr>
-            <a:spLocks noGrp="1"/>
-          </p:cNvSpPr>
-          <p:nvPr>
-            <p:ph type="body" sz="quarter" idx="28"/>
-          </p:nvPr>
-        </p:nvSpPr>
-        <p:spPr>
-          <a:xfrm>
-            <a:off x="6117336" y="4172084"/>
-            <a:ext cx="4910328" cy="1005840"/>
-          </a:xfrm>
-        </p:spPr>
-        <p:txBody>
-          <a:bodyPr/>
-          <a:lstStyle/>
-          <a:p>
-            <a:endParaRPr lang="es-ES_tradnl" noProof="1"/>
-          </a:p>
-        </p:txBody>
-      </p:sp>
-    </p:spTree>
-    <p:extLst>
-      <p:ext uri="{BB962C8B-B14F-4D97-AF65-F5344CB8AC3E}">
-        <p14:creationId xmlns:p14="http://schemas.microsoft.com/office/powerpoint/2010/main" val="3349422089"/>
-      </p:ext>
-    </p:extLst>
-  </p:cSld>
-  <p:clrMapOvr>
-    <a:masterClrMapping/>
-  </p:clrMapOvr>
-</p:sld>
-</file>
-
-<file path=ppt/slides/slide13.xml><?xml version="1.0" encoding="utf-8"?>
-<p:sld xmlns:a="http://schemas.openxmlformats.org/drawingml/2006/main" xmlns:r="http://schemas.openxmlformats.org/officeDocument/2006/relationships" xmlns:p="http://schemas.openxmlformats.org/presentationml/2006/main">
-  <p:cSld>
-    <p:spTree>
-      <p:nvGrpSpPr>
-        <p:cNvPr id="1" name="">
-          <a:extLst>
-            <a:ext uri="{FF2B5EF4-FFF2-40B4-BE49-F238E27FC236}">
-              <a16:creationId xmlns:a16="http://schemas.microsoft.com/office/drawing/2014/main" id="{C6555DDA-F1D2-3BEF-589C-D29744925458}"/>
-            </a:ext>
-          </a:extLst>
-        </p:cNvPr>
-        <p:cNvGrpSpPr/>
-        <p:nvPr/>
-      </p:nvGrpSpPr>
-      <p:grpSpPr>
-        <a:xfrm>
-          <a:off x="0" y="0"/>
-          <a:ext cx="0" cy="0"/>
-          <a:chOff x="0" y="0"/>
-          <a:chExt cx="0" cy="0"/>
-        </a:xfrm>
-      </p:grpSpPr>
-      <p:sp>
-        <p:nvSpPr>
-          <p:cNvPr id="3" name="Title 2">
-            <a:extLst>
-              <a:ext uri="{FF2B5EF4-FFF2-40B4-BE49-F238E27FC236}">
-                <a16:creationId xmlns:a16="http://schemas.microsoft.com/office/drawing/2014/main" id="{AF530613-3352-A81F-4A58-9B7719729FC9}"/>
-              </a:ext>
-            </a:extLst>
-          </p:cNvPr>
-          <p:cNvSpPr>
-            <a:spLocks noGrp="1"/>
-          </p:cNvSpPr>
-          <p:nvPr>
-            <p:ph type="title"/>
-          </p:nvPr>
-        </p:nvSpPr>
-        <p:spPr>
-          <a:xfrm>
-            <a:off x="529216" y="506667"/>
-            <a:ext cx="4463696" cy="692546"/>
-          </a:xfrm>
-        </p:spPr>
-        <p:txBody>
-          <a:bodyPr/>
-          <a:lstStyle/>
-          <a:p>
-            <a:r>
-              <a:rPr lang="es-ES_tradnl" noProof="1"/>
-              <a:t>KPIs</a:t>
-            </a:r>
-          </a:p>
-        </p:txBody>
-      </p:sp>
-      <p:sp>
-        <p:nvSpPr>
-          <p:cNvPr id="10" name="Content Placeholder 9">
-            <a:extLst>
-              <a:ext uri="{FF2B5EF4-FFF2-40B4-BE49-F238E27FC236}">
-                <a16:creationId xmlns:a16="http://schemas.microsoft.com/office/drawing/2014/main" id="{3B6B31FD-A185-0DBA-7184-24DDBB94AEF4}"/>
-              </a:ext>
-            </a:extLst>
-          </p:cNvPr>
-          <p:cNvSpPr>
-            <a:spLocks noGrp="1"/>
-          </p:cNvSpPr>
-          <p:nvPr>
-            <p:ph idx="1"/>
-          </p:nvPr>
-        </p:nvSpPr>
-        <p:spPr>
-          <a:xfrm>
-            <a:off x="598420" y="1722370"/>
-            <a:ext cx="4078512" cy="467693"/>
-          </a:xfrm>
-        </p:spPr>
-        <p:txBody>
-          <a:bodyPr>
-            <a:normAutofit/>
-          </a:bodyPr>
-          <a:lstStyle/>
-          <a:p>
-            <a:pPr marL="0" indent="0" algn="ctr">
-              <a:buNone/>
-            </a:pPr>
-            <a:r>
-              <a:rPr lang="es-ES_tradnl" b="1" noProof="1"/>
-              <a:t>% Empleados ausentes</a:t>
-            </a:r>
-          </a:p>
-          <a:p>
-            <a:endParaRPr lang="es-ES_tradnl" noProof="1"/>
-          </a:p>
-          <a:p>
-            <a:endParaRPr lang="es-ES_tradnl" noProof="1"/>
-          </a:p>
-          <a:p>
-            <a:endParaRPr lang="es-ES_tradnl" noProof="1"/>
-          </a:p>
-          <a:p>
-            <a:pPr marL="0" indent="0">
-              <a:buNone/>
-            </a:pPr>
-            <a:endParaRPr lang="es-ES_tradnl" noProof="1"/>
-          </a:p>
-        </p:txBody>
-      </p:sp>
-      <p:sp>
-        <p:nvSpPr>
           <p:cNvPr id="6" name="Slide Number Placeholder 13">
             <a:extLst>
               <a:ext uri="{FF2B5EF4-FFF2-40B4-BE49-F238E27FC236}">
-                <a16:creationId xmlns:a16="http://schemas.microsoft.com/office/drawing/2014/main" id="{D0345A68-2C4F-EAB1-DABD-0CCB8FB52C68}"/>
+                <a16:creationId xmlns:a16="http://schemas.microsoft.com/office/drawing/2014/main" id="{4800F032-5102-94C2-865C-AE9D448B2744}"/>
               </a:ext>
             </a:extLst>
           </p:cNvPr>
@@ -9420,7 +9564,7 @@
               <a:defRPr/>
             </a:pPr>
             <a:fld id="{47FEACEE-25B4-4A2D-B147-27296E36371D}" type="slidenum">
-              <a:rPr kumimoji="0" lang="es-ES_tradnl" sz="1200" u="none" strike="noStrike" kern="1200" cap="none" spc="0" normalizeH="0" baseline="0" noProof="1" smtClean="0">
+              <a:rPr kumimoji="0" lang="en-US" altLang="zh-CN" sz="1200" u="none" strike="noStrike" kern="1200" cap="none" spc="0" normalizeH="0" baseline="0" smtClean="0">
                 <a:ln>
                   <a:noFill/>
                 </a:ln>
@@ -9448,9 +9592,9 @@
                 <a:tabLst/>
                 <a:defRPr/>
               </a:pPr>
-              <a:t>13</a:t>
+              <a:t>12</a:t>
             </a:fld>
-            <a:endParaRPr kumimoji="0" lang="es-ES_tradnl" sz="1200" u="none" strike="noStrike" kern="1200" cap="none" spc="0" normalizeH="0" baseline="0" noProof="1">
+            <a:endParaRPr kumimoji="0" lang="en-US" altLang="zh-CN" sz="1200" u="none" strike="noStrike" kern="1200" cap="none" spc="0" normalizeH="0" baseline="0" dirty="0">
               <a:ln>
                 <a:noFill/>
               </a:ln>
@@ -9469,7 +9613,7 @@
           <p:cNvPr id="2" name="Slide Number Placeholder 1">
             <a:extLst>
               <a:ext uri="{FF2B5EF4-FFF2-40B4-BE49-F238E27FC236}">
-                <a16:creationId xmlns:a16="http://schemas.microsoft.com/office/drawing/2014/main" id="{68B2B9B1-0ADD-6112-D4E6-403C5D15DF8D}"/>
+                <a16:creationId xmlns:a16="http://schemas.microsoft.com/office/drawing/2014/main" id="{BB5C5013-A563-C783-9185-9C847D4B4A46}"/>
               </a:ext>
             </a:extLst>
           </p:cNvPr>
@@ -9486,20 +9630,20 @@
           <a:lstStyle/>
           <a:p>
             <a:fld id="{47FEACEE-25B4-4A2D-B147-27296E36371D}" type="slidenum">
-              <a:rPr lang="es-ES_tradnl" noProof="1" smtClean="0"/>
+              <a:rPr lang="en-US" altLang="zh-CN" noProof="0" smtClean="0"/>
               <a:pPr/>
-              <a:t>13</a:t>
+              <a:t>12</a:t>
             </a:fld>
-            <a:endParaRPr lang="es-ES_tradnl" noProof="1"/>
-          </a:p>
-        </p:txBody>
-      </p:sp>
-      <p:sp>
-        <p:nvSpPr>
-          <p:cNvPr id="4" name="Hexagon 3">
-            <a:extLst>
-              <a:ext uri="{FF2B5EF4-FFF2-40B4-BE49-F238E27FC236}">
-                <a16:creationId xmlns:a16="http://schemas.microsoft.com/office/drawing/2014/main" id="{01F53177-39F7-A239-33CD-3B0260322C63}"/>
+            <a:endParaRPr lang="en-US" altLang="zh-CN" noProof="0" dirty="0"/>
+          </a:p>
+        </p:txBody>
+      </p:sp>
+      <p:sp>
+        <p:nvSpPr>
+          <p:cNvPr id="8" name="Hexagon 7">
+            <a:extLst>
+              <a:ext uri="{FF2B5EF4-FFF2-40B4-BE49-F238E27FC236}">
+                <a16:creationId xmlns:a16="http://schemas.microsoft.com/office/drawing/2014/main" id="{AC177AA5-E431-BC4B-9713-B2F512D4D20D}"/>
               </a:ext>
             </a:extLst>
           </p:cNvPr>
@@ -9508,12 +9652,15 @@
         </p:nvSpPr>
         <p:spPr>
           <a:xfrm>
-            <a:off x="2200808" y="2312233"/>
-            <a:ext cx="1280410" cy="1083039"/>
+            <a:off x="3173136" y="2196346"/>
+            <a:ext cx="1060704" cy="914400"/>
           </a:xfrm>
           <a:prstGeom prst="hexagon">
             <a:avLst/>
           </a:prstGeom>
+          <a:solidFill>
+            <a:schemeClr val="bg1"/>
+          </a:solidFill>
         </p:spPr>
         <p:style>
           <a:lnRef idx="2">
@@ -9536,228 +9683,76 @@
           <a:lstStyle/>
           <a:p>
             <a:pPr algn="ctr"/>
-            <a:r>
-              <a:rPr lang="es-ES_tradnl" noProof="1"/>
-              <a:t>91.67%</a:t>
-            </a:r>
-          </a:p>
-        </p:txBody>
-      </p:sp>
-      <p:sp>
-        <p:nvSpPr>
-          <p:cNvPr id="9" name="Content Placeholder 9">
-            <a:extLst>
-              <a:ext uri="{FF2B5EF4-FFF2-40B4-BE49-F238E27FC236}">
-                <a16:creationId xmlns:a16="http://schemas.microsoft.com/office/drawing/2014/main" id="{D4EDED24-0D6F-E763-C7E6-094DBD036F12}"/>
-              </a:ext>
-            </a:extLst>
-          </p:cNvPr>
-          <p:cNvSpPr txBox="1">
-            <a:spLocks/>
-          </p:cNvSpPr>
+            <a:endParaRPr lang="en-GB" sz="1200" dirty="0">
+              <a:solidFill>
+                <a:schemeClr val="tx1"/>
+              </a:solidFill>
+            </a:endParaRPr>
+          </a:p>
+        </p:txBody>
+      </p:sp>
+      <p:sp>
+        <p:nvSpPr>
+          <p:cNvPr id="13" name="TextBox 12">
+            <a:extLst>
+              <a:ext uri="{FF2B5EF4-FFF2-40B4-BE49-F238E27FC236}">
+                <a16:creationId xmlns:a16="http://schemas.microsoft.com/office/drawing/2014/main" id="{47E34C36-3CEC-FF35-5273-12AAB907AC12}"/>
+              </a:ext>
+            </a:extLst>
+          </p:cNvPr>
+          <p:cNvSpPr txBox="1"/>
           <p:nvPr/>
         </p:nvSpPr>
         <p:spPr>
           <a:xfrm>
-            <a:off x="5972297" y="1661284"/>
-            <a:ext cx="4263953" cy="589863"/>
+            <a:off x="640080" y="2468880"/>
+            <a:ext cx="2280240" cy="369332"/>
           </a:xfrm>
           <a:prstGeom prst="rect">
             <a:avLst/>
           </a:prstGeom>
+          <a:noFill/>
         </p:spPr>
         <p:txBody>
-          <a:bodyPr vert="horz" lIns="91440" tIns="45720" rIns="91440" bIns="45720" rtlCol="0">
-            <a:normAutofit/>
+          <a:bodyPr wrap="none" rtlCol="0">
+            <a:spAutoFit/>
           </a:bodyPr>
-          <a:lstStyle>
-            <a:lvl1pPr marL="228600" indent="-228600" algn="l" defTabSz="914400" rtl="0" eaLnBrk="1" latinLnBrk="0" hangingPunct="1">
-              <a:lnSpc>
-                <a:spcPct val="90000"/>
-              </a:lnSpc>
-              <a:spcBef>
-                <a:spcPts val="1000"/>
-              </a:spcBef>
-              <a:buFont typeface="Arial" panose="020B0604020202020204" pitchFamily="34" charset="0"/>
-              <a:buChar char="•"/>
-              <a:defRPr sz="1800" kern="1200">
+          <a:lstStyle/>
+          <a:p>
+            <a:r>
+              <a:rPr lang="es-ES" dirty="0">
                 <a:solidFill>
-                  <a:schemeClr val="tx1"/>
+                  <a:schemeClr val="bg1"/>
                 </a:solidFill>
-                <a:latin typeface="+mn-lt"/>
-                <a:ea typeface="+mn-ea"/>
-                <a:cs typeface="+mn-cs"/>
-              </a:defRPr>
-            </a:lvl1pPr>
-            <a:lvl2pPr marL="685800" indent="-228600" algn="l" defTabSz="914400" rtl="0" eaLnBrk="1" latinLnBrk="0" hangingPunct="1">
-              <a:lnSpc>
-                <a:spcPct val="90000"/>
-              </a:lnSpc>
-              <a:spcBef>
-                <a:spcPts val="500"/>
-              </a:spcBef>
-              <a:buFont typeface="Arial" panose="020B0604020202020204" pitchFamily="34" charset="0"/>
-              <a:buChar char="•"/>
-              <a:defRPr sz="1800" kern="1200">
+              </a:rPr>
+              <a:t>Empleados</a:t>
+            </a:r>
+            <a:r>
+              <a:rPr lang="es-ES" dirty="0"/>
+              <a:t> </a:t>
+            </a:r>
+            <a:r>
+              <a:rPr lang="es-ES" dirty="0">
                 <a:solidFill>
-                  <a:schemeClr val="tx1"/>
+                  <a:schemeClr val="bg1"/>
                 </a:solidFill>
-                <a:latin typeface="+mn-lt"/>
-                <a:ea typeface="+mn-ea"/>
-                <a:cs typeface="+mn-cs"/>
-              </a:defRPr>
-            </a:lvl2pPr>
-            <a:lvl3pPr marL="1143000" indent="-228600" algn="l" defTabSz="914400" rtl="0" eaLnBrk="1" latinLnBrk="0" hangingPunct="1">
-              <a:lnSpc>
-                <a:spcPct val="90000"/>
-              </a:lnSpc>
-              <a:spcBef>
-                <a:spcPts val="500"/>
-              </a:spcBef>
-              <a:buFont typeface="Arial" panose="020B0604020202020204" pitchFamily="34" charset="0"/>
-              <a:buChar char="•"/>
-              <a:defRPr sz="1800" kern="1200">
-                <a:solidFill>
-                  <a:schemeClr val="tx1"/>
-                </a:solidFill>
-                <a:latin typeface="+mn-lt"/>
-                <a:ea typeface="+mn-ea"/>
-                <a:cs typeface="+mn-cs"/>
-              </a:defRPr>
-            </a:lvl3pPr>
-            <a:lvl4pPr marL="1600200" indent="-228600" algn="l" defTabSz="914400" rtl="0" eaLnBrk="1" latinLnBrk="0" hangingPunct="1">
-              <a:lnSpc>
-                <a:spcPct val="90000"/>
-              </a:lnSpc>
-              <a:spcBef>
-                <a:spcPts val="500"/>
-              </a:spcBef>
-              <a:buFont typeface="Arial" panose="020B0604020202020204" pitchFamily="34" charset="0"/>
-              <a:buChar char="•"/>
-              <a:defRPr sz="1800" kern="1200">
-                <a:solidFill>
-                  <a:schemeClr val="tx1"/>
-                </a:solidFill>
-                <a:latin typeface="+mn-lt"/>
-                <a:ea typeface="+mn-ea"/>
-                <a:cs typeface="+mn-cs"/>
-              </a:defRPr>
-            </a:lvl4pPr>
-            <a:lvl5pPr marL="2057400" indent="-228600" algn="l" defTabSz="914400" rtl="0" eaLnBrk="1" latinLnBrk="0" hangingPunct="1">
-              <a:lnSpc>
-                <a:spcPct val="90000"/>
-              </a:lnSpc>
-              <a:spcBef>
-                <a:spcPts val="500"/>
-              </a:spcBef>
-              <a:buFont typeface="Arial" panose="020B0604020202020204" pitchFamily="34" charset="0"/>
-              <a:buChar char="•"/>
-              <a:defRPr sz="1800" kern="1200">
-                <a:solidFill>
-                  <a:schemeClr val="tx1"/>
-                </a:solidFill>
-                <a:latin typeface="+mn-lt"/>
-                <a:ea typeface="+mn-ea"/>
-                <a:cs typeface="+mn-cs"/>
-              </a:defRPr>
-            </a:lvl5pPr>
-            <a:lvl6pPr marL="2514600" indent="-228600" algn="l" defTabSz="914400" rtl="0" eaLnBrk="1" latinLnBrk="0" hangingPunct="1">
-              <a:lnSpc>
-                <a:spcPct val="90000"/>
-              </a:lnSpc>
-              <a:spcBef>
-                <a:spcPts val="500"/>
-              </a:spcBef>
-              <a:buFont typeface="Arial" panose="020B0604020202020204" pitchFamily="34" charset="0"/>
-              <a:buChar char="•"/>
-              <a:defRPr sz="1800" kern="1200">
-                <a:solidFill>
-                  <a:schemeClr val="tx1"/>
-                </a:solidFill>
-                <a:latin typeface="+mn-lt"/>
-                <a:ea typeface="+mn-ea"/>
-                <a:cs typeface="+mn-cs"/>
-              </a:defRPr>
-            </a:lvl6pPr>
-            <a:lvl7pPr marL="2971800" indent="-228600" algn="l" defTabSz="914400" rtl="0" eaLnBrk="1" latinLnBrk="0" hangingPunct="1">
-              <a:lnSpc>
-                <a:spcPct val="90000"/>
-              </a:lnSpc>
-              <a:spcBef>
-                <a:spcPts val="500"/>
-              </a:spcBef>
-              <a:buFont typeface="Arial" panose="020B0604020202020204" pitchFamily="34" charset="0"/>
-              <a:buChar char="•"/>
-              <a:defRPr sz="1800" kern="1200">
-                <a:solidFill>
-                  <a:schemeClr val="tx1"/>
-                </a:solidFill>
-                <a:latin typeface="+mn-lt"/>
-                <a:ea typeface="+mn-ea"/>
-                <a:cs typeface="+mn-cs"/>
-              </a:defRPr>
-            </a:lvl7pPr>
-            <a:lvl8pPr marL="3429000" indent="-228600" algn="l" defTabSz="914400" rtl="0" eaLnBrk="1" latinLnBrk="0" hangingPunct="1">
-              <a:lnSpc>
-                <a:spcPct val="90000"/>
-              </a:lnSpc>
-              <a:spcBef>
-                <a:spcPts val="500"/>
-              </a:spcBef>
-              <a:buFont typeface="Arial" panose="020B0604020202020204" pitchFamily="34" charset="0"/>
-              <a:buChar char="•"/>
-              <a:defRPr sz="1800" kern="1200">
-                <a:solidFill>
-                  <a:schemeClr val="tx1"/>
-                </a:solidFill>
-                <a:latin typeface="+mn-lt"/>
-                <a:ea typeface="+mn-ea"/>
-                <a:cs typeface="+mn-cs"/>
-              </a:defRPr>
-            </a:lvl8pPr>
-            <a:lvl9pPr marL="3886200" indent="-228600" algn="l" defTabSz="914400" rtl="0" eaLnBrk="1" latinLnBrk="0" hangingPunct="1">
-              <a:lnSpc>
-                <a:spcPct val="90000"/>
-              </a:lnSpc>
-              <a:spcBef>
-                <a:spcPts val="500"/>
-              </a:spcBef>
-              <a:buFont typeface="Arial" panose="020B0604020202020204" pitchFamily="34" charset="0"/>
-              <a:buChar char="•"/>
-              <a:defRPr sz="1800" kern="1200">
-                <a:solidFill>
-                  <a:schemeClr val="tx1"/>
-                </a:solidFill>
-                <a:latin typeface="+mn-lt"/>
-                <a:ea typeface="+mn-ea"/>
-                <a:cs typeface="+mn-cs"/>
-              </a:defRPr>
-            </a:lvl9pPr>
-          </a:lstStyle>
-          <a:p>
-            <a:pPr marL="0" indent="0" algn="ctr">
-              <a:buNone/>
-            </a:pPr>
-            <a:r>
-              <a:rPr lang="es-ES_tradnl" b="1" noProof="1"/>
-              <a:t>Mes pico carga ausencia</a:t>
-            </a:r>
-          </a:p>
-          <a:p>
-            <a:pPr algn="ctr"/>
-            <a:endParaRPr lang="es-ES_tradnl" b="1" noProof="1"/>
-          </a:p>
-          <a:p>
-            <a:endParaRPr lang="es-ES_tradnl" noProof="1"/>
-          </a:p>
-        </p:txBody>
-      </p:sp>
-      <p:sp>
-        <p:nvSpPr>
-          <p:cNvPr id="11" name="Rectangle 10">
-            <a:extLst>
-              <a:ext uri="{FF2B5EF4-FFF2-40B4-BE49-F238E27FC236}">
-                <a16:creationId xmlns:a16="http://schemas.microsoft.com/office/drawing/2014/main" id="{55F28533-E21A-7FD1-BD00-211ED959FF57}"/>
+              </a:rPr>
+              <a:t>ausentes</a:t>
+            </a:r>
+            <a:endParaRPr lang="en-GB" dirty="0">
+              <a:solidFill>
+                <a:schemeClr val="bg1"/>
+              </a:solidFill>
+            </a:endParaRPr>
+          </a:p>
+        </p:txBody>
+      </p:sp>
+      <p:sp>
+        <p:nvSpPr>
+          <p:cNvPr id="16" name="Hexagon 15">
+            <a:extLst>
+              <a:ext uri="{FF2B5EF4-FFF2-40B4-BE49-F238E27FC236}">
+                <a16:creationId xmlns:a16="http://schemas.microsoft.com/office/drawing/2014/main" id="{A815D7EC-EA74-2E10-214A-5F3B2C0519C0}"/>
               </a:ext>
             </a:extLst>
           </p:cNvPr>
@@ -9766,12 +9761,15 @@
         </p:nvSpPr>
         <p:spPr>
           <a:xfrm>
-            <a:off x="7328317" y="2345961"/>
-            <a:ext cx="1282283" cy="1083039"/>
+            <a:off x="3173136" y="4389121"/>
+            <a:ext cx="1060704" cy="914400"/>
           </a:xfrm>
-          <a:prstGeom prst="rect">
+          <a:prstGeom prst="hexagon">
             <a:avLst/>
           </a:prstGeom>
+          <a:solidFill>
+            <a:schemeClr val="bg1"/>
+          </a:solidFill>
         </p:spPr>
         <p:style>
           <a:lnRef idx="2">
@@ -9795,443 +9793,116 @@
           <a:p>
             <a:pPr algn="ctr"/>
             <a:r>
-              <a:rPr lang="es-ES_tradnl" noProof="1"/>
-              <a:t>Marzo </a:t>
-            </a:r>
-          </a:p>
-          <a:p>
-            <a:pPr algn="ctr"/>
-            <a:r>
-              <a:rPr lang="es-ES_tradnl" noProof="1"/>
-              <a:t>755 horas</a:t>
-            </a:r>
-          </a:p>
-        </p:txBody>
-      </p:sp>
-      <p:sp>
-        <p:nvSpPr>
-          <p:cNvPr id="12" name="Content Placeholder 9">
-            <a:extLst>
-              <a:ext uri="{FF2B5EF4-FFF2-40B4-BE49-F238E27FC236}">
-                <a16:creationId xmlns:a16="http://schemas.microsoft.com/office/drawing/2014/main" id="{3742BE1F-0F1E-7F40-18C2-BA07939C6904}"/>
-              </a:ext>
-            </a:extLst>
-          </p:cNvPr>
-          <p:cNvSpPr txBox="1">
-            <a:spLocks/>
-          </p:cNvSpPr>
+              <a:rPr lang="es-ES" sz="1400" dirty="0">
+                <a:solidFill>
+                  <a:schemeClr val="tx1"/>
+                </a:solidFill>
+              </a:rPr>
+              <a:t>142</a:t>
+            </a:r>
+            <a:endParaRPr lang="en-GB" sz="1400" dirty="0">
+              <a:solidFill>
+                <a:schemeClr val="tx1"/>
+              </a:solidFill>
+            </a:endParaRPr>
+          </a:p>
+        </p:txBody>
+      </p:sp>
+      <p:sp>
+        <p:nvSpPr>
+          <p:cNvPr id="17" name="TextBox 16">
+            <a:extLst>
+              <a:ext uri="{FF2B5EF4-FFF2-40B4-BE49-F238E27FC236}">
+                <a16:creationId xmlns:a16="http://schemas.microsoft.com/office/drawing/2014/main" id="{34B55E61-595D-EA93-BD95-A6127F622FF1}"/>
+              </a:ext>
+            </a:extLst>
+          </p:cNvPr>
+          <p:cNvSpPr txBox="1"/>
           <p:nvPr/>
         </p:nvSpPr>
         <p:spPr>
           <a:xfrm>
-            <a:off x="801757" y="4050717"/>
-            <a:ext cx="4078512" cy="731147"/>
+            <a:off x="567366" y="4402576"/>
+            <a:ext cx="2777427" cy="923330"/>
           </a:xfrm>
           <a:prstGeom prst="rect">
             <a:avLst/>
           </a:prstGeom>
+          <a:noFill/>
         </p:spPr>
         <p:txBody>
-          <a:bodyPr vert="horz" lIns="91440" tIns="45720" rIns="91440" bIns="45720" rtlCol="0">
-            <a:normAutofit/>
+          <a:bodyPr wrap="none" rtlCol="0">
+            <a:spAutoFit/>
           </a:bodyPr>
-          <a:lstStyle>
-            <a:lvl1pPr marL="228600" indent="-228600" algn="l" defTabSz="914400" rtl="0" eaLnBrk="1" latinLnBrk="0" hangingPunct="1">
-              <a:lnSpc>
-                <a:spcPct val="90000"/>
-              </a:lnSpc>
-              <a:spcBef>
-                <a:spcPts val="1000"/>
-              </a:spcBef>
-              <a:buFont typeface="Arial" panose="020B0604020202020204" pitchFamily="34" charset="0"/>
-              <a:buChar char="•"/>
-              <a:defRPr sz="1800" kern="1200">
+          <a:lstStyle/>
+          <a:p>
+            <a:r>
+              <a:rPr lang="es-ES" dirty="0">
                 <a:solidFill>
-                  <a:schemeClr val="tx1"/>
+                  <a:schemeClr val="bg1"/>
                 </a:solidFill>
-                <a:latin typeface="+mn-lt"/>
-                <a:ea typeface="+mn-ea"/>
-                <a:cs typeface="+mn-cs"/>
-              </a:defRPr>
-            </a:lvl1pPr>
-            <a:lvl2pPr marL="685800" indent="-228600" algn="l" defTabSz="914400" rtl="0" eaLnBrk="1" latinLnBrk="0" hangingPunct="1">
-              <a:lnSpc>
-                <a:spcPct val="90000"/>
-              </a:lnSpc>
-              <a:spcBef>
-                <a:spcPts val="500"/>
-              </a:spcBef>
-              <a:buFont typeface="Arial" panose="020B0604020202020204" pitchFamily="34" charset="0"/>
-              <a:buChar char="•"/>
-              <a:defRPr sz="1800" kern="1200">
+              </a:rPr>
+              <a:t>Motivo modal</a:t>
+            </a:r>
+          </a:p>
+          <a:p>
+            <a:r>
+              <a:rPr lang="es-ES" dirty="0" err="1">
                 <a:solidFill>
-                  <a:schemeClr val="tx1"/>
+                  <a:schemeClr val="bg1"/>
                 </a:solidFill>
-                <a:latin typeface="+mn-lt"/>
-                <a:ea typeface="+mn-ea"/>
-                <a:cs typeface="+mn-cs"/>
-              </a:defRPr>
-            </a:lvl2pPr>
-            <a:lvl3pPr marL="1143000" indent="-228600" algn="l" defTabSz="914400" rtl="0" eaLnBrk="1" latinLnBrk="0" hangingPunct="1">
-              <a:lnSpc>
-                <a:spcPct val="90000"/>
-              </a:lnSpc>
-              <a:spcBef>
-                <a:spcPts val="500"/>
-              </a:spcBef>
-              <a:buFont typeface="Arial" panose="020B0604020202020204" pitchFamily="34" charset="0"/>
-              <a:buChar char="•"/>
-              <a:defRPr sz="1800" kern="1200">
+              </a:rPr>
+              <a:t>ausentísmo</a:t>
+            </a:r>
+            <a:r>
+              <a:rPr lang="es-ES" dirty="0">
                 <a:solidFill>
-                  <a:schemeClr val="tx1"/>
+                  <a:schemeClr val="bg1"/>
                 </a:solidFill>
-                <a:latin typeface="+mn-lt"/>
-                <a:ea typeface="+mn-ea"/>
-                <a:cs typeface="+mn-cs"/>
-              </a:defRPr>
-            </a:lvl3pPr>
-            <a:lvl4pPr marL="1600200" indent="-228600" algn="l" defTabSz="914400" rtl="0" eaLnBrk="1" latinLnBrk="0" hangingPunct="1">
-              <a:lnSpc>
-                <a:spcPct val="90000"/>
-              </a:lnSpc>
-              <a:spcBef>
-                <a:spcPts val="500"/>
-              </a:spcBef>
-              <a:buFont typeface="Arial" panose="020B0604020202020204" pitchFamily="34" charset="0"/>
-              <a:buChar char="•"/>
-              <a:defRPr sz="1800" kern="1200">
+              </a:rPr>
+              <a:t> laboral:</a:t>
+            </a:r>
+          </a:p>
+          <a:p>
+            <a:r>
+              <a:rPr lang="es-ES" dirty="0">
                 <a:solidFill>
-                  <a:schemeClr val="tx1"/>
+                  <a:schemeClr val="bg1"/>
                 </a:solidFill>
-                <a:latin typeface="+mn-lt"/>
-                <a:ea typeface="+mn-ea"/>
-                <a:cs typeface="+mn-cs"/>
-              </a:defRPr>
-            </a:lvl4pPr>
-            <a:lvl5pPr marL="2057400" indent="-228600" algn="l" defTabSz="914400" rtl="0" eaLnBrk="1" latinLnBrk="0" hangingPunct="1">
-              <a:lnSpc>
-                <a:spcPct val="90000"/>
-              </a:lnSpc>
-              <a:spcBef>
-                <a:spcPts val="500"/>
-              </a:spcBef>
-              <a:buFont typeface="Arial" panose="020B0604020202020204" pitchFamily="34" charset="0"/>
-              <a:buChar char="•"/>
-              <a:defRPr sz="1800" kern="1200">
-                <a:solidFill>
-                  <a:schemeClr val="tx1"/>
-                </a:solidFill>
-                <a:latin typeface="+mn-lt"/>
-                <a:ea typeface="+mn-ea"/>
-                <a:cs typeface="+mn-cs"/>
-              </a:defRPr>
-            </a:lvl5pPr>
-            <a:lvl6pPr marL="2514600" indent="-228600" algn="l" defTabSz="914400" rtl="0" eaLnBrk="1" latinLnBrk="0" hangingPunct="1">
-              <a:lnSpc>
-                <a:spcPct val="90000"/>
-              </a:lnSpc>
-              <a:spcBef>
-                <a:spcPts val="500"/>
-              </a:spcBef>
-              <a:buFont typeface="Arial" panose="020B0604020202020204" pitchFamily="34" charset="0"/>
-              <a:buChar char="•"/>
-              <a:defRPr sz="1800" kern="1200">
-                <a:solidFill>
-                  <a:schemeClr val="tx1"/>
-                </a:solidFill>
-                <a:latin typeface="+mn-lt"/>
-                <a:ea typeface="+mn-ea"/>
-                <a:cs typeface="+mn-cs"/>
-              </a:defRPr>
-            </a:lvl6pPr>
-            <a:lvl7pPr marL="2971800" indent="-228600" algn="l" defTabSz="914400" rtl="0" eaLnBrk="1" latinLnBrk="0" hangingPunct="1">
-              <a:lnSpc>
-                <a:spcPct val="90000"/>
-              </a:lnSpc>
-              <a:spcBef>
-                <a:spcPts val="500"/>
-              </a:spcBef>
-              <a:buFont typeface="Arial" panose="020B0604020202020204" pitchFamily="34" charset="0"/>
-              <a:buChar char="•"/>
-              <a:defRPr sz="1800" kern="1200">
-                <a:solidFill>
-                  <a:schemeClr val="tx1"/>
-                </a:solidFill>
-                <a:latin typeface="+mn-lt"/>
-                <a:ea typeface="+mn-ea"/>
-                <a:cs typeface="+mn-cs"/>
-              </a:defRPr>
-            </a:lvl7pPr>
-            <a:lvl8pPr marL="3429000" indent="-228600" algn="l" defTabSz="914400" rtl="0" eaLnBrk="1" latinLnBrk="0" hangingPunct="1">
-              <a:lnSpc>
-                <a:spcPct val="90000"/>
-              </a:lnSpc>
-              <a:spcBef>
-                <a:spcPts val="500"/>
-              </a:spcBef>
-              <a:buFont typeface="Arial" panose="020B0604020202020204" pitchFamily="34" charset="0"/>
-              <a:buChar char="•"/>
-              <a:defRPr sz="1800" kern="1200">
-                <a:solidFill>
-                  <a:schemeClr val="tx1"/>
-                </a:solidFill>
-                <a:latin typeface="+mn-lt"/>
-                <a:ea typeface="+mn-ea"/>
-                <a:cs typeface="+mn-cs"/>
-              </a:defRPr>
-            </a:lvl8pPr>
-            <a:lvl9pPr marL="3886200" indent="-228600" algn="l" defTabSz="914400" rtl="0" eaLnBrk="1" latinLnBrk="0" hangingPunct="1">
-              <a:lnSpc>
-                <a:spcPct val="90000"/>
-              </a:lnSpc>
-              <a:spcBef>
-                <a:spcPts val="500"/>
-              </a:spcBef>
-              <a:buFont typeface="Arial" panose="020B0604020202020204" pitchFamily="34" charset="0"/>
-              <a:buChar char="•"/>
-              <a:defRPr sz="1800" kern="1200">
-                <a:solidFill>
-                  <a:schemeClr val="tx1"/>
-                </a:solidFill>
-                <a:latin typeface="+mn-lt"/>
-                <a:ea typeface="+mn-ea"/>
-                <a:cs typeface="+mn-cs"/>
-              </a:defRPr>
-            </a:lvl9pPr>
-          </a:lstStyle>
-          <a:p>
-            <a:pPr marL="0" indent="0" algn="ctr">
-              <a:buNone/>
-            </a:pPr>
-            <a:r>
-              <a:rPr lang="es-ES_tradnl" b="1" noProof="1"/>
-              <a:t>Motivo Modal</a:t>
-            </a:r>
-          </a:p>
-        </p:txBody>
-      </p:sp>
-      <p:sp>
-        <p:nvSpPr>
-          <p:cNvPr id="13" name="Content Placeholder 9">
-            <a:extLst>
-              <a:ext uri="{FF2B5EF4-FFF2-40B4-BE49-F238E27FC236}">
-                <a16:creationId xmlns:a16="http://schemas.microsoft.com/office/drawing/2014/main" id="{853AF8A3-DBD5-D710-5706-36F80DB2CF6B}"/>
-              </a:ext>
-            </a:extLst>
-          </p:cNvPr>
-          <p:cNvSpPr txBox="1">
-            <a:spLocks/>
-          </p:cNvSpPr>
+              </a:rPr>
+              <a:t>MEDICAL CONSULTATION</a:t>
+            </a:r>
+            <a:endParaRPr lang="en-GB" dirty="0">
+              <a:solidFill>
+                <a:schemeClr val="bg1"/>
+              </a:solidFill>
+            </a:endParaRPr>
+          </a:p>
+        </p:txBody>
+      </p:sp>
+      <p:sp>
+        <p:nvSpPr>
+          <p:cNvPr id="18" name="Hexagon 17">
+            <a:extLst>
+              <a:ext uri="{FF2B5EF4-FFF2-40B4-BE49-F238E27FC236}">
+                <a16:creationId xmlns:a16="http://schemas.microsoft.com/office/drawing/2014/main" id="{D41E513B-1F34-8976-39B2-2901B22145CB}"/>
+              </a:ext>
+            </a:extLst>
+          </p:cNvPr>
+          <p:cNvSpPr/>
           <p:nvPr/>
         </p:nvSpPr>
         <p:spPr>
           <a:xfrm>
-            <a:off x="6030384" y="4082123"/>
-            <a:ext cx="4772055" cy="731147"/>
+            <a:off x="7712112" y="2170807"/>
+            <a:ext cx="1060704" cy="914400"/>
           </a:xfrm>
-          <a:prstGeom prst="rect">
+          <a:prstGeom prst="hexagon">
             <a:avLst/>
           </a:prstGeom>
-        </p:spPr>
-        <p:txBody>
-          <a:bodyPr vert="horz" lIns="91440" tIns="45720" rIns="91440" bIns="45720" rtlCol="0">
-            <a:normAutofit/>
-          </a:bodyPr>
-          <a:lstStyle>
-            <a:lvl1pPr marL="228600" indent="-228600" algn="l" defTabSz="914400" rtl="0" eaLnBrk="1" latinLnBrk="0" hangingPunct="1">
-              <a:lnSpc>
-                <a:spcPct val="90000"/>
-              </a:lnSpc>
-              <a:spcBef>
-                <a:spcPts val="1000"/>
-              </a:spcBef>
-              <a:buFont typeface="Arial" panose="020B0604020202020204" pitchFamily="34" charset="0"/>
-              <a:buChar char="•"/>
-              <a:defRPr sz="1800" kern="1200">
-                <a:solidFill>
-                  <a:schemeClr val="tx1"/>
-                </a:solidFill>
-                <a:latin typeface="+mn-lt"/>
-                <a:ea typeface="+mn-ea"/>
-                <a:cs typeface="+mn-cs"/>
-              </a:defRPr>
-            </a:lvl1pPr>
-            <a:lvl2pPr marL="685800" indent="-228600" algn="l" defTabSz="914400" rtl="0" eaLnBrk="1" latinLnBrk="0" hangingPunct="1">
-              <a:lnSpc>
-                <a:spcPct val="90000"/>
-              </a:lnSpc>
-              <a:spcBef>
-                <a:spcPts val="500"/>
-              </a:spcBef>
-              <a:buFont typeface="Arial" panose="020B0604020202020204" pitchFamily="34" charset="0"/>
-              <a:buChar char="•"/>
-              <a:defRPr sz="1800" kern="1200">
-                <a:solidFill>
-                  <a:schemeClr val="tx1"/>
-                </a:solidFill>
-                <a:latin typeface="+mn-lt"/>
-                <a:ea typeface="+mn-ea"/>
-                <a:cs typeface="+mn-cs"/>
-              </a:defRPr>
-            </a:lvl2pPr>
-            <a:lvl3pPr marL="1143000" indent="-228600" algn="l" defTabSz="914400" rtl="0" eaLnBrk="1" latinLnBrk="0" hangingPunct="1">
-              <a:lnSpc>
-                <a:spcPct val="90000"/>
-              </a:lnSpc>
-              <a:spcBef>
-                <a:spcPts val="500"/>
-              </a:spcBef>
-              <a:buFont typeface="Arial" panose="020B0604020202020204" pitchFamily="34" charset="0"/>
-              <a:buChar char="•"/>
-              <a:defRPr sz="1800" kern="1200">
-                <a:solidFill>
-                  <a:schemeClr val="tx1"/>
-                </a:solidFill>
-                <a:latin typeface="+mn-lt"/>
-                <a:ea typeface="+mn-ea"/>
-                <a:cs typeface="+mn-cs"/>
-              </a:defRPr>
-            </a:lvl3pPr>
-            <a:lvl4pPr marL="1600200" indent="-228600" algn="l" defTabSz="914400" rtl="0" eaLnBrk="1" latinLnBrk="0" hangingPunct="1">
-              <a:lnSpc>
-                <a:spcPct val="90000"/>
-              </a:lnSpc>
-              <a:spcBef>
-                <a:spcPts val="500"/>
-              </a:spcBef>
-              <a:buFont typeface="Arial" panose="020B0604020202020204" pitchFamily="34" charset="0"/>
-              <a:buChar char="•"/>
-              <a:defRPr sz="1800" kern="1200">
-                <a:solidFill>
-                  <a:schemeClr val="tx1"/>
-                </a:solidFill>
-                <a:latin typeface="+mn-lt"/>
-                <a:ea typeface="+mn-ea"/>
-                <a:cs typeface="+mn-cs"/>
-              </a:defRPr>
-            </a:lvl4pPr>
-            <a:lvl5pPr marL="2057400" indent="-228600" algn="l" defTabSz="914400" rtl="0" eaLnBrk="1" latinLnBrk="0" hangingPunct="1">
-              <a:lnSpc>
-                <a:spcPct val="90000"/>
-              </a:lnSpc>
-              <a:spcBef>
-                <a:spcPts val="500"/>
-              </a:spcBef>
-              <a:buFont typeface="Arial" panose="020B0604020202020204" pitchFamily="34" charset="0"/>
-              <a:buChar char="•"/>
-              <a:defRPr sz="1800" kern="1200">
-                <a:solidFill>
-                  <a:schemeClr val="tx1"/>
-                </a:solidFill>
-                <a:latin typeface="+mn-lt"/>
-                <a:ea typeface="+mn-ea"/>
-                <a:cs typeface="+mn-cs"/>
-              </a:defRPr>
-            </a:lvl5pPr>
-            <a:lvl6pPr marL="2514600" indent="-228600" algn="l" defTabSz="914400" rtl="0" eaLnBrk="1" latinLnBrk="0" hangingPunct="1">
-              <a:lnSpc>
-                <a:spcPct val="90000"/>
-              </a:lnSpc>
-              <a:spcBef>
-                <a:spcPts val="500"/>
-              </a:spcBef>
-              <a:buFont typeface="Arial" panose="020B0604020202020204" pitchFamily="34" charset="0"/>
-              <a:buChar char="•"/>
-              <a:defRPr sz="1800" kern="1200">
-                <a:solidFill>
-                  <a:schemeClr val="tx1"/>
-                </a:solidFill>
-                <a:latin typeface="+mn-lt"/>
-                <a:ea typeface="+mn-ea"/>
-                <a:cs typeface="+mn-cs"/>
-              </a:defRPr>
-            </a:lvl6pPr>
-            <a:lvl7pPr marL="2971800" indent="-228600" algn="l" defTabSz="914400" rtl="0" eaLnBrk="1" latinLnBrk="0" hangingPunct="1">
-              <a:lnSpc>
-                <a:spcPct val="90000"/>
-              </a:lnSpc>
-              <a:spcBef>
-                <a:spcPts val="500"/>
-              </a:spcBef>
-              <a:buFont typeface="Arial" panose="020B0604020202020204" pitchFamily="34" charset="0"/>
-              <a:buChar char="•"/>
-              <a:defRPr sz="1800" kern="1200">
-                <a:solidFill>
-                  <a:schemeClr val="tx1"/>
-                </a:solidFill>
-                <a:latin typeface="+mn-lt"/>
-                <a:ea typeface="+mn-ea"/>
-                <a:cs typeface="+mn-cs"/>
-              </a:defRPr>
-            </a:lvl7pPr>
-            <a:lvl8pPr marL="3429000" indent="-228600" algn="l" defTabSz="914400" rtl="0" eaLnBrk="1" latinLnBrk="0" hangingPunct="1">
-              <a:lnSpc>
-                <a:spcPct val="90000"/>
-              </a:lnSpc>
-              <a:spcBef>
-                <a:spcPts val="500"/>
-              </a:spcBef>
-              <a:buFont typeface="Arial" panose="020B0604020202020204" pitchFamily="34" charset="0"/>
-              <a:buChar char="•"/>
-              <a:defRPr sz="1800" kern="1200">
-                <a:solidFill>
-                  <a:schemeClr val="tx1"/>
-                </a:solidFill>
-                <a:latin typeface="+mn-lt"/>
-                <a:ea typeface="+mn-ea"/>
-                <a:cs typeface="+mn-cs"/>
-              </a:defRPr>
-            </a:lvl8pPr>
-            <a:lvl9pPr marL="3886200" indent="-228600" algn="l" defTabSz="914400" rtl="0" eaLnBrk="1" latinLnBrk="0" hangingPunct="1">
-              <a:lnSpc>
-                <a:spcPct val="90000"/>
-              </a:lnSpc>
-              <a:spcBef>
-                <a:spcPts val="500"/>
-              </a:spcBef>
-              <a:buFont typeface="Arial" panose="020B0604020202020204" pitchFamily="34" charset="0"/>
-              <a:buChar char="•"/>
-              <a:defRPr sz="1800" kern="1200">
-                <a:solidFill>
-                  <a:schemeClr val="tx1"/>
-                </a:solidFill>
-                <a:latin typeface="+mn-lt"/>
-                <a:ea typeface="+mn-ea"/>
-                <a:cs typeface="+mn-cs"/>
-              </a:defRPr>
-            </a:lvl9pPr>
-          </a:lstStyle>
-          <a:p>
-            <a:pPr marL="0" indent="0">
-              <a:buNone/>
-            </a:pPr>
-            <a:r>
-              <a:rPr lang="es-ES_tradnl" b="1" noProof="1"/>
-              <a:t>Indice Eficiencia relativa carga laboral</a:t>
-            </a:r>
-          </a:p>
-        </p:txBody>
-      </p:sp>
-      <p:sp>
-        <p:nvSpPr>
-          <p:cNvPr id="14" name="Rectangle 13">
-            <a:extLst>
-              <a:ext uri="{FF2B5EF4-FFF2-40B4-BE49-F238E27FC236}">
-                <a16:creationId xmlns:a16="http://schemas.microsoft.com/office/drawing/2014/main" id="{80625F6E-D523-8C5A-9383-8290B01EB7CC}"/>
-              </a:ext>
-            </a:extLst>
-          </p:cNvPr>
-          <p:cNvSpPr/>
-          <p:nvPr/>
-        </p:nvSpPr>
-        <p:spPr>
-          <a:xfrm>
-            <a:off x="1302958" y="4966617"/>
-            <a:ext cx="4078511" cy="1083039"/>
-          </a:xfrm>
-          <a:prstGeom prst="rect">
-            <a:avLst/>
-          </a:prstGeom>
+          <a:solidFill>
+            <a:schemeClr val="bg1"/>
+          </a:solidFill>
         </p:spPr>
         <p:style>
           <a:lnRef idx="2">
@@ -10255,25 +9926,71 @@
           <a:p>
             <a:pPr algn="ctr"/>
             <a:r>
-              <a:rPr lang="es-ES_tradnl" noProof="1"/>
-              <a:t>Medical Consultation </a:t>
-            </a:r>
-          </a:p>
-          <a:p>
-            <a:pPr algn="ctr"/>
-            <a:r>
-              <a:rPr lang="es-ES_tradnl" noProof="1"/>
-              <a:t>142 eventos</a:t>
-            </a:r>
-          </a:p>
-        </p:txBody>
-      </p:sp>
-      <p:sp>
-        <p:nvSpPr>
-          <p:cNvPr id="15" name="Hexagon 14">
-            <a:extLst>
-              <a:ext uri="{FF2B5EF4-FFF2-40B4-BE49-F238E27FC236}">
-                <a16:creationId xmlns:a16="http://schemas.microsoft.com/office/drawing/2014/main" id="{135604CC-F702-6577-CEC7-9CC52B942FAD}"/>
+              <a:rPr lang="es-ES" sz="1600" dirty="0">
+                <a:solidFill>
+                  <a:schemeClr val="tx1"/>
+                </a:solidFill>
+              </a:rPr>
+              <a:t>Marzo</a:t>
+            </a:r>
+            <a:endParaRPr lang="en-GB" sz="1600" dirty="0">
+              <a:solidFill>
+                <a:schemeClr val="tx1"/>
+              </a:solidFill>
+            </a:endParaRPr>
+          </a:p>
+        </p:txBody>
+      </p:sp>
+      <p:sp>
+        <p:nvSpPr>
+          <p:cNvPr id="19" name="TextBox 18">
+            <a:extLst>
+              <a:ext uri="{FF2B5EF4-FFF2-40B4-BE49-F238E27FC236}">
+                <a16:creationId xmlns:a16="http://schemas.microsoft.com/office/drawing/2014/main" id="{96137DCA-5EE4-D4DA-8B17-D884CC7C3F54}"/>
+              </a:ext>
+            </a:extLst>
+          </p:cNvPr>
+          <p:cNvSpPr txBox="1"/>
+          <p:nvPr/>
+        </p:nvSpPr>
+        <p:spPr>
+          <a:xfrm>
+            <a:off x="5179056" y="2443341"/>
+            <a:ext cx="2636619" cy="369332"/>
+          </a:xfrm>
+          <a:prstGeom prst="rect">
+            <a:avLst/>
+          </a:prstGeom>
+          <a:noFill/>
+        </p:spPr>
+        <p:txBody>
+          <a:bodyPr wrap="none" rtlCol="0">
+            <a:spAutoFit/>
+          </a:bodyPr>
+          <a:lstStyle/>
+          <a:p>
+            <a:r>
+              <a:rPr lang="es-ES" dirty="0">
+                <a:solidFill>
+                  <a:schemeClr val="bg1"/>
+                </a:solidFill>
+              </a:rPr>
+              <a:t>Mes pico carga ausencia</a:t>
+            </a:r>
+            <a:endParaRPr lang="en-GB" dirty="0">
+              <a:solidFill>
+                <a:schemeClr val="bg1"/>
+              </a:solidFill>
+            </a:endParaRPr>
+          </a:p>
+        </p:txBody>
+      </p:sp>
+      <p:sp>
+        <p:nvSpPr>
+          <p:cNvPr id="20" name="Hexagon 19">
+            <a:extLst>
+              <a:ext uri="{FF2B5EF4-FFF2-40B4-BE49-F238E27FC236}">
+                <a16:creationId xmlns:a16="http://schemas.microsoft.com/office/drawing/2014/main" id="{EFEBDBDE-A8B2-472E-8A64-C8984F159F07}"/>
               </a:ext>
             </a:extLst>
           </p:cNvPr>
@@ -10282,12 +9999,15 @@
         </p:nvSpPr>
         <p:spPr>
           <a:xfrm>
-            <a:off x="7464068" y="4953955"/>
-            <a:ext cx="1280410" cy="1083039"/>
+            <a:off x="7712112" y="4389121"/>
+            <a:ext cx="1060704" cy="914400"/>
           </a:xfrm>
           <a:prstGeom prst="hexagon">
             <a:avLst/>
           </a:prstGeom>
+          <a:solidFill>
+            <a:schemeClr val="bg1"/>
+          </a:solidFill>
         </p:spPr>
         <p:style>
           <a:lnRef idx="2">
@@ -10311,16 +10031,123 @@
           <a:p>
             <a:pPr algn="ctr"/>
             <a:r>
-              <a:rPr lang="es-ES_tradnl" noProof="1"/>
+              <a:rPr lang="es-ES" sz="1400" dirty="0">
+                <a:solidFill>
+                  <a:schemeClr val="tx1"/>
+                </a:solidFill>
+              </a:rPr>
               <a:t>0.35</a:t>
             </a:r>
+            <a:endParaRPr lang="en-GB" sz="1400" dirty="0">
+              <a:solidFill>
+                <a:schemeClr val="tx1"/>
+              </a:solidFill>
+            </a:endParaRPr>
+          </a:p>
+        </p:txBody>
+      </p:sp>
+      <p:sp>
+        <p:nvSpPr>
+          <p:cNvPr id="21" name="TextBox 20">
+            <a:extLst>
+              <a:ext uri="{FF2B5EF4-FFF2-40B4-BE49-F238E27FC236}">
+                <a16:creationId xmlns:a16="http://schemas.microsoft.com/office/drawing/2014/main" id="{CC4602DE-0E1E-3021-07B4-C47B7275E433}"/>
+              </a:ext>
+            </a:extLst>
+          </p:cNvPr>
+          <p:cNvSpPr txBox="1"/>
+          <p:nvPr/>
+        </p:nvSpPr>
+        <p:spPr>
+          <a:xfrm>
+            <a:off x="5179056" y="4541075"/>
+            <a:ext cx="2661754" cy="646331"/>
+          </a:xfrm>
+          <a:prstGeom prst="rect">
+            <a:avLst/>
+          </a:prstGeom>
+          <a:noFill/>
+        </p:spPr>
+        <p:txBody>
+          <a:bodyPr wrap="none" rtlCol="0">
+            <a:spAutoFit/>
+          </a:bodyPr>
+          <a:lstStyle/>
+          <a:p>
+            <a:r>
+              <a:rPr lang="es-ES">
+                <a:solidFill>
+                  <a:schemeClr val="bg1"/>
+                </a:solidFill>
+              </a:rPr>
+              <a:t>Índice </a:t>
+            </a:r>
+            <a:r>
+              <a:rPr lang="es-ES" dirty="0">
+                <a:solidFill>
+                  <a:schemeClr val="bg1"/>
+                </a:solidFill>
+              </a:rPr>
+              <a:t>eficiencia relativa</a:t>
+            </a:r>
+          </a:p>
+          <a:p>
+            <a:r>
+              <a:rPr lang="es-ES" dirty="0">
+                <a:solidFill>
+                  <a:schemeClr val="bg1"/>
+                </a:solidFill>
+              </a:rPr>
+              <a:t>Por carga laboral</a:t>
+            </a:r>
+            <a:endParaRPr lang="en-GB" dirty="0">
+              <a:solidFill>
+                <a:schemeClr val="bg1"/>
+              </a:solidFill>
+            </a:endParaRPr>
+          </a:p>
+        </p:txBody>
+      </p:sp>
+      <p:sp>
+        <p:nvSpPr>
+          <p:cNvPr id="22" name="TextBox 21">
+            <a:extLst>
+              <a:ext uri="{FF2B5EF4-FFF2-40B4-BE49-F238E27FC236}">
+                <a16:creationId xmlns:a16="http://schemas.microsoft.com/office/drawing/2014/main" id="{B3F45087-837F-E003-D689-94804A3CF084}"/>
+              </a:ext>
+            </a:extLst>
+          </p:cNvPr>
+          <p:cNvSpPr txBox="1"/>
+          <p:nvPr/>
+        </p:nvSpPr>
+        <p:spPr>
+          <a:xfrm>
+            <a:off x="3326917" y="2529840"/>
+            <a:ext cx="769763" cy="307777"/>
+          </a:xfrm>
+          <a:prstGeom prst="rect">
+            <a:avLst/>
+          </a:prstGeom>
+          <a:noFill/>
+        </p:spPr>
+        <p:txBody>
+          <a:bodyPr wrap="none" rtlCol="0">
+            <a:spAutoFit/>
+          </a:bodyPr>
+          <a:lstStyle/>
+          <a:p>
+            <a:r>
+              <a:rPr lang="es-ES" sz="1400" dirty="0"/>
+              <a:t>91.67%</a:t>
+            </a:r>
+            <a:endParaRPr lang="en-GB" sz="1400" dirty="0"/>
           </a:p>
         </p:txBody>
       </p:sp>
     </p:spTree>
     <p:extLst>
       <p:ext uri="{BB962C8B-B14F-4D97-AF65-F5344CB8AC3E}">
-        <p14:creationId xmlns:p14="http://schemas.microsoft.com/office/powerpoint/2010/main" val="3106472472"/>
+        <p14:creationId xmlns:p14="http://schemas.microsoft.com/office/powerpoint/2010/main" val="4008532121"/>
       </p:ext>
     </p:extLst>
   </p:cSld>
@@ -10374,7 +10201,7 @@
           <a:lstStyle/>
           <a:p>
             <a:r>
-              <a:rPr lang="es-ES_tradnl" noProof="1"/>
+              <a:rPr lang="en-US" dirty="0"/>
               <a:t>Agenda </a:t>
             </a:r>
           </a:p>
@@ -10408,35 +10235,112 @@
           </a:bodyPr>
           <a:lstStyle/>
           <a:p>
-            <a:endParaRPr lang="es-ES_tradnl" noProof="1"/>
-          </a:p>
-          <a:p>
-            <a:r>
-              <a:rPr lang="es-ES_tradnl" noProof="1"/>
-              <a:t>Perfil sociodemográfico</a:t>
-            </a:r>
-          </a:p>
-          <a:p>
-            <a:r>
-              <a:rPr lang="es-ES_tradnl" noProof="1"/>
-              <a:t>Estrategias de Compromiso y Desarrollo</a:t>
-            </a:r>
-          </a:p>
-          <a:p>
-            <a:r>
-              <a:rPr lang="es-ES_tradnl" noProof="1"/>
-              <a:t>Análisis de Ausentismo: Magnitud y variación temporal</a:t>
-            </a:r>
-          </a:p>
-          <a:p>
-            <a:r>
-              <a:rPr lang="es-ES_tradnl" noProof="1"/>
-              <a:t>Estrategias para reducir el Ausentismo </a:t>
-            </a:r>
-          </a:p>
-          <a:p>
-            <a:r>
-              <a:rPr lang="es-ES_tradnl" noProof="1"/>
+            <a:endParaRPr lang="en-US" dirty="0"/>
+          </a:p>
+          <a:p>
+            <a:r>
+              <a:rPr lang="en-US" dirty="0" err="1"/>
+              <a:t>Perfil</a:t>
+            </a:r>
+            <a:r>
+              <a:rPr lang="en-US" dirty="0"/>
+              <a:t> </a:t>
+            </a:r>
+            <a:r>
+              <a:rPr lang="en-US" dirty="0" err="1"/>
+              <a:t>sociodemográfico</a:t>
+            </a:r>
+            <a:endParaRPr lang="en-US" dirty="0"/>
+          </a:p>
+          <a:p>
+            <a:r>
+              <a:rPr lang="en-US" dirty="0" err="1"/>
+              <a:t>Estrategias</a:t>
+            </a:r>
+            <a:r>
+              <a:rPr lang="en-US" dirty="0"/>
+              <a:t> de </a:t>
+            </a:r>
+            <a:r>
+              <a:rPr lang="en-US" dirty="0" err="1"/>
+              <a:t>Compromiso</a:t>
+            </a:r>
+            <a:r>
+              <a:rPr lang="en-US" dirty="0"/>
+              <a:t> y Desarrollo</a:t>
+            </a:r>
+          </a:p>
+          <a:p>
+            <a:r>
+              <a:rPr lang="en-US" dirty="0" err="1"/>
+              <a:t>Análisis</a:t>
+            </a:r>
+            <a:r>
+              <a:rPr lang="en-US" dirty="0"/>
+              <a:t> de </a:t>
+            </a:r>
+            <a:r>
+              <a:rPr lang="en-US" dirty="0" err="1"/>
+              <a:t>Ausentismo</a:t>
+            </a:r>
+            <a:r>
+              <a:rPr lang="en-US" dirty="0"/>
+              <a:t>: </a:t>
+            </a:r>
+            <a:r>
+              <a:rPr lang="en-US" dirty="0" err="1"/>
+              <a:t>Magnitud</a:t>
+            </a:r>
+            <a:r>
+              <a:rPr lang="en-US" dirty="0"/>
+              <a:t> y </a:t>
+            </a:r>
+            <a:r>
+              <a:rPr lang="en-US" dirty="0" err="1"/>
+              <a:t>variación</a:t>
+            </a:r>
+            <a:r>
+              <a:rPr lang="en-US" dirty="0"/>
+              <a:t> temporal</a:t>
+            </a:r>
+          </a:p>
+          <a:p>
+            <a:r>
+              <a:rPr lang="en-US" dirty="0" err="1"/>
+              <a:t>Estrategias</a:t>
+            </a:r>
+            <a:r>
+              <a:rPr lang="en-US" dirty="0"/>
+              <a:t> para </a:t>
+            </a:r>
+            <a:r>
+              <a:rPr lang="en-US" dirty="0" err="1"/>
+              <a:t>reducir</a:t>
+            </a:r>
+            <a:r>
+              <a:rPr lang="en-US" dirty="0"/>
+              <a:t> </a:t>
+            </a:r>
+            <a:r>
+              <a:rPr lang="en-US" dirty="0" err="1"/>
+              <a:t>el</a:t>
+            </a:r>
+            <a:r>
+              <a:rPr lang="en-US" dirty="0"/>
+              <a:t> </a:t>
+            </a:r>
+            <a:r>
+              <a:rPr lang="en-US" dirty="0" err="1"/>
+              <a:t>Ausentismo</a:t>
+            </a:r>
+            <a:r>
+              <a:rPr lang="en-US" dirty="0"/>
+              <a:t> </a:t>
+            </a:r>
+          </a:p>
+          <a:p>
+            <a:r>
+              <a:rPr lang="en-US" dirty="0"/>
               <a:t>KPIs</a:t>
             </a:r>
           </a:p>
@@ -10464,11 +10368,11 @@
           <a:lstStyle/>
           <a:p>
             <a:fld id="{47FEACEE-25B4-4A2D-B147-27296E36371D}" type="slidenum">
-              <a:rPr lang="es-ES_tradnl" noProof="1" smtClean="0"/>
+              <a:rPr lang="en-US" altLang="zh-CN" noProof="0" smtClean="0"/>
               <a:pPr/>
               <a:t>2</a:t>
             </a:fld>
-            <a:endParaRPr lang="es-ES_tradnl" noProof="1"/>
+            <a:endParaRPr lang="en-US" altLang="zh-CN" noProof="0" dirty="0"/>
           </a:p>
         </p:txBody>
       </p:sp>
@@ -10537,21 +10441,37 @@
           <a:lstStyle/>
           <a:p>
             <a:r>
-              <a:rPr lang="es-ES_tradnl" noProof="1">
+              <a:rPr lang="en-US" dirty="0" err="1">
                 <a:solidFill>
                   <a:schemeClr val="bg1"/>
                 </a:solidFill>
               </a:rPr>
-              <a:t>Perfil sociodemográfico</a:t>
+              <a:t>Perfil</a:t>
+            </a:r>
+            <a:r>
+              <a:rPr lang="en-US" dirty="0">
+                <a:solidFill>
+                  <a:schemeClr val="bg1"/>
+                </a:solidFill>
+              </a:rPr>
+              <a:t> </a:t>
+            </a:r>
+            <a:r>
+              <a:rPr lang="en-US" dirty="0" err="1">
+                <a:solidFill>
+                  <a:schemeClr val="bg1"/>
+                </a:solidFill>
+              </a:rPr>
+              <a:t>sociodemográfico</a:t>
             </a:r>
             <a:br>
-              <a:rPr lang="es-ES_tradnl" noProof="1">
+              <a:rPr lang="en-US" dirty="0">
                 <a:solidFill>
                   <a:schemeClr val="bg1"/>
                 </a:solidFill>
               </a:rPr>
             </a:br>
-            <a:endParaRPr lang="es-ES_tradnl" noProof="1">
+            <a:endParaRPr lang="en-US" dirty="0">
               <a:solidFill>
                 <a:schemeClr val="bg1"/>
               </a:solidFill>
@@ -10585,7 +10505,7 @@
           <a:bodyPr/>
           <a:lstStyle/>
           <a:p>
-            <a:endParaRPr lang="es-ES_tradnl" noProof="1"/>
+            <a:endParaRPr lang="en-US" dirty="0"/>
           </a:p>
         </p:txBody>
       </p:sp>
@@ -10758,7 +10678,7 @@
               <a:defRPr/>
             </a:pPr>
             <a:fld id="{47FEACEE-25B4-4A2D-B147-27296E36371D}" type="slidenum">
-              <a:rPr kumimoji="0" lang="es-ES_tradnl" sz="1200" u="none" strike="noStrike" kern="1200" cap="none" spc="0" normalizeH="0" baseline="0" noProof="1" smtClean="0">
+              <a:rPr kumimoji="0" lang="en-US" altLang="zh-CN" sz="1200" u="none" strike="noStrike" kern="1200" cap="none" spc="0" normalizeH="0" baseline="0" smtClean="0">
                 <a:ln>
                   <a:noFill/>
                 </a:ln>
@@ -10788,7 +10708,7 @@
               </a:pPr>
               <a:t>4</a:t>
             </a:fld>
-            <a:endParaRPr kumimoji="0" lang="es-ES_tradnl" sz="1200" u="none" strike="noStrike" kern="1200" cap="none" spc="0" normalizeH="0" baseline="0" noProof="1">
+            <a:endParaRPr kumimoji="0" lang="en-US" altLang="zh-CN" sz="1200" u="none" strike="noStrike" kern="1200" cap="none" spc="0" normalizeH="0" baseline="0" dirty="0">
               <a:ln>
                 <a:noFill/>
               </a:ln>
@@ -10824,11 +10744,11 @@
           <a:lstStyle/>
           <a:p>
             <a:fld id="{47FEACEE-25B4-4A2D-B147-27296E36371D}" type="slidenum">
-              <a:rPr lang="es-ES_tradnl" noProof="1" smtClean="0"/>
+              <a:rPr lang="en-US" altLang="zh-CN" noProof="0" smtClean="0"/>
               <a:pPr/>
               <a:t>4</a:t>
             </a:fld>
-            <a:endParaRPr lang="es-ES_tradnl" noProof="1"/>
+            <a:endParaRPr lang="en-US" altLang="zh-CN" noProof="0" dirty="0"/>
           </a:p>
         </p:txBody>
       </p:sp>
@@ -10861,9 +10781,10 @@
           <a:lstStyle/>
           <a:p>
             <a:r>
-              <a:rPr lang="es-ES_tradnl" sz="4000" noProof="1"/>
+              <a:rPr lang="es-ES" sz="4000" dirty="0"/>
               <a:t>Perfil sociodemográfico</a:t>
             </a:r>
+            <a:endParaRPr lang="en-GB" sz="4000" dirty="0"/>
           </a:p>
         </p:txBody>
       </p:sp>
@@ -10931,11 +10852,11 @@
           <a:lstStyle/>
           <a:p>
             <a:r>
-              <a:rPr lang="es-ES_tradnl" b="1" noProof="1"/>
+              <a:rPr lang="es-ES" b="1" dirty="0"/>
               <a:t>Educación: </a:t>
             </a:r>
             <a:r>
-              <a:rPr lang="es-ES_tradnl" noProof="1"/>
+              <a:rPr lang="es-ES" dirty="0"/>
               <a:t>77.8% No universitarios</a:t>
             </a:r>
           </a:p>
@@ -10970,24 +10891,24 @@
           <a:lstStyle/>
           <a:p>
             <a:r>
-              <a:rPr lang="es-ES_tradnl" b="1" noProof="1"/>
+              <a:rPr lang="es-ES" b="1" dirty="0"/>
               <a:t>Edad media: </a:t>
             </a:r>
             <a:r>
-              <a:rPr lang="es-ES_tradnl" noProof="1"/>
+              <a:rPr lang="es-ES" dirty="0"/>
               <a:t>38 años</a:t>
             </a:r>
           </a:p>
           <a:p>
-            <a:endParaRPr lang="es-ES_tradnl" b="1" noProof="1"/>
-          </a:p>
-          <a:p>
-            <a:r>
-              <a:rPr lang="es-ES_tradnl" b="1" noProof="1"/>
+            <a:endParaRPr lang="es-ES" b="1" dirty="0"/>
+          </a:p>
+          <a:p>
+            <a:r>
+              <a:rPr lang="es-ES" b="1" dirty="0"/>
               <a:t>Intervalo: </a:t>
             </a:r>
             <a:r>
-              <a:rPr lang="es-ES_tradnl" noProof="1"/>
+              <a:rPr lang="es-ES" dirty="0"/>
               <a:t>27-58 años</a:t>
             </a:r>
           </a:p>
@@ -11022,10 +10943,14 @@
           <a:lstStyle/>
           <a:p>
             <a:r>
-              <a:rPr lang="es-ES_tradnl" b="1" noProof="1"/>
-              <a:t>Num. Hijos: entre 0-4</a:t>
-            </a:r>
-            <a:endParaRPr lang="es-ES_tradnl" noProof="1"/>
+              <a:rPr lang="es-ES" b="1" dirty="0" err="1"/>
+              <a:t>Num</a:t>
+            </a:r>
+            <a:r>
+              <a:rPr lang="es-ES" b="1" dirty="0"/>
+              <a:t>. Hijos: entre 0-4</a:t>
+            </a:r>
+            <a:endParaRPr lang="es-ES" dirty="0"/>
           </a:p>
         </p:txBody>
       </p:sp>
@@ -11100,17 +11025,41 @@
           <a:lstStyle/>
           <a:p>
             <a:r>
-              <a:rPr lang="es-ES_tradnl" noProof="1">
+              <a:rPr lang="en-US" dirty="0" err="1">
                 <a:solidFill>
                   <a:schemeClr val="bg1"/>
                 </a:solidFill>
               </a:rPr>
-              <a:t>Estrategias de Compromiso y Desarrollo</a:t>
+              <a:t>Estrategias</a:t>
+            </a:r>
+            <a:r>
+              <a:rPr lang="en-US" dirty="0">
+                <a:solidFill>
+                  <a:schemeClr val="bg1"/>
+                </a:solidFill>
+              </a:rPr>
+              <a:t> de </a:t>
+            </a:r>
+            <a:r>
+              <a:rPr lang="en-US" dirty="0" err="1">
+                <a:solidFill>
+                  <a:schemeClr val="bg1"/>
+                </a:solidFill>
+              </a:rPr>
+              <a:t>Compromiso</a:t>
+            </a:r>
+            <a:r>
+              <a:rPr lang="en-US" dirty="0">
+                <a:solidFill>
+                  <a:schemeClr val="bg1"/>
+                </a:solidFill>
+              </a:rPr>
+              <a:t> y Desarrollo</a:t>
             </a:r>
             <a:br>
-              <a:rPr lang="es-ES_tradnl" noProof="1"/>
+              <a:rPr lang="en-US" dirty="0"/>
             </a:br>
-            <a:endParaRPr lang="es-ES_tradnl" noProof="1">
+            <a:endParaRPr lang="en-US" dirty="0">
               <a:solidFill>
                 <a:schemeClr val="bg1"/>
               </a:solidFill>
@@ -11144,7 +11093,7 @@
           <a:bodyPr/>
           <a:lstStyle/>
           <a:p>
-            <a:endParaRPr lang="es-ES_tradnl" noProof="1"/>
+            <a:endParaRPr lang="en-US" dirty="0"/>
           </a:p>
         </p:txBody>
       </p:sp>
@@ -11202,7 +11151,7 @@
         </p:nvSpPr>
         <p:spPr>
           <a:xfrm>
-            <a:off x="914399" y="731520"/>
+            <a:off x="284812" y="136525"/>
             <a:ext cx="8867553" cy="788936"/>
           </a:xfrm>
         </p:spPr>
@@ -11211,8 +11160,20 @@
           <a:lstStyle/>
           <a:p>
             <a:r>
-              <a:rPr lang="es-ES_tradnl" noProof="1"/>
-              <a:t>Estrategias de Compromiso y Desarrollo</a:t>
+              <a:rPr lang="en-US" dirty="0" err="1"/>
+              <a:t>Estrategias</a:t>
+            </a:r>
+            <a:r>
+              <a:rPr lang="en-US" dirty="0"/>
+              <a:t> de </a:t>
+            </a:r>
+            <a:r>
+              <a:rPr lang="en-US" dirty="0" err="1"/>
+              <a:t>Compromiso</a:t>
+            </a:r>
+            <a:r>
+              <a:rPr lang="en-US" dirty="0"/>
+              <a:t> y Desarrollo</a:t>
             </a:r>
           </a:p>
         </p:txBody>
@@ -11356,7 +11317,7 @@
               <a:defRPr/>
             </a:pPr>
             <a:fld id="{47FEACEE-25B4-4A2D-B147-27296E36371D}" type="slidenum">
-              <a:rPr kumimoji="0" lang="es-ES_tradnl" sz="1200" u="none" strike="noStrike" kern="1200" cap="none" spc="0" normalizeH="0" baseline="0" noProof="1" smtClean="0">
+              <a:rPr kumimoji="0" lang="en-US" altLang="zh-CN" sz="1200" u="none" strike="noStrike" kern="1200" cap="none" spc="0" normalizeH="0" baseline="0" smtClean="0">
                 <a:ln>
                   <a:noFill/>
                 </a:ln>
@@ -11386,7 +11347,7 @@
               </a:pPr>
               <a:t>6</a:t>
             </a:fld>
-            <a:endParaRPr kumimoji="0" lang="es-ES_tradnl" sz="1200" u="none" strike="noStrike" kern="1200" cap="none" spc="0" normalizeH="0" baseline="0" noProof="1">
+            <a:endParaRPr kumimoji="0" lang="en-US" altLang="zh-CN" sz="1200" u="none" strike="noStrike" kern="1200" cap="none" spc="0" normalizeH="0" baseline="0" dirty="0">
               <a:ln>
                 <a:noFill/>
               </a:ln>
@@ -11422,11 +11383,11 @@
           <a:lstStyle/>
           <a:p>
             <a:fld id="{47FEACEE-25B4-4A2D-B147-27296E36371D}" type="slidenum">
-              <a:rPr lang="es-ES_tradnl" noProof="1" smtClean="0"/>
+              <a:rPr lang="en-US" altLang="zh-CN" noProof="0" smtClean="0"/>
               <a:pPr/>
               <a:t>6</a:t>
             </a:fld>
-            <a:endParaRPr lang="es-ES_tradnl" noProof="1"/>
+            <a:endParaRPr lang="en-US" altLang="zh-CN" noProof="0" dirty="0"/>
           </a:p>
         </p:txBody>
       </p:sp>
@@ -11446,59 +11407,183 @@
             <p:ph idx="30"/>
           </p:nvPr>
         </p:nvSpPr>
-        <p:spPr/>
+        <p:spPr>
+          <a:xfrm>
+            <a:off x="1319134" y="1741932"/>
+            <a:ext cx="8348472" cy="3374136"/>
+          </a:xfrm>
+        </p:spPr>
         <p:txBody>
           <a:bodyPr/>
           <a:lstStyle/>
           <a:p>
             <a:r>
-              <a:rPr lang="es-ES_tradnl" b="1" noProof="1">
+              <a:rPr lang="es-ES" b="1" dirty="0">
                 <a:effectLst/>
                 <a:latin typeface="Consolas" panose="020B0609020204030204" pitchFamily="49" charset="0"/>
               </a:rPr>
-              <a:t>Planes de micro-formación y Upskilling</a:t>
-            </a:r>
+              <a:t>Planes de </a:t>
+            </a:r>
+            <a:r>
+              <a:rPr lang="es-ES" b="1" dirty="0" err="1">
+                <a:effectLst/>
+                <a:latin typeface="Consolas" panose="020B0609020204030204" pitchFamily="49" charset="0"/>
+              </a:rPr>
+              <a:t>micro-formación</a:t>
+            </a:r>
+            <a:r>
+              <a:rPr lang="es-ES" b="1" dirty="0">
+                <a:effectLst/>
+                <a:latin typeface="Consolas" panose="020B0609020204030204" pitchFamily="49" charset="0"/>
+              </a:rPr>
+              <a:t> y </a:t>
+            </a:r>
+            <a:r>
+              <a:rPr lang="es-ES" b="1" dirty="0" err="1">
+                <a:effectLst/>
+                <a:latin typeface="Consolas" panose="020B0609020204030204" pitchFamily="49" charset="0"/>
+              </a:rPr>
+              <a:t>Upskilling</a:t>
+            </a:r>
+            <a:endParaRPr lang="es-ES" b="1" dirty="0">
+              <a:effectLst/>
+              <a:latin typeface="Consolas" panose="020B0609020204030204" pitchFamily="49" charset="0"/>
+            </a:endParaRPr>
           </a:p>
           <a:p>
             <a:pPr lvl="1"/>
             <a:r>
-              <a:rPr lang="es-ES_tradnl" b="1" noProof="1">
+              <a:rPr lang="es-ES" b="1" dirty="0">
                 <a:latin typeface="Consolas" panose="020B0609020204030204" pitchFamily="49" charset="0"/>
               </a:rPr>
               <a:t>Certificaciones técnicas y otros Desarrollos Profesionales</a:t>
             </a:r>
-            <a:endParaRPr lang="es-ES_tradnl" b="1" noProof="1">
+            <a:endParaRPr lang="es-ES" b="1" dirty="0">
               <a:effectLst/>
               <a:latin typeface="Consolas" panose="020B0609020204030204" pitchFamily="49" charset="0"/>
             </a:endParaRPr>
           </a:p>
           <a:p>
-            <a:endParaRPr lang="es-ES_tradnl" b="1" noProof="1">
+            <a:endParaRPr lang="es-ES" b="1" dirty="0">
               <a:latin typeface="Consolas" panose="020B0609020204030204" pitchFamily="49" charset="0"/>
             </a:endParaRPr>
           </a:p>
           <a:p>
-            <a:endParaRPr lang="es-ES_tradnl" b="0" noProof="1">
+            <a:endParaRPr lang="es-ES" b="0" dirty="0">
               <a:effectLst/>
               <a:latin typeface="Consolas" panose="020B0609020204030204" pitchFamily="49" charset="0"/>
             </a:endParaRPr>
           </a:p>
           <a:p>
             <a:r>
-              <a:rPr lang="es-ES_tradnl" b="1" noProof="1">
+              <a:rPr lang="en-GB" b="1" dirty="0" err="1">
                 <a:latin typeface="Consolas" panose="020B0609020204030204" pitchFamily="49" charset="0"/>
               </a:rPr>
-              <a:t>Políticas de conciliación</a:t>
-            </a:r>
-          </a:p>
-          <a:p>
-            <a:pPr lvl="1"/>
-            <a:r>
-              <a:rPr lang="es-ES_tradnl" b="1" noProof="1">
+              <a:t>Políticas</a:t>
+            </a:r>
+            <a:r>
+              <a:rPr lang="en-GB" b="1" dirty="0">
                 <a:latin typeface="Consolas" panose="020B0609020204030204" pitchFamily="49" charset="0"/>
               </a:rPr>
-              <a:t>Flexibilidad horaria (bolsas de horas)</a:t>
-            </a:r>
+              <a:t> de </a:t>
+            </a:r>
+            <a:r>
+              <a:rPr lang="en-GB" b="1" dirty="0" err="1">
+                <a:latin typeface="Consolas" panose="020B0609020204030204" pitchFamily="49" charset="0"/>
+              </a:rPr>
+              <a:t>conciliación</a:t>
+            </a:r>
+            <a:endParaRPr lang="en-GB" b="1" dirty="0">
+              <a:latin typeface="Consolas" panose="020B0609020204030204" pitchFamily="49" charset="0"/>
+            </a:endParaRPr>
+          </a:p>
+          <a:p>
+            <a:pPr lvl="1"/>
+            <a:r>
+              <a:rPr lang="en-GB" b="1" dirty="0" err="1">
+                <a:latin typeface="Consolas" panose="020B0609020204030204" pitchFamily="49" charset="0"/>
+              </a:rPr>
+              <a:t>Flexibilidad</a:t>
+            </a:r>
+            <a:r>
+              <a:rPr lang="en-GB" b="1" dirty="0">
+                <a:latin typeface="Consolas" panose="020B0609020204030204" pitchFamily="49" charset="0"/>
+              </a:rPr>
+              <a:t> </a:t>
+            </a:r>
+            <a:r>
+              <a:rPr lang="en-GB" b="1" dirty="0" err="1">
+                <a:latin typeface="Consolas" panose="020B0609020204030204" pitchFamily="49" charset="0"/>
+              </a:rPr>
+              <a:t>horaria</a:t>
+            </a:r>
+            <a:r>
+              <a:rPr lang="en-GB" b="1" dirty="0">
+                <a:latin typeface="Consolas" panose="020B0609020204030204" pitchFamily="49" charset="0"/>
+              </a:rPr>
+              <a:t> (</a:t>
+            </a:r>
+            <a:r>
+              <a:rPr lang="en-GB" b="1" dirty="0" err="1">
+                <a:latin typeface="Consolas" panose="020B0609020204030204" pitchFamily="49" charset="0"/>
+              </a:rPr>
+              <a:t>bolsas</a:t>
+            </a:r>
+            <a:r>
+              <a:rPr lang="en-GB" b="1" dirty="0">
+                <a:latin typeface="Consolas" panose="020B0609020204030204" pitchFamily="49" charset="0"/>
+              </a:rPr>
+              <a:t> de horas)</a:t>
+            </a:r>
+          </a:p>
+        </p:txBody>
+      </p:sp>
+      <p:sp>
+        <p:nvSpPr>
+          <p:cNvPr id="4" name="Rectangle 3">
+            <a:extLst>
+              <a:ext uri="{FF2B5EF4-FFF2-40B4-BE49-F238E27FC236}">
+                <a16:creationId xmlns:a16="http://schemas.microsoft.com/office/drawing/2014/main" id="{B41D39ED-D8F2-F7BE-3F70-E09BC6D6E3C4}"/>
+              </a:ext>
+            </a:extLst>
+          </p:cNvPr>
+          <p:cNvSpPr/>
+          <p:nvPr/>
+        </p:nvSpPr>
+        <p:spPr>
+          <a:xfrm>
+            <a:off x="69121" y="825263"/>
+            <a:ext cx="10598046" cy="45719"/>
+          </a:xfrm>
+          <a:prstGeom prst="rect">
+            <a:avLst/>
+          </a:prstGeom>
+          <a:ln>
+            <a:noFill/>
+          </a:ln>
+        </p:spPr>
+        <p:style>
+          <a:lnRef idx="2">
+            <a:schemeClr val="accent1">
+              <a:shade val="15000"/>
+            </a:schemeClr>
+          </a:lnRef>
+          <a:fillRef idx="1">
+            <a:schemeClr val="accent1"/>
+          </a:fillRef>
+          <a:effectRef idx="0">
+            <a:schemeClr val="accent1"/>
+          </a:effectRef>
+          <a:fontRef idx="minor">
+            <a:schemeClr val="lt1"/>
+          </a:fontRef>
+        </p:style>
+        <p:txBody>
+          <a:bodyPr rtlCol="0" anchor="ctr"/>
+          <a:lstStyle/>
+          <a:p>
+            <a:pPr algn="ctr"/>
+            <a:endParaRPr lang="en-GB"/>
           </a:p>
         </p:txBody>
       </p:sp>
@@ -11573,13 +11658,34 @@
           <a:lstStyle/>
           <a:p>
             <a:r>
-              <a:rPr lang="es-ES_tradnl" noProof="1">
+              <a:rPr lang="en-US" dirty="0" err="1">
                 <a:solidFill>
                   <a:schemeClr val="bg1"/>
                 </a:solidFill>
               </a:rPr>
-              <a:t>Analisis Ausentismo</a:t>
-            </a:r>
+              <a:t>Análisis</a:t>
+            </a:r>
+            <a:r>
+              <a:rPr lang="en-US" dirty="0">
+                <a:solidFill>
+                  <a:schemeClr val="bg1"/>
+                </a:solidFill>
+              </a:rPr>
+              <a:t> </a:t>
+            </a:r>
+            <a:r>
+              <a:rPr lang="en-US" dirty="0" err="1">
+                <a:solidFill>
+                  <a:schemeClr val="bg1"/>
+                </a:solidFill>
+              </a:rPr>
+              <a:t>Ausentismo</a:t>
+            </a:r>
+            <a:endParaRPr lang="en-US" dirty="0">
+              <a:solidFill>
+                <a:schemeClr val="bg1"/>
+              </a:solidFill>
+            </a:endParaRPr>
           </a:p>
         </p:txBody>
       </p:sp>
@@ -11610,8 +11716,20 @@
           <a:lstStyle/>
           <a:p>
             <a:r>
-              <a:rPr lang="es-ES_tradnl" noProof="1"/>
-              <a:t>Magnitud y análisis temporal</a:t>
+              <a:rPr lang="en-US" dirty="0" err="1"/>
+              <a:t>Magnitud</a:t>
+            </a:r>
+            <a:r>
+              <a:rPr lang="en-US" dirty="0"/>
+              <a:t> y </a:t>
+            </a:r>
+            <a:r>
+              <a:rPr lang="en-US" dirty="0" err="1"/>
+              <a:t>análisis</a:t>
+            </a:r>
+            <a:r>
+              <a:rPr lang="en-US" dirty="0"/>
+              <a:t> temporal</a:t>
             </a:r>
           </a:p>
         </p:txBody>
@@ -11637,7 +11755,7 @@
         <p:cNvPr id="1" name="">
           <a:extLst>
             <a:ext uri="{FF2B5EF4-FFF2-40B4-BE49-F238E27FC236}">
-              <a16:creationId xmlns:a16="http://schemas.microsoft.com/office/drawing/2014/main" id="{A3C58946-A531-561B-3AA3-35914E7CCB16}"/>
+              <a16:creationId xmlns:a16="http://schemas.microsoft.com/office/drawing/2014/main" id="{F3F98254-9054-B295-350B-8FC820E528AA}"/>
             </a:ext>
           </a:extLst>
         </p:cNvPr>
@@ -11657,7 +11775,7 @@
           <p:cNvPr id="3" name="Title 2">
             <a:extLst>
               <a:ext uri="{FF2B5EF4-FFF2-40B4-BE49-F238E27FC236}">
-                <a16:creationId xmlns:a16="http://schemas.microsoft.com/office/drawing/2014/main" id="{C15BCD14-0CCC-526E-9180-8F037954D3AD}"/>
+                <a16:creationId xmlns:a16="http://schemas.microsoft.com/office/drawing/2014/main" id="{218F5123-76B7-4371-D7F2-02854D5A7DE3}"/>
               </a:ext>
             </a:extLst>
           </p:cNvPr>
@@ -11670,7 +11788,7 @@
         </p:nvSpPr>
         <p:spPr>
           <a:xfrm>
-            <a:off x="914399" y="731520"/>
+            <a:off x="311461" y="136525"/>
             <a:ext cx="8867553" cy="788936"/>
           </a:xfrm>
         </p:spPr>
@@ -11679,8 +11797,8 @@
           <a:lstStyle/>
           <a:p>
             <a:r>
-              <a:rPr lang="es-ES_tradnl" noProof="1"/>
-              <a:t>Analisis de la Magnitud del Ausentismo</a:t>
+              <a:rPr lang="es-ES" dirty="0"/>
+              <a:t>Análisis de la Magnitud del Ausentismo</a:t>
             </a:r>
           </a:p>
         </p:txBody>
@@ -11690,7 +11808,7 @@
           <p:cNvPr id="6" name="Slide Number Placeholder 13">
             <a:extLst>
               <a:ext uri="{FF2B5EF4-FFF2-40B4-BE49-F238E27FC236}">
-                <a16:creationId xmlns:a16="http://schemas.microsoft.com/office/drawing/2014/main" id="{2161D003-994C-C1AF-75C5-78249C16A41F}"/>
+                <a16:creationId xmlns:a16="http://schemas.microsoft.com/office/drawing/2014/main" id="{B033C14B-7076-C6A5-66B7-B5C9F03928E3}"/>
               </a:ext>
             </a:extLst>
           </p:cNvPr>
@@ -11824,7 +11942,7 @@
               <a:defRPr/>
             </a:pPr>
             <a:fld id="{47FEACEE-25B4-4A2D-B147-27296E36371D}" type="slidenum">
-              <a:rPr kumimoji="0" lang="es-ES_tradnl" sz="1200" u="none" strike="noStrike" kern="1200" cap="none" spc="0" normalizeH="0" baseline="0" noProof="1" smtClean="0">
+              <a:rPr kumimoji="0" lang="en-US" altLang="zh-CN" sz="1200" u="none" strike="noStrike" kern="1200" cap="none" spc="0" normalizeH="0" baseline="0" smtClean="0">
                 <a:ln>
                   <a:noFill/>
                 </a:ln>
@@ -11854,7 +11972,7 @@
               </a:pPr>
               <a:t>8</a:t>
             </a:fld>
-            <a:endParaRPr kumimoji="0" lang="es-ES_tradnl" sz="1200" u="none" strike="noStrike" kern="1200" cap="none" spc="0" normalizeH="0" baseline="0" noProof="1">
+            <a:endParaRPr kumimoji="0" lang="en-US" altLang="zh-CN" sz="1200" u="none" strike="noStrike" kern="1200" cap="none" spc="0" normalizeH="0" baseline="0" dirty="0">
               <a:ln>
                 <a:noFill/>
               </a:ln>
@@ -11873,7 +11991,7 @@
           <p:cNvPr id="2" name="Slide Number Placeholder 1">
             <a:extLst>
               <a:ext uri="{FF2B5EF4-FFF2-40B4-BE49-F238E27FC236}">
-                <a16:creationId xmlns:a16="http://schemas.microsoft.com/office/drawing/2014/main" id="{CFC1DB30-6C5F-A09A-EF49-666C8F08A983}"/>
+                <a16:creationId xmlns:a16="http://schemas.microsoft.com/office/drawing/2014/main" id="{F645CDC8-71B9-2703-34BB-4AB57F9FB1A8}"/>
               </a:ext>
             </a:extLst>
           </p:cNvPr>
@@ -11890,29 +12008,595 @@
           <a:lstStyle/>
           <a:p>
             <a:fld id="{47FEACEE-25B4-4A2D-B147-27296E36371D}" type="slidenum">
-              <a:rPr lang="es-ES_tradnl" noProof="1" smtClean="0"/>
+              <a:rPr lang="en-US" altLang="zh-CN" noProof="0" smtClean="0"/>
               <a:pPr/>
               <a:t>8</a:t>
             </a:fld>
-            <a:endParaRPr lang="es-ES_tradnl" noProof="1"/>
+            <a:endParaRPr lang="en-US" altLang="zh-CN" noProof="0" dirty="0"/>
+          </a:p>
+        </p:txBody>
+      </p:sp>
+      <p:graphicFrame>
+        <p:nvGraphicFramePr>
+          <p:cNvPr id="10" name="Table 9">
+            <a:extLst>
+              <a:ext uri="{FF2B5EF4-FFF2-40B4-BE49-F238E27FC236}">
+                <a16:creationId xmlns:a16="http://schemas.microsoft.com/office/drawing/2014/main" id="{5549BF28-A7A5-78F7-5764-48177124F02C}"/>
+              </a:ext>
+            </a:extLst>
+          </p:cNvPr>
+          <p:cNvGraphicFramePr>
+            <a:graphicFrameLocks noGrp="1"/>
+          </p:cNvGraphicFramePr>
+          <p:nvPr>
+            <p:extLst>
+              <p:ext uri="{D42A27DB-BD31-4B8C-83A1-F6EECF244321}">
+                <p14:modId xmlns:p14="http://schemas.microsoft.com/office/powerpoint/2010/main" val="1477273971"/>
+              </p:ext>
+            </p:extLst>
+          </p:nvPr>
+        </p:nvGraphicFramePr>
+        <p:xfrm>
+          <a:off x="6789831" y="1793938"/>
+          <a:ext cx="4563969" cy="3080986"/>
+        </p:xfrm>
+        <a:graphic>
+          <a:graphicData uri="http://schemas.openxmlformats.org/drawingml/2006/table">
+            <a:tbl>
+              <a:tblPr firstRow="1" lastRow="1" bandRow="1">
+                <a:tableStyleId>{5C22544A-7EE6-4342-B048-85BDC9FD1C3A}</a:tableStyleId>
+              </a:tblPr>
+              <a:tblGrid>
+                <a:gridCol w="1973093">
+                  <a:extLst>
+                    <a:ext uri="{9D8B030D-6E8A-4147-A177-3AD203B41FA5}">
+                      <a16:colId xmlns:a16="http://schemas.microsoft.com/office/drawing/2014/main" val="2775726035"/>
+                    </a:ext>
+                  </a:extLst>
+                </a:gridCol>
+                <a:gridCol w="1308246">
+                  <a:extLst>
+                    <a:ext uri="{9D8B030D-6E8A-4147-A177-3AD203B41FA5}">
+                      <a16:colId xmlns:a16="http://schemas.microsoft.com/office/drawing/2014/main" val="3784628675"/>
+                    </a:ext>
+                  </a:extLst>
+                </a:gridCol>
+                <a:gridCol w="1282630">
+                  <a:extLst>
+                    <a:ext uri="{9D8B030D-6E8A-4147-A177-3AD203B41FA5}">
+                      <a16:colId xmlns:a16="http://schemas.microsoft.com/office/drawing/2014/main" val="431904990"/>
+                    </a:ext>
+                  </a:extLst>
+                </a:gridCol>
+              </a:tblGrid>
+              <a:tr h="661852">
+                <a:tc>
+                  <a:txBody>
+                    <a:bodyPr/>
+                    <a:lstStyle/>
+                    <a:p>
+                      <a:r>
+                        <a:rPr lang="es-ES" sz="1400" dirty="0"/>
+                        <a:t>Tipo de Ausencia</a:t>
+                      </a:r>
+                      <a:endParaRPr lang="en-GB" sz="1400" dirty="0"/>
+                    </a:p>
+                  </a:txBody>
+                  <a:tcPr/>
+                </a:tc>
+                <a:tc>
+                  <a:txBody>
+                    <a:bodyPr/>
+                    <a:lstStyle/>
+                    <a:p>
+                      <a:pPr marL="0" marR="0" lvl="0" indent="0" algn="l" defTabSz="914400" rtl="0" eaLnBrk="1" fontAlgn="auto" latinLnBrk="0" hangingPunct="1">
+                        <a:lnSpc>
+                          <a:spcPct val="100000"/>
+                        </a:lnSpc>
+                        <a:spcBef>
+                          <a:spcPts val="0"/>
+                        </a:spcBef>
+                        <a:spcAft>
+                          <a:spcPts val="0"/>
+                        </a:spcAft>
+                        <a:buClrTx/>
+                        <a:buSzTx/>
+                        <a:buFontTx/>
+                        <a:buNone/>
+                        <a:tabLst/>
+                        <a:defRPr/>
+                      </a:pPr>
+                      <a:r>
+                        <a:rPr lang="es-ES" sz="1400" dirty="0"/>
+                        <a:t>Total de horas</a:t>
+                      </a:r>
+                      <a:endParaRPr lang="en-GB" sz="1400" dirty="0"/>
+                    </a:p>
+                    <a:p>
+                      <a:endParaRPr lang="en-GB" sz="1400" dirty="0"/>
+                    </a:p>
+                  </a:txBody>
+                  <a:tcPr/>
+                </a:tc>
+                <a:tc>
+                  <a:txBody>
+                    <a:bodyPr/>
+                    <a:lstStyle/>
+                    <a:p>
+                      <a:pPr marL="0" marR="0" lvl="0" indent="0" algn="l" defTabSz="914400" rtl="0" eaLnBrk="1" fontAlgn="auto" latinLnBrk="0" hangingPunct="1">
+                        <a:lnSpc>
+                          <a:spcPct val="100000"/>
+                        </a:lnSpc>
+                        <a:spcBef>
+                          <a:spcPts val="0"/>
+                        </a:spcBef>
+                        <a:spcAft>
+                          <a:spcPts val="0"/>
+                        </a:spcAft>
+                        <a:buClrTx/>
+                        <a:buSzTx/>
+                        <a:buFontTx/>
+                        <a:buNone/>
+                        <a:tabLst/>
+                        <a:defRPr/>
+                      </a:pPr>
+                      <a:r>
+                        <a:rPr lang="es-ES" sz="1400" dirty="0"/>
+                        <a:t>% sobre el total de horas</a:t>
+                      </a:r>
+                      <a:endParaRPr lang="en-GB" sz="1400" dirty="0"/>
+                    </a:p>
+                    <a:p>
+                      <a:endParaRPr lang="en-GB" sz="1400" dirty="0"/>
+                    </a:p>
+                  </a:txBody>
+                  <a:tcPr/>
+                </a:tc>
+                <a:extLst>
+                  <a:ext uri="{0D108BD9-81ED-4DB2-BD59-A6C34878D82A}">
+                    <a16:rowId xmlns:a16="http://schemas.microsoft.com/office/drawing/2014/main" val="3196153823"/>
+                  </a:ext>
+                </a:extLst>
+              </a:tr>
+              <a:tr h="492316">
+                <a:tc>
+                  <a:txBody>
+                    <a:bodyPr/>
+                    <a:lstStyle/>
+                    <a:p>
+                      <a:pPr marL="0" marR="0" lvl="0" indent="0" algn="l" defTabSz="914400" rtl="0" eaLnBrk="1" fontAlgn="auto" latinLnBrk="0" hangingPunct="1">
+                        <a:lnSpc>
+                          <a:spcPct val="100000"/>
+                        </a:lnSpc>
+                        <a:spcBef>
+                          <a:spcPts val="0"/>
+                        </a:spcBef>
+                        <a:spcAft>
+                          <a:spcPts val="0"/>
+                        </a:spcAft>
+                        <a:buClrTx/>
+                        <a:buSzTx/>
+                        <a:buFontTx/>
+                        <a:buNone/>
+                        <a:tabLst/>
+                        <a:defRPr/>
+                      </a:pPr>
+                      <a:r>
+                        <a:rPr lang="es-ES" sz="1400" dirty="0"/>
+                        <a:t>Very Short (media jornada)</a:t>
+                      </a:r>
+                      <a:endParaRPr lang="en-GB" sz="1400" dirty="0"/>
+                    </a:p>
+                  </a:txBody>
+                  <a:tcPr/>
+                </a:tc>
+                <a:tc>
+                  <a:txBody>
+                    <a:bodyPr/>
+                    <a:lstStyle/>
+                    <a:p>
+                      <a:pPr algn="ctr"/>
+                      <a:r>
+                        <a:rPr lang="es-ES" sz="1400" dirty="0"/>
+                        <a:t>905</a:t>
+                      </a:r>
+                      <a:endParaRPr lang="en-GB" sz="1400" dirty="0"/>
+                    </a:p>
+                  </a:txBody>
+                  <a:tcPr/>
+                </a:tc>
+                <a:tc>
+                  <a:txBody>
+                    <a:bodyPr/>
+                    <a:lstStyle/>
+                    <a:p>
+                      <a:pPr algn="ctr"/>
+                      <a:r>
+                        <a:rPr lang="es-ES" sz="1400" dirty="0"/>
+                        <a:t>17.95%</a:t>
+                      </a:r>
+                      <a:endParaRPr lang="en-GB" sz="1400" dirty="0"/>
+                    </a:p>
+                  </a:txBody>
+                  <a:tcPr/>
+                </a:tc>
+                <a:extLst>
+                  <a:ext uri="{0D108BD9-81ED-4DB2-BD59-A6C34878D82A}">
+                    <a16:rowId xmlns:a16="http://schemas.microsoft.com/office/drawing/2014/main" val="1118704882"/>
+                  </a:ext>
+                </a:extLst>
+              </a:tr>
+              <a:tr h="473693">
+                <a:tc>
+                  <a:txBody>
+                    <a:bodyPr/>
+                    <a:lstStyle/>
+                    <a:p>
+                      <a:pPr marL="0" marR="0" lvl="0" indent="0" algn="l" defTabSz="914400" rtl="0" eaLnBrk="1" fontAlgn="auto" latinLnBrk="0" hangingPunct="1">
+                        <a:lnSpc>
+                          <a:spcPct val="100000"/>
+                        </a:lnSpc>
+                        <a:spcBef>
+                          <a:spcPts val="0"/>
+                        </a:spcBef>
+                        <a:spcAft>
+                          <a:spcPts val="0"/>
+                        </a:spcAft>
+                        <a:buClrTx/>
+                        <a:buSzTx/>
+                        <a:buFontTx/>
+                        <a:buNone/>
+                        <a:tabLst/>
+                        <a:defRPr/>
+                      </a:pPr>
+                      <a:r>
+                        <a:rPr lang="es-ES" sz="1400" dirty="0"/>
+                        <a:t>Short (hasta 1 día)</a:t>
+                      </a:r>
+                      <a:endParaRPr lang="en-GB" sz="1400" dirty="0"/>
+                    </a:p>
+                  </a:txBody>
+                  <a:tcPr/>
+                </a:tc>
+                <a:tc>
+                  <a:txBody>
+                    <a:bodyPr/>
+                    <a:lstStyle/>
+                    <a:p>
+                      <a:pPr algn="ctr"/>
+                      <a:r>
+                        <a:rPr lang="es-ES" sz="1400" dirty="0"/>
+                        <a:t>1.698</a:t>
+                      </a:r>
+                      <a:endParaRPr lang="en-GB" sz="1400" dirty="0"/>
+                    </a:p>
+                  </a:txBody>
+                  <a:tcPr/>
+                </a:tc>
+                <a:tc>
+                  <a:txBody>
+                    <a:bodyPr/>
+                    <a:lstStyle/>
+                    <a:p>
+                      <a:pPr algn="ctr"/>
+                      <a:r>
+                        <a:rPr lang="es-ES" sz="1400" dirty="0"/>
+                        <a:t>33.67%</a:t>
+                      </a:r>
+                      <a:endParaRPr lang="en-GB" sz="1400" dirty="0"/>
+                    </a:p>
+                  </a:txBody>
+                  <a:tcPr/>
+                </a:tc>
+                <a:extLst>
+                  <a:ext uri="{0D108BD9-81ED-4DB2-BD59-A6C34878D82A}">
+                    <a16:rowId xmlns:a16="http://schemas.microsoft.com/office/drawing/2014/main" val="360341339"/>
+                  </a:ext>
+                </a:extLst>
+              </a:tr>
+              <a:tr h="473693">
+                <a:tc>
+                  <a:txBody>
+                    <a:bodyPr/>
+                    <a:lstStyle/>
+                    <a:p>
+                      <a:pPr marL="0" marR="0" lvl="0" indent="0" algn="l" defTabSz="914400" rtl="0" eaLnBrk="1" fontAlgn="auto" latinLnBrk="0" hangingPunct="1">
+                        <a:lnSpc>
+                          <a:spcPct val="100000"/>
+                        </a:lnSpc>
+                        <a:spcBef>
+                          <a:spcPts val="0"/>
+                        </a:spcBef>
+                        <a:spcAft>
+                          <a:spcPts val="0"/>
+                        </a:spcAft>
+                        <a:buClrTx/>
+                        <a:buSzTx/>
+                        <a:buFontTx/>
+                        <a:buNone/>
+                        <a:tabLst/>
+                        <a:defRPr/>
+                      </a:pPr>
+                      <a:r>
+                        <a:rPr lang="es-ES" sz="1400" dirty="0"/>
+                        <a:t>Medium (hasta 2 días)</a:t>
+                      </a:r>
+                      <a:endParaRPr lang="en-GB" sz="1400" dirty="0"/>
+                    </a:p>
+                  </a:txBody>
+                  <a:tcPr/>
+                </a:tc>
+                <a:tc>
+                  <a:txBody>
+                    <a:bodyPr/>
+                    <a:lstStyle/>
+                    <a:p>
+                      <a:pPr algn="ctr"/>
+                      <a:r>
+                        <a:rPr lang="es-ES" sz="1400" dirty="0"/>
+                        <a:t>688</a:t>
+                      </a:r>
+                      <a:endParaRPr lang="en-GB" sz="1400" dirty="0"/>
+                    </a:p>
+                  </a:txBody>
+                  <a:tcPr/>
+                </a:tc>
+                <a:tc>
+                  <a:txBody>
+                    <a:bodyPr/>
+                    <a:lstStyle/>
+                    <a:p>
+                      <a:pPr algn="ctr"/>
+                      <a:r>
+                        <a:rPr lang="es-ES" sz="1400" dirty="0"/>
+                        <a:t>13.64%</a:t>
+                      </a:r>
+                      <a:endParaRPr lang="en-GB" sz="1400" dirty="0"/>
+                    </a:p>
+                  </a:txBody>
+                  <a:tcPr/>
+                </a:tc>
+                <a:extLst>
+                  <a:ext uri="{0D108BD9-81ED-4DB2-BD59-A6C34878D82A}">
+                    <a16:rowId xmlns:a16="http://schemas.microsoft.com/office/drawing/2014/main" val="1701159774"/>
+                  </a:ext>
+                </a:extLst>
+              </a:tr>
+              <a:tr h="278643">
+                <a:tc>
+                  <a:txBody>
+                    <a:bodyPr/>
+                    <a:lstStyle/>
+                    <a:p>
+                      <a:pPr marL="0" marR="0" lvl="0" indent="0" algn="l" defTabSz="914400" rtl="0" eaLnBrk="1" fontAlgn="auto" latinLnBrk="0" hangingPunct="1">
+                        <a:lnSpc>
+                          <a:spcPct val="100000"/>
+                        </a:lnSpc>
+                        <a:spcBef>
+                          <a:spcPts val="0"/>
+                        </a:spcBef>
+                        <a:spcAft>
+                          <a:spcPts val="0"/>
+                        </a:spcAft>
+                        <a:buClrTx/>
+                        <a:buSzTx/>
+                        <a:buFontTx/>
+                        <a:buNone/>
+                        <a:tabLst/>
+                        <a:defRPr/>
+                      </a:pPr>
+                      <a:r>
+                        <a:rPr lang="es-ES" sz="1400" dirty="0"/>
+                        <a:t>Long (+ 2 días)</a:t>
+                      </a:r>
+                      <a:endParaRPr lang="en-GB" sz="1400" dirty="0"/>
+                    </a:p>
+                  </a:txBody>
+                  <a:tcPr/>
+                </a:tc>
+                <a:tc>
+                  <a:txBody>
+                    <a:bodyPr/>
+                    <a:lstStyle/>
+                    <a:p>
+                      <a:pPr algn="ctr"/>
+                      <a:r>
+                        <a:rPr lang="es-ES" sz="1400" dirty="0"/>
+                        <a:t>1.752</a:t>
+                      </a:r>
+                      <a:endParaRPr lang="en-GB" sz="1400" dirty="0"/>
+                    </a:p>
+                  </a:txBody>
+                  <a:tcPr/>
+                </a:tc>
+                <a:tc>
+                  <a:txBody>
+                    <a:bodyPr/>
+                    <a:lstStyle/>
+                    <a:p>
+                      <a:pPr algn="ctr"/>
+                      <a:r>
+                        <a:rPr lang="es-ES" sz="1400" dirty="0"/>
+                        <a:t>34.74%</a:t>
+                      </a:r>
+                      <a:endParaRPr lang="en-GB" sz="1400" dirty="0"/>
+                    </a:p>
+                  </a:txBody>
+                  <a:tcPr/>
+                </a:tc>
+                <a:extLst>
+                  <a:ext uri="{0D108BD9-81ED-4DB2-BD59-A6C34878D82A}">
+                    <a16:rowId xmlns:a16="http://schemas.microsoft.com/office/drawing/2014/main" val="378245049"/>
+                  </a:ext>
+                </a:extLst>
+              </a:tr>
+              <a:tr h="334372">
+                <a:tc>
+                  <a:txBody>
+                    <a:bodyPr/>
+                    <a:lstStyle/>
+                    <a:p>
+                      <a:r>
+                        <a:rPr lang="es-ES" dirty="0"/>
+                        <a:t>Total</a:t>
+                      </a:r>
+                      <a:endParaRPr lang="en-GB" dirty="0"/>
+                    </a:p>
+                  </a:txBody>
+                  <a:tcPr/>
+                </a:tc>
+                <a:tc>
+                  <a:txBody>
+                    <a:bodyPr/>
+                    <a:lstStyle/>
+                    <a:p>
+                      <a:pPr algn="ctr"/>
+                      <a:r>
+                        <a:rPr lang="es-ES" dirty="0"/>
+                        <a:t>5.043</a:t>
+                      </a:r>
+                      <a:endParaRPr lang="en-GB" dirty="0"/>
+                    </a:p>
+                  </a:txBody>
+                  <a:tcPr/>
+                </a:tc>
+                <a:tc>
+                  <a:txBody>
+                    <a:bodyPr/>
+                    <a:lstStyle/>
+                    <a:p>
+                      <a:pPr algn="ctr"/>
+                      <a:endParaRPr lang="en-GB" dirty="0"/>
+                    </a:p>
+                  </a:txBody>
+                  <a:tcPr/>
+                </a:tc>
+                <a:extLst>
+                  <a:ext uri="{0D108BD9-81ED-4DB2-BD59-A6C34878D82A}">
+                    <a16:rowId xmlns:a16="http://schemas.microsoft.com/office/drawing/2014/main" val="464389060"/>
+                  </a:ext>
+                </a:extLst>
+              </a:tr>
+            </a:tbl>
+          </a:graphicData>
+        </a:graphic>
+      </p:graphicFrame>
+      <p:sp>
+        <p:nvSpPr>
+          <p:cNvPr id="11" name="Rectangle: Rounded Corners 10">
+            <a:extLst>
+              <a:ext uri="{FF2B5EF4-FFF2-40B4-BE49-F238E27FC236}">
+                <a16:creationId xmlns:a16="http://schemas.microsoft.com/office/drawing/2014/main" id="{76FAF840-17EB-C13A-8B01-F443F9DFF87E}"/>
+              </a:ext>
+            </a:extLst>
+          </p:cNvPr>
+          <p:cNvSpPr/>
+          <p:nvPr/>
+        </p:nvSpPr>
+        <p:spPr>
+          <a:xfrm>
+            <a:off x="6789832" y="1117438"/>
+            <a:ext cx="4563968" cy="476002"/>
+          </a:xfrm>
+          <a:prstGeom prst="roundRect">
+            <a:avLst/>
+          </a:prstGeom>
+        </p:spPr>
+        <p:style>
+          <a:lnRef idx="2">
+            <a:schemeClr val="accent1">
+              <a:shade val="15000"/>
+            </a:schemeClr>
+          </a:lnRef>
+          <a:fillRef idx="1">
+            <a:schemeClr val="accent1"/>
+          </a:fillRef>
+          <a:effectRef idx="0">
+            <a:schemeClr val="accent1"/>
+          </a:effectRef>
+          <a:fontRef idx="minor">
+            <a:schemeClr val="lt1"/>
+          </a:fontRef>
+        </p:style>
+        <p:txBody>
+          <a:bodyPr rtlCol="0" anchor="ctr"/>
+          <a:lstStyle/>
+          <a:p>
+            <a:pPr algn="ctr"/>
+            <a:r>
+              <a:rPr lang="es-ES" b="1" dirty="0"/>
+              <a:t>% Horas de Ausentismo (año)</a:t>
+            </a:r>
+            <a:r>
+              <a:rPr lang="en-GB" b="1" dirty="0"/>
+              <a:t> – 7.36%</a:t>
+            </a:r>
+            <a:endParaRPr lang="es-ES" b="1" dirty="0"/>
+          </a:p>
+        </p:txBody>
+      </p:sp>
+      <p:sp>
+        <p:nvSpPr>
+          <p:cNvPr id="13" name="Rectangle 12">
+            <a:extLst>
+              <a:ext uri="{FF2B5EF4-FFF2-40B4-BE49-F238E27FC236}">
+                <a16:creationId xmlns:a16="http://schemas.microsoft.com/office/drawing/2014/main" id="{4732A096-E024-AED6-8D31-064054C6AB74}"/>
+              </a:ext>
+            </a:extLst>
+          </p:cNvPr>
+          <p:cNvSpPr/>
+          <p:nvPr/>
+        </p:nvSpPr>
+        <p:spPr>
+          <a:xfrm>
+            <a:off x="69121" y="825263"/>
+            <a:ext cx="10598046" cy="45719"/>
+          </a:xfrm>
+          <a:prstGeom prst="rect">
+            <a:avLst/>
+          </a:prstGeom>
+          <a:ln>
+            <a:noFill/>
+          </a:ln>
+        </p:spPr>
+        <p:style>
+          <a:lnRef idx="2">
+            <a:schemeClr val="accent1">
+              <a:shade val="15000"/>
+            </a:schemeClr>
+          </a:lnRef>
+          <a:fillRef idx="1">
+            <a:schemeClr val="accent1"/>
+          </a:fillRef>
+          <a:effectRef idx="0">
+            <a:schemeClr val="accent1"/>
+          </a:effectRef>
+          <a:fontRef idx="minor">
+            <a:schemeClr val="lt1"/>
+          </a:fontRef>
+        </p:style>
+        <p:txBody>
+          <a:bodyPr rtlCol="0" anchor="ctr"/>
+          <a:lstStyle/>
+          <a:p>
+            <a:pPr algn="ctr"/>
+            <a:endParaRPr lang="en-GB"/>
           </a:p>
         </p:txBody>
       </p:sp>
       <p:pic>
         <p:nvPicPr>
-          <p:cNvPr id="7" name="Content Placeholder 6">
-            <a:extLst>
-              <a:ext uri="{FF2B5EF4-FFF2-40B4-BE49-F238E27FC236}">
-                <a16:creationId xmlns:a16="http://schemas.microsoft.com/office/drawing/2014/main" id="{E343A460-0061-9980-BD58-1B802E49313E}"/>
+          <p:cNvPr id="19" name="Picture 18">
+            <a:extLst>
+              <a:ext uri="{FF2B5EF4-FFF2-40B4-BE49-F238E27FC236}">
+                <a16:creationId xmlns:a16="http://schemas.microsoft.com/office/drawing/2014/main" id="{F94D585C-14B1-A8F6-EB10-B0FCFEEE27D4}"/>
               </a:ext>
             </a:extLst>
           </p:cNvPr>
           <p:cNvPicPr>
-            <a:picLocks noGrp="1" noChangeAspect="1"/>
+            <a:picLocks noChangeAspect="1"/>
           </p:cNvPicPr>
-          <p:nvPr>
-            <p:ph idx="30"/>
-          </p:nvPr>
+          <p:nvPr/>
         </p:nvPicPr>
         <p:blipFill>
           <a:blip r:embed="rId3"/>
@@ -11922,38 +12606,8 @@
         </p:blipFill>
         <p:spPr>
           <a:xfrm>
-            <a:off x="333652" y="2053653"/>
-            <a:ext cx="5336668" cy="3373438"/>
-          </a:xfrm>
-          <a:prstGeom prst="rect">
-            <a:avLst/>
-          </a:prstGeom>
-        </p:spPr>
-      </p:pic>
-      <p:pic>
-        <p:nvPicPr>
-          <p:cNvPr id="5" name="Picture 4">
-            <a:extLst>
-              <a:ext uri="{FF2B5EF4-FFF2-40B4-BE49-F238E27FC236}">
-                <a16:creationId xmlns:a16="http://schemas.microsoft.com/office/drawing/2014/main" id="{4FE71423-B06A-2A95-FE4C-ECAF5CB44988}"/>
-              </a:ext>
-            </a:extLst>
-          </p:cNvPr>
-          <p:cNvPicPr>
-            <a:picLocks noChangeAspect="1"/>
-          </p:cNvPicPr>
-          <p:nvPr/>
-        </p:nvPicPr>
-        <p:blipFill>
-          <a:blip r:embed="rId4"/>
-          <a:stretch>
-            <a:fillRect/>
-          </a:stretch>
-        </p:blipFill>
-        <p:spPr>
-          <a:xfrm>
-            <a:off x="6091550" y="1834548"/>
-            <a:ext cx="5038100" cy="3592543"/>
+            <a:off x="311461" y="1117438"/>
+            <a:ext cx="6377343" cy="4078825"/>
           </a:xfrm>
           <a:prstGeom prst="rect">
             <a:avLst/>
@@ -11963,7 +12617,7 @@
     </p:spTree>
     <p:extLst>
       <p:ext uri="{BB962C8B-B14F-4D97-AF65-F5344CB8AC3E}">
-        <p14:creationId xmlns:p14="http://schemas.microsoft.com/office/powerpoint/2010/main" val="2791766227"/>
+        <p14:creationId xmlns:p14="http://schemas.microsoft.com/office/powerpoint/2010/main" val="3971899123"/>
       </p:ext>
     </p:extLst>
   </p:cSld>
@@ -11981,7 +12635,7 @@
         <p:cNvPr id="1" name="">
           <a:extLst>
             <a:ext uri="{FF2B5EF4-FFF2-40B4-BE49-F238E27FC236}">
-              <a16:creationId xmlns:a16="http://schemas.microsoft.com/office/drawing/2014/main" id="{A3C58946-A531-561B-3AA3-35914E7CCB16}"/>
+              <a16:creationId xmlns:a16="http://schemas.microsoft.com/office/drawing/2014/main" id="{95F14E69-8F85-2514-D380-2C2E0954BD2E}"/>
             </a:ext>
           </a:extLst>
         </p:cNvPr>
@@ -12001,7 +12655,7 @@
           <p:cNvPr id="3" name="Title 2">
             <a:extLst>
               <a:ext uri="{FF2B5EF4-FFF2-40B4-BE49-F238E27FC236}">
-                <a16:creationId xmlns:a16="http://schemas.microsoft.com/office/drawing/2014/main" id="{C15BCD14-0CCC-526E-9180-8F037954D3AD}"/>
+                <a16:creationId xmlns:a16="http://schemas.microsoft.com/office/drawing/2014/main" id="{3DDE266A-98F7-0E25-D71F-2AEAF9FCECB6}"/>
               </a:ext>
             </a:extLst>
           </p:cNvPr>
@@ -12014,7 +12668,7 @@
         </p:nvSpPr>
         <p:spPr>
           <a:xfrm>
-            <a:off x="914399" y="731520"/>
+            <a:off x="239842" y="188275"/>
             <a:ext cx="8867553" cy="788936"/>
           </a:xfrm>
         </p:spPr>
@@ -12025,8 +12679,8 @@
           <a:lstStyle/>
           <a:p>
             <a:r>
-              <a:rPr lang="es-ES_tradnl" noProof="1"/>
-              <a:t>Analisis de la Variación Temporal del Ausentismo</a:t>
+              <a:rPr lang="es-ES" dirty="0"/>
+              <a:t>Análisis de la Variación Temporal del Ausentismo</a:t>
             </a:r>
           </a:p>
         </p:txBody>
@@ -12036,7 +12690,7 @@
           <p:cNvPr id="6" name="Slide Number Placeholder 13">
             <a:extLst>
               <a:ext uri="{FF2B5EF4-FFF2-40B4-BE49-F238E27FC236}">
-                <a16:creationId xmlns:a16="http://schemas.microsoft.com/office/drawing/2014/main" id="{2161D003-994C-C1AF-75C5-78249C16A41F}"/>
+                <a16:creationId xmlns:a16="http://schemas.microsoft.com/office/drawing/2014/main" id="{6EF2F0E3-CF12-8773-FEB6-4B5A6EAEA995}"/>
               </a:ext>
             </a:extLst>
           </p:cNvPr>
@@ -12170,7 +12824,7 @@
               <a:defRPr/>
             </a:pPr>
             <a:fld id="{47FEACEE-25B4-4A2D-B147-27296E36371D}" type="slidenum">
-              <a:rPr kumimoji="0" lang="es-ES_tradnl" sz="1200" u="none" strike="noStrike" kern="1200" cap="none" spc="0" normalizeH="0" baseline="0" noProof="1" smtClean="0">
+              <a:rPr kumimoji="0" lang="en-US" altLang="zh-CN" sz="1200" u="none" strike="noStrike" kern="1200" cap="none" spc="0" normalizeH="0" baseline="0" smtClean="0">
                 <a:ln>
                   <a:noFill/>
                 </a:ln>
@@ -12200,7 +12854,7 @@
               </a:pPr>
               <a:t>9</a:t>
             </a:fld>
-            <a:endParaRPr kumimoji="0" lang="es-ES_tradnl" sz="1200" u="none" strike="noStrike" kern="1200" cap="none" spc="0" normalizeH="0" baseline="0" noProof="1">
+            <a:endParaRPr kumimoji="0" lang="en-US" altLang="zh-CN" sz="1200" u="none" strike="noStrike" kern="1200" cap="none" spc="0" normalizeH="0" baseline="0" dirty="0">
               <a:ln>
                 <a:noFill/>
               </a:ln>
@@ -12219,7 +12873,7 @@
           <p:cNvPr id="2" name="Slide Number Placeholder 1">
             <a:extLst>
               <a:ext uri="{FF2B5EF4-FFF2-40B4-BE49-F238E27FC236}">
-                <a16:creationId xmlns:a16="http://schemas.microsoft.com/office/drawing/2014/main" id="{CFC1DB30-6C5F-A09A-EF49-666C8F08A983}"/>
+                <a16:creationId xmlns:a16="http://schemas.microsoft.com/office/drawing/2014/main" id="{77182FC7-FF71-C779-28D2-650FA908E188}"/>
               </a:ext>
             </a:extLst>
           </p:cNvPr>
@@ -12236,11 +12890,11 @@
           <a:lstStyle/>
           <a:p>
             <a:fld id="{47FEACEE-25B4-4A2D-B147-27296E36371D}" type="slidenum">
-              <a:rPr lang="es-ES_tradnl" noProof="1" smtClean="0"/>
+              <a:rPr lang="en-US" altLang="zh-CN" noProof="0" smtClean="0"/>
               <a:pPr/>
               <a:t>9</a:t>
             </a:fld>
-            <a:endParaRPr lang="es-ES_tradnl" noProof="1"/>
+            <a:endParaRPr lang="en-US" altLang="zh-CN" noProof="0" dirty="0"/>
           </a:p>
         </p:txBody>
       </p:sp>
@@ -12249,7 +12903,7 @@
           <p:cNvPr id="7" name="Content Placeholder 6">
             <a:extLst>
               <a:ext uri="{FF2B5EF4-FFF2-40B4-BE49-F238E27FC236}">
-                <a16:creationId xmlns:a16="http://schemas.microsoft.com/office/drawing/2014/main" id="{4CA7B066-56F3-903C-55CF-5E4907F2B09E}"/>
+                <a16:creationId xmlns:a16="http://schemas.microsoft.com/office/drawing/2014/main" id="{009C754B-B68F-142A-B20E-5A46E009EFD4}"/>
               </a:ext>
             </a:extLst>
           </p:cNvPr>
@@ -12268,8 +12922,8 @@
         </p:blipFill>
         <p:spPr>
           <a:xfrm>
-            <a:off x="528612" y="1708879"/>
-            <a:ext cx="4507604" cy="2492440"/>
+            <a:off x="664284" y="1791966"/>
+            <a:ext cx="4679913" cy="2830109"/>
           </a:xfrm>
           <a:prstGeom prst="rect">
             <a:avLst/>
@@ -12281,7 +12935,7 @@
           <p:cNvPr id="9" name="Picture 8">
             <a:extLst>
               <a:ext uri="{FF2B5EF4-FFF2-40B4-BE49-F238E27FC236}">
-                <a16:creationId xmlns:a16="http://schemas.microsoft.com/office/drawing/2014/main" id="{939BC8FE-223B-9DD7-262A-A777F126EA64}"/>
+                <a16:creationId xmlns:a16="http://schemas.microsoft.com/office/drawing/2014/main" id="{1DBAA50C-2CA4-56AA-8757-800B3CA74426}"/>
               </a:ext>
             </a:extLst>
           </p:cNvPr>
@@ -12298,48 +12952,243 @@
         </p:blipFill>
         <p:spPr>
           <a:xfrm>
-            <a:off x="3746382" y="4153915"/>
-            <a:ext cx="4041775" cy="2704085"/>
+            <a:off x="5592454" y="1802963"/>
+            <a:ext cx="5140429" cy="2775311"/>
           </a:xfrm>
           <a:prstGeom prst="rect">
             <a:avLst/>
           </a:prstGeom>
         </p:spPr>
       </p:pic>
-      <p:pic>
-        <p:nvPicPr>
-          <p:cNvPr id="11" name="Picture 10">
-            <a:extLst>
-              <a:ext uri="{FF2B5EF4-FFF2-40B4-BE49-F238E27FC236}">
-                <a16:creationId xmlns:a16="http://schemas.microsoft.com/office/drawing/2014/main" id="{E0CAEE3F-AF86-05B7-D1DC-1E272BD82B3E}"/>
-              </a:ext>
-            </a:extLst>
-          </p:cNvPr>
-          <p:cNvPicPr>
-            <a:picLocks noChangeAspect="1"/>
-          </p:cNvPicPr>
+      <p:sp>
+        <p:nvSpPr>
+          <p:cNvPr id="4" name="Rectangle 3">
+            <a:extLst>
+              <a:ext uri="{FF2B5EF4-FFF2-40B4-BE49-F238E27FC236}">
+                <a16:creationId xmlns:a16="http://schemas.microsoft.com/office/drawing/2014/main" id="{CEFE18A4-11F8-C3C1-E724-5966BC3D1A6A}"/>
+              </a:ext>
+            </a:extLst>
+          </p:cNvPr>
+          <p:cNvSpPr/>
           <p:nvPr/>
-        </p:nvPicPr>
-        <p:blipFill>
-          <a:blip r:embed="rId5"/>
-          <a:stretch>
-            <a:fillRect/>
-          </a:stretch>
-        </p:blipFill>
+        </p:nvSpPr>
         <p:spPr>
           <a:xfrm>
-            <a:off x="6424731" y="1805261"/>
-            <a:ext cx="5112606" cy="2396058"/>
+            <a:off x="69121" y="825263"/>
+            <a:ext cx="10598046" cy="45719"/>
           </a:xfrm>
           <a:prstGeom prst="rect">
             <a:avLst/>
           </a:prstGeom>
+          <a:ln>
+            <a:noFill/>
+          </a:ln>
         </p:spPr>
-      </p:pic>
+        <p:style>
+          <a:lnRef idx="2">
+            <a:schemeClr val="accent1">
+              <a:shade val="15000"/>
+            </a:schemeClr>
+          </a:lnRef>
+          <a:fillRef idx="1">
+            <a:schemeClr val="accent1"/>
+          </a:fillRef>
+          <a:effectRef idx="0">
+            <a:schemeClr val="accent1"/>
+          </a:effectRef>
+          <a:fontRef idx="minor">
+            <a:schemeClr val="lt1"/>
+          </a:fontRef>
+        </p:style>
+        <p:txBody>
+          <a:bodyPr rtlCol="0" anchor="ctr"/>
+          <a:lstStyle/>
+          <a:p>
+            <a:pPr algn="ctr"/>
+            <a:endParaRPr lang="en-GB"/>
+          </a:p>
+        </p:txBody>
+      </p:sp>
+      <p:sp>
+        <p:nvSpPr>
+          <p:cNvPr id="10" name="Rectangle: Rounded Corners 9">
+            <a:extLst>
+              <a:ext uri="{FF2B5EF4-FFF2-40B4-BE49-F238E27FC236}">
+                <a16:creationId xmlns:a16="http://schemas.microsoft.com/office/drawing/2014/main" id="{6D965C8D-0B36-32ED-164E-17DC2AAE3B04}"/>
+              </a:ext>
+            </a:extLst>
+          </p:cNvPr>
+          <p:cNvSpPr/>
+          <p:nvPr/>
+        </p:nvSpPr>
+        <p:spPr>
+          <a:xfrm>
+            <a:off x="1048312" y="1088679"/>
+            <a:ext cx="4288186" cy="525520"/>
+          </a:xfrm>
+          <a:prstGeom prst="roundRect">
+            <a:avLst/>
+          </a:prstGeom>
+        </p:spPr>
+        <p:style>
+          <a:lnRef idx="2">
+            <a:schemeClr val="accent1">
+              <a:shade val="15000"/>
+            </a:schemeClr>
+          </a:lnRef>
+          <a:fillRef idx="1">
+            <a:schemeClr val="accent1"/>
+          </a:fillRef>
+          <a:effectRef idx="0">
+            <a:schemeClr val="accent1"/>
+          </a:effectRef>
+          <a:fontRef idx="minor">
+            <a:schemeClr val="lt1"/>
+          </a:fontRef>
+        </p:style>
+        <p:txBody>
+          <a:bodyPr rtlCol="0" anchor="ctr"/>
+          <a:lstStyle/>
+          <a:p>
+            <a:pPr algn="ctr"/>
+            <a:r>
+              <a:rPr lang="es-ES" b="1" dirty="0"/>
+              <a:t>Mes pico (Horas Ausencias) | Marzo – 755</a:t>
+            </a:r>
+          </a:p>
+        </p:txBody>
+      </p:sp>
+      <p:sp>
+        <p:nvSpPr>
+          <p:cNvPr id="14" name="TextBox 13">
+            <a:extLst>
+              <a:ext uri="{FF2B5EF4-FFF2-40B4-BE49-F238E27FC236}">
+                <a16:creationId xmlns:a16="http://schemas.microsoft.com/office/drawing/2014/main" id="{62526B33-1D67-8E53-2255-8606382476AF}"/>
+              </a:ext>
+            </a:extLst>
+          </p:cNvPr>
+          <p:cNvSpPr txBox="1"/>
+          <p:nvPr/>
+        </p:nvSpPr>
+        <p:spPr>
+          <a:xfrm>
+            <a:off x="794476" y="4799634"/>
+            <a:ext cx="4679913" cy="646331"/>
+          </a:xfrm>
+          <a:prstGeom prst="rect">
+            <a:avLst/>
+          </a:prstGeom>
+          <a:noFill/>
+        </p:spPr>
+        <p:txBody>
+          <a:bodyPr wrap="square" rtlCol="0">
+            <a:spAutoFit/>
+          </a:bodyPr>
+          <a:lstStyle/>
+          <a:p>
+            <a:r>
+              <a:rPr lang="es-ES" dirty="0" err="1"/>
+              <a:t>Outliers</a:t>
+            </a:r>
+            <a:r>
+              <a:rPr lang="es-ES" dirty="0"/>
+              <a:t> – Muy presentes en </a:t>
+            </a:r>
+            <a:r>
+              <a:rPr lang="es-ES" b="1" dirty="0"/>
+              <a:t>Marzo y Julio</a:t>
+            </a:r>
+          </a:p>
+          <a:p>
+            <a:endParaRPr lang="es-ES" dirty="0"/>
+          </a:p>
+        </p:txBody>
+      </p:sp>
+      <p:sp>
+        <p:nvSpPr>
+          <p:cNvPr id="5" name="TextBox 4">
+            <a:extLst>
+              <a:ext uri="{FF2B5EF4-FFF2-40B4-BE49-F238E27FC236}">
+                <a16:creationId xmlns:a16="http://schemas.microsoft.com/office/drawing/2014/main" id="{047D6945-D926-ACC6-985D-6D7E46D62F68}"/>
+              </a:ext>
+            </a:extLst>
+          </p:cNvPr>
+          <p:cNvSpPr txBox="1"/>
+          <p:nvPr/>
+        </p:nvSpPr>
+        <p:spPr>
+          <a:xfrm>
+            <a:off x="6109315" y="4590149"/>
+            <a:ext cx="4623568" cy="1754326"/>
+          </a:xfrm>
+          <a:prstGeom prst="rect">
+            <a:avLst/>
+          </a:prstGeom>
+          <a:noFill/>
+        </p:spPr>
+        <p:txBody>
+          <a:bodyPr wrap="square" rtlCol="0">
+            <a:spAutoFit/>
+          </a:bodyPr>
+          <a:lstStyle/>
+          <a:p>
+            <a:r>
+              <a:rPr lang="es-ES" dirty="0"/>
+              <a:t>Estacion con más horas de ausencias: </a:t>
+            </a:r>
+            <a:r>
+              <a:rPr lang="es-ES" b="1" dirty="0"/>
+              <a:t>Invierno</a:t>
+            </a:r>
+          </a:p>
+          <a:p>
+            <a:endParaRPr lang="es-ES" dirty="0"/>
+          </a:p>
+          <a:p>
+            <a:r>
+              <a:rPr lang="es-ES" dirty="0"/>
+              <a:t>De otoño a invierno:</a:t>
+            </a:r>
+          </a:p>
+          <a:p>
+            <a:pPr marL="285750" indent="-285750">
+              <a:buFont typeface="Arial" panose="020B0604020202020204" pitchFamily="34" charset="0"/>
+              <a:buChar char="•"/>
+            </a:pPr>
+            <a:r>
+              <a:rPr lang="es-ES" dirty="0"/>
+              <a:t>bajas medias  +</a:t>
+            </a:r>
+            <a:r>
+              <a:rPr lang="es-ES" b="1" dirty="0"/>
+              <a:t>90.5%</a:t>
+            </a:r>
+            <a:r>
+              <a:rPr lang="es-ES" dirty="0"/>
+              <a:t> </a:t>
+            </a:r>
+          </a:p>
+          <a:p>
+            <a:pPr marL="285750" indent="-285750">
+              <a:buFont typeface="Arial" panose="020B0604020202020204" pitchFamily="34" charset="0"/>
+              <a:buChar char="•"/>
+            </a:pPr>
+            <a:r>
+              <a:rPr lang="es-ES" dirty="0"/>
+              <a:t>bajas largas +</a:t>
+            </a:r>
+            <a:r>
+              <a:rPr lang="es-ES" b="1" dirty="0"/>
+              <a:t>68%</a:t>
+            </a:r>
+            <a:endParaRPr lang="en-GB" b="1" dirty="0"/>
+          </a:p>
+        </p:txBody>
+      </p:sp>
     </p:spTree>
     <p:extLst>
       <p:ext uri="{BB962C8B-B14F-4D97-AF65-F5344CB8AC3E}">
-        <p14:creationId xmlns:p14="http://schemas.microsoft.com/office/powerpoint/2010/main" val="339048653"/>
+        <p14:creationId xmlns:p14="http://schemas.microsoft.com/office/powerpoint/2010/main" val="469948459"/>
       </p:ext>
     </p:extLst>
   </p:cSld>
